--- a/Dx_AR_vs_artrosis.pptx
+++ b/Dx_AR_vs_artrosis.pptx
@@ -7993,7 +7993,7 @@
                 <a:ea typeface="Calibri" pitchFamily="34" charset="-122"/>
                 <a:cs typeface="Calibri" pitchFamily="34" charset="-120"/>
               </a:rPr>
-              <a:t>12. van Steenbergen HW, Aletaha D, Beaart-van de Voorde LJJ, Brouwer E, Codreanu C, Combe B, et al. EULAR definition of arthralgia suspicious for progression to rheumatoid arthritis. Ann Rheum Dis. 2017;76(3):491-6.</a:t>
+              <a:t>13. van Steenbergen HW, Aletaha D, Beaart-van de Voorde LJJ, Brouwer E, Codreanu C, Combe B, et al. EULAR definition of arthralgia suspicious for progression to rheumatoid arthritis. Ann Rheum Dis. 2017;76(3):491-6.</a:t>
             </a:r>
             <a:endParaRPr lang="en-US" sz="900" dirty="0"/>
           </a:p>
@@ -9355,7 +9355,7 @@
                 <a:ea typeface="Calibri" pitchFamily="34" charset="-122"/>
                 <a:cs typeface="Calibri" pitchFamily="34" charset="-120"/>
               </a:rPr>
-              <a:t>8. Kolasinski SL, Neogi T, Hochberg MC, Oatis C, Guyatt G, Block J, et al. 2019 ACR/Arthritis Foundation guideline for the management of osteoarthritis of the hand, hip, and knee. Arthritis Rheumatol. 2020;72(2):220-33.</a:t>
+              <a:t>8. Tang S, Zhang C, Oo WM, Fu K, Risberg MA, Bierma-Zeinstra SM, et al. Osteoarthritis. Nat Rev Dis Primers. 2025;11(1):10.</a:t>
             </a:r>
             <a:endParaRPr lang="en-US" sz="900" dirty="0"/>
           </a:p>
@@ -10001,7 +10001,7 @@
                 <a:ea typeface="Calibri" pitchFamily="34" charset="-122"/>
                 <a:cs typeface="Calibri" pitchFamily="34" charset="-120"/>
               </a:rPr>
-              <a:t>10. Dell’Isola A, Allan R, Smith SL, Marreiros SS, Steultjens M. Identification of clinical phenotypes in knee osteoarthritis: a systematic review of the literature. BMC Musculoskelet Disord. 2016;17:425.</a:t>
+              <a:t>11. Dell’Isola A, Allan R, Smith SL, Marreiros SS, Steultjens M. Identification of clinical phenotypes in knee osteoarthritis: a systematic review of the literature. BMC Musculoskelet Disord. 2016;17:425.</a:t>
             </a:r>
             <a:endParaRPr lang="en-US" sz="900" dirty="0"/>
           </a:p>
@@ -10018,7 +10018,7 @@
                 <a:ea typeface="Calibri" pitchFamily="34" charset="-122"/>
                 <a:cs typeface="Calibri" pitchFamily="34" charset="-120"/>
               </a:rPr>
-              <a:t>11. Deveza LA, Nelson AE, Loeser RF. Phenotypes of osteoarthritis: current state and future implications. Clin Exp Rheumatol. 2019;37 Suppl 120(5):S64-72.</a:t>
+              <a:t>12. Deveza LA, Nelson AE, Loeser RF. Phenotypes of osteoarthritis: current state and future implications. Clin Exp Rheumatol. 2019;37 Suppl 120(5):S64-72.</a:t>
             </a:r>
             <a:endParaRPr lang="en-US" sz="900" dirty="0"/>
           </a:p>
@@ -11267,24 +11267,24 @@
                 <a:ea typeface="Calibri" pitchFamily="34" charset="-122"/>
                 <a:cs typeface="Calibri" pitchFamily="34" charset="-120"/>
               </a:rPr>
+              <a:t>8. Tang S, Zhang C, Oo WM, Fu K, Risberg MA, Bierma-Zeinstra SM, et al. Osteoarthritis. Nat Rev Dis Primers. 2025;11(1):10.</a:t>
+            </a:r>
+            <a:endParaRPr lang="en-US" sz="900" dirty="0"/>
+          </a:p>
+          <a:p>
+            <a:pPr indent="0" marL="0">
+              <a:buNone/>
+            </a:pPr>
+            <a:r>
+              <a:rPr lang="en-US" sz="900" dirty="0">
+                <a:solidFill>
+                  <a:srgbClr val="141821"/>
+                </a:solidFill>
+                <a:latin typeface="Calibri" pitchFamily="34" charset="0"/>
+                <a:ea typeface="Calibri" pitchFamily="34" charset="-122"/>
+                <a:cs typeface="Calibri" pitchFamily="34" charset="-120"/>
+              </a:rPr>
               <a:t>7. Hunter DJ, Bierma-Zeinstra S. Osteoarthritis. Lancet. 2019;393(10182):1745-59.</a:t>
-            </a:r>
-            <a:endParaRPr lang="en-US" sz="900" dirty="0"/>
-          </a:p>
-          <a:p>
-            <a:pPr indent="0" marL="0">
-              <a:buNone/>
-            </a:pPr>
-            <a:r>
-              <a:rPr lang="en-US" sz="900" dirty="0">
-                <a:solidFill>
-                  <a:srgbClr val="141821"/>
-                </a:solidFill>
-                <a:latin typeface="Calibri" pitchFamily="34" charset="0"/>
-                <a:ea typeface="Calibri" pitchFamily="34" charset="-122"/>
-                <a:cs typeface="Calibri" pitchFamily="34" charset="-120"/>
-              </a:rPr>
-              <a:t>10. Dell’Isola A, Allan R, Smith SL, Marreiros SS, Steultjens M. Identification of clinical phenotypes in knee osteoarthritis: a systematic review of the literature. BMC Musculoskelet Disord. 2016;17:425.</a:t>
             </a:r>
             <a:endParaRPr lang="en-US" sz="900" dirty="0"/>
           </a:p>
@@ -17560,28 +17560,6 @@
             </a:r>
             <a:endParaRPr lang="en-US" sz="950" dirty="0"/>
           </a:p>
-        </p:txBody>
-      </p:sp>
-      <p:sp>
-        <p:nvSpPr>
-          <p:cNvPr id="6" name="Text 4"/>
-          <p:cNvSpPr txBox="1"/>
-          <p:nvPr/>
-        </p:nvSpPr>
-        <p:spPr>
-          <a:xfrm>
-            <a:off x="4709160" y="1234440"/>
-            <a:ext cx="4114800" cy="3154680"/>
-          </a:xfrm>
-          <a:prstGeom prst="rect">
-            <a:avLst/>
-          </a:prstGeom>
-          <a:noFill/>
-          <a:ln/>
-        </p:spPr>
-        <p:txBody>
-          <a:bodyPr wrap="square" lIns="0" tIns="0" rIns="0" bIns="0" rtlCol="0" anchor="t"/>
-          <a:lstStyle/>
           <a:p>
             <a:pPr indent="0" marL="0">
               <a:spcAft>
@@ -17602,6 +17580,28 @@
             </a:r>
             <a:endParaRPr lang="en-US" sz="950" dirty="0"/>
           </a:p>
+        </p:txBody>
+      </p:sp>
+      <p:sp>
+        <p:nvSpPr>
+          <p:cNvPr id="6" name="Text 4"/>
+          <p:cNvSpPr txBox="1"/>
+          <p:nvPr/>
+        </p:nvSpPr>
+        <p:spPr>
+          <a:xfrm>
+            <a:off x="4709160" y="1234440"/>
+            <a:ext cx="4114800" cy="3154680"/>
+          </a:xfrm>
+          <a:prstGeom prst="rect">
+            <a:avLst/>
+          </a:prstGeom>
+          <a:noFill/>
+          <a:ln/>
+        </p:spPr>
+        <p:txBody>
+          <a:bodyPr wrap="square" lIns="0" tIns="0" rIns="0" bIns="0" rtlCol="0" anchor="t"/>
+          <a:lstStyle/>
           <a:p>
             <a:pPr indent="0" marL="0">
               <a:spcAft>
@@ -17618,7 +17618,7 @@
                 <a:ea typeface="Calibri" pitchFamily="34" charset="-122"/>
                 <a:cs typeface="Calibri" pitchFamily="34" charset="-120"/>
               </a:rPr>
-              <a:t>8. Kolasinski SL, Neogi T, Hochberg MC, Oatis C, Guyatt G, Block J, et al. 2019 ACR/Arthritis Foundation guideline for the management of osteoarthritis of the hand, hip, and knee. Arthritis Rheumatol. 2020;72(2):220-33.</a:t>
+              <a:t>8. Tang S, Zhang C, Oo WM, Fu K, Risberg MA, Bierma-Zeinstra SM, et al. Osteoarthritis. Nat Rev Dis Primers. 2025;11(1):10.</a:t>
             </a:r>
             <a:endParaRPr lang="en-US" sz="950" dirty="0"/>
           </a:p>
@@ -17638,7 +17638,7 @@
                 <a:ea typeface="Calibri" pitchFamily="34" charset="-122"/>
                 <a:cs typeface="Calibri" pitchFamily="34" charset="-120"/>
               </a:rPr>
-              <a:t>9. Sharma L. Osteoarthritis of the knee. N Engl J Med. 2021;384(1):51-9.</a:t>
+              <a:t>9. Kolasinski SL, Neogi T, Hochberg MC, Oatis C, Guyatt G, Block J, et al. 2019 ACR/Arthritis Foundation guideline for the management of osteoarthritis of the hand, hip, and knee. Arthritis Rheumatol. 2020;72(2):220-33.</a:t>
             </a:r>
             <a:endParaRPr lang="en-US" sz="950" dirty="0"/>
           </a:p>
@@ -17658,7 +17658,7 @@
                 <a:ea typeface="Calibri" pitchFamily="34" charset="-122"/>
                 <a:cs typeface="Calibri" pitchFamily="34" charset="-120"/>
               </a:rPr>
-              <a:t>10. Dell’Isola A, Allan R, Smith SL, Marreiros SS, Steultjens M. Identification of clinical phenotypes in knee osteoarthritis: a systematic review of the literature. BMC Musculoskelet Disord. 2016;17:425.</a:t>
+              <a:t>10. Sharma L. Osteoarthritis of the knee. N Engl J Med. 2021;384(1):51-9.</a:t>
             </a:r>
             <a:endParaRPr lang="en-US" sz="950" dirty="0"/>
           </a:p>
@@ -17678,7 +17678,7 @@
                 <a:ea typeface="Calibri" pitchFamily="34" charset="-122"/>
                 <a:cs typeface="Calibri" pitchFamily="34" charset="-120"/>
               </a:rPr>
-              <a:t>11. Deveza LA, Nelson AE, Loeser RF. Phenotypes of osteoarthritis: current state and future implications. Clin Exp Rheumatol. 2019;37 Suppl 120(5):S64-72.</a:t>
+              <a:t>11. Dell’Isola A, Allan R, Smith SL, Marreiros SS, Steultjens M. Identification of clinical phenotypes in knee osteoarthritis: a systematic review of the literature. BMC Musculoskelet Disord. 2016;17:425.</a:t>
             </a:r>
             <a:endParaRPr lang="en-US" sz="950" dirty="0"/>
           </a:p>
@@ -17698,7 +17698,27 @@
                 <a:ea typeface="Calibri" pitchFamily="34" charset="-122"/>
                 <a:cs typeface="Calibri" pitchFamily="34" charset="-120"/>
               </a:rPr>
-              <a:t>12. van Steenbergen HW, Aletaha D, Beaart-van de Voorde LJJ, Brouwer E, Codreanu C, Combe B, et al. EULAR definition of arthralgia suspicious for progression to rheumatoid arthritis. Ann Rheum Dis. 2017;76(3):491-6.</a:t>
+              <a:t>12. Deveza LA, Nelson AE, Loeser RF. Phenotypes of osteoarthritis: current state and future implications. Clin Exp Rheumatol. 2019;37 Suppl 120(5):S64-72.</a:t>
+            </a:r>
+            <a:endParaRPr lang="en-US" sz="950" dirty="0"/>
+          </a:p>
+          <a:p>
+            <a:pPr indent="0" marL="0">
+              <a:spcAft>
+                <a:spcPts val="600"/>
+              </a:spcAft>
+              <a:buNone/>
+            </a:pPr>
+            <a:r>
+              <a:rPr lang="en-US" sz="950" dirty="0">
+                <a:solidFill>
+                  <a:srgbClr val="141821"/>
+                </a:solidFill>
+                <a:latin typeface="Calibri" pitchFamily="34" charset="0"/>
+                <a:ea typeface="Calibri" pitchFamily="34" charset="-122"/>
+                <a:cs typeface="Calibri" pitchFamily="34" charset="-120"/>
+              </a:rPr>
+              <a:t>13. van Steenbergen HW, Aletaha D, Beaart-van de Voorde LJJ, Brouwer E, Codreanu C, Combe B, et al. EULAR definition of arthralgia suspicious for progression to rheumatoid arthritis. Ann Rheum Dis. 2017;76(3):491-6.</a:t>
             </a:r>
             <a:endParaRPr lang="en-US" sz="950" dirty="0"/>
           </a:p>

--- a/Dx_AR_vs_artrosis.pptx
+++ b/Dx_AR_vs_artrosis.pptx
@@ -33,9 +33,10 @@
     <p:sldId id="281" r:id="rId27"/>
     <p:sldId id="282" r:id="rId28"/>
     <p:sldId id="283" r:id="rId29"/>
+    <p:sldId id="284" r:id="rId30"/>
   </p:sldIdLst>
   <p:notesMasterIdLst>
-    <p:notesMasterId r:id="rId30"/>
+    <p:notesMasterId r:id="rId31"/>
   </p:notesMasterIdLst>
   <p:sldSz cx="9144000" cy="5143500"/>
   <p:notesSz cx="5143500" cy="9144000"/>
@@ -2186,7 +2187,7 @@
           <a:p>
             <a:r>
               <a:rPr lang="en-US" dirty="0"/>
-              <a:t>Tabla resumen del diagnostico diferencial AR vs artrosis: tipo, dolor, rigidez, manos, tumefaccion, laboratorio, radiografia y conducta.</a:t>
+              <a:t>La inflamacion deja una huella mecanica. La sinovitis reumatoide persistente destruye el cartilago, genera erosiones y altera la biomecanica articular; la articulacion se remodela y aparecen cambios de artrosis secundaria. Que puede ocurrir: perdida progresiva del cartilago; inestabilidad, deformidad o alteracion de las cargas; formacion de osteofitos y remodelacion osea. Por que importa: puede haber dolor mecanico pese a tener controlada la actividad inflamatoria, limitacion funcional por el dano estructural, y es clave no intensificar la inmunosupresion si no hay evidencia de actividad de la AR -el dolor estructural no responde a mas inmunosupresion-.</a:t>
             </a:r>
             <a:endParaRPr lang="en-US" dirty="0"/>
           </a:p>
@@ -2274,7 +2275,7 @@
           <a:p>
             <a:r>
               <a:rPr lang="en-US" dirty="0"/>
-              <a:t>La respuesta define la ruta. Si es AR: derivar temprano (ventana de oportunidad menor de 12 semanas), tratar por objetivo hasta la remision o baja actividad, con FAME -metotrexato de primera linea-, porque frenar la inflamacion evita la erosion irreversible. Si es artrosis: manejo activo, nunca "no hay nada que hacer"; primera linea no farmacologica (ejercicio, control de peso, educacion), AINE topicos u orales para el dolor evitando la inmunosupresion, y cirugia de reemplazo reservada a la enfermedad avanzada. El diagnostico correcto evita tanto el retraso terapeutico como el sobretratamiento.</a:t>
+              <a:t>Tabla resumen del diagnostico diferencial AR vs artrosis: tipo, dolor, rigidez, manos, tumefaccion, laboratorio, radiografia y conducta.</a:t>
             </a:r>
             <a:endParaRPr lang="en-US" dirty="0"/>
           </a:p>
@@ -2362,7 +2363,7 @@
           <a:p>
             <a:r>
               <a:rPr lang="en-US" dirty="0"/>
-              <a:t>La respuesta practica: deriva pronto si hay sinovitis en una o mas articulaciones (MCF, IFP, muneca), rigidez matutina prolongada, compromiso simetrico, squeeze test positivo, FR o anti-CCP positivos, o persistencia mayor de seis semanas. Evita los errores clasicos: pedir serologias en artrosis tipica, descartar AR por serologia negativa, atribuir a artrosis una sinovitis de MCF y esperar erosiones para derivar.</a:t>
+              <a:t>La respuesta define la ruta. Si es AR: derivar temprano (ventana de oportunidad menor de 12 semanas), tratar por objetivo hasta la remision o baja actividad, con FAME -metotrexato de primera linea-, porque frenar la inflamacion evita la erosion irreversible. Si es artrosis: manejo activo, nunca "no hay nada que hacer"; primera linea no farmacologica (ejercicio, control de peso, educacion), AINE topicos u orales para el dolor evitando la inmunosupresion, y cirugia de reemplazo reservada a la enfermedad avanzada. El diagnostico correcto evita tanto el retraso terapeutico como el sobretratamiento.</a:t>
             </a:r>
             <a:endParaRPr lang="en-US" dirty="0"/>
           </a:p>
@@ -2450,7 +2451,7 @@
           <a:p>
             <a:r>
               <a:rPr lang="en-US" dirty="0"/>
-              <a:t>Resolucion del caso. Las cinco pistas convergen: el dolor es inflamatorio (rigidez matutina de una hora), la distribucion es de AR (MCF e IFP simetricas que respetan la IFD), el examen muestra tumefaccion blanda con squeeze positivo (sinovitis), el laboratorio da anti-CCP positivo (muy probable AR) y la ecografia confirma sinovitis con senal Doppler (inflamacion activa). La respuesta a la pregunta es si: artritis reumatoide temprana. Hay que derivar hoy, porque la ventana de oportunidad esta abierta.</a:t>
+              <a:t>La respuesta practica: deriva pronto si hay sinovitis en una o mas articulaciones (MCF, IFP, muneca), rigidez matutina prolongada, compromiso simetrico, squeeze test positivo, FR o anti-CCP positivos, o persistencia mayor de seis semanas. Evita los errores clasicos: pedir serologias en artrosis tipica, descartar AR por serologia negativa, atribuir a artrosis una sinovitis de MCF y esperar erosiones para derivar.</a:t>
             </a:r>
             <a:endParaRPr lang="en-US" dirty="0"/>
           </a:p>
@@ -2538,7 +2539,7 @@
           <a:p>
             <a:r>
               <a:rPr lang="en-US" dirty="0"/>
-              <a:t>Cierre. La respuesta a la pregunta esta en integrar el patron clinico; distinguir a tiempo cambia el pronostico.</a:t>
+              <a:t>Resolucion del caso. Las cinco pistas convergen: el dolor es inflamatorio (rigidez matutina de una hora), la distribucion es de AR (MCF e IFP simetricas que respetan la IFD), el examen muestra tumefaccion blanda con squeeze positivo (sinovitis), el laboratorio da anti-CCP positivo (muy probable AR) y la ecografia confirma sinovitis con senal Doppler (inflamacion activa). La respuesta a la pregunta es si: artritis reumatoide temprana. Hay que derivar hoy, porque la ventana de oportunidad esta abierta.</a:t>
             </a:r>
             <a:endParaRPr lang="en-US" dirty="0"/>
           </a:p>
@@ -2626,7 +2627,7 @@
           <a:p>
             <a:r>
               <a:rPr lang="en-US" dirty="0"/>
-              <a:t>Bibliografia completa en formato Vancouver.</a:t>
+              <a:t>Cierre. La respuesta a la pregunta esta en integrar el patron clinico; distinguir a tiempo cambia el pronostico.</a:t>
             </a:r>
             <a:endParaRPr lang="en-US" dirty="0"/>
           </a:p>
@@ -2650,6 +2651,94 @@
             <a:fld id="{F7021451-1387-4CA6-816F-3879F97B5CBC}" type="slidenum">
               <a:rPr lang="en-US"/>
               <a:t>28</a:t>
+            </a:fld>
+            <a:endParaRPr lang="en-US"/>
+          </a:p>
+        </p:txBody>
+      </p:sp>
+    </p:spTree>
+    <p:extLst>
+      <p:ext uri="{BB962C8B-B14F-4D97-AF65-F5344CB8AC3E}">
+        <p14:creationId xmlns:p14="http://schemas.microsoft.com/office/powerpoint/2010/main" val="1024086991"/>
+      </p:ext>
+    </p:extLst>
+  </p:cSld>
+  <p:clrMapOvr>
+    <a:masterClrMapping/>
+  </p:clrMapOvr>
+</p:notes>
+</file>
+
+<file path=ppt/notesSlides/notesSlide29.xml><?xml version="1.0" encoding="utf-8"?>
+<p:notes xmlns:a="http://schemas.openxmlformats.org/drawingml/2006/main" xmlns:r="http://schemas.openxmlformats.org/officeDocument/2006/relationships" xmlns:p="http://schemas.openxmlformats.org/presentationml/2006/main">
+  <p:cSld>
+    <p:spTree>
+      <p:nvGrpSpPr>
+        <p:cNvPr id="1" name=""/>
+        <p:cNvGrpSpPr/>
+        <p:nvPr/>
+      </p:nvGrpSpPr>
+      <p:grpSpPr>
+        <a:xfrm>
+          <a:off x="0" y="0"/>
+          <a:ext cx="0" cy="0"/>
+          <a:chOff x="0" y="0"/>
+          <a:chExt cx="0" cy="0"/>
+        </a:xfrm>
+      </p:grpSpPr>
+      <p:sp>
+        <p:nvSpPr>
+          <p:cNvPr id="2" name="Slide Image Placeholder 1"/>
+          <p:cNvSpPr>
+            <a:spLocks noGrp="1" noRot="1" noChangeAspect="1"/>
+          </p:cNvSpPr>
+          <p:nvPr>
+            <p:ph type="sldImg"/>
+          </p:nvPr>
+        </p:nvSpPr>
+        <p:spPr/>
+      </p:sp>
+      <p:sp>
+        <p:nvSpPr>
+          <p:cNvPr id="3" name="Notes Placeholder 2"/>
+          <p:cNvSpPr>
+            <a:spLocks noGrp="1"/>
+          </p:cNvSpPr>
+          <p:nvPr>
+            <p:ph type="body" idx="1"/>
+          </p:nvPr>
+        </p:nvSpPr>
+        <p:spPr/>
+        <p:txBody>
+          <a:bodyPr/>
+          <a:lstStyle/>
+          <a:p>
+            <a:r>
+              <a:rPr lang="en-US" dirty="0"/>
+              <a:t>Bibliografia completa en formato Vancouver.</a:t>
+            </a:r>
+            <a:endParaRPr lang="en-US" dirty="0"/>
+          </a:p>
+        </p:txBody>
+      </p:sp>
+      <p:sp>
+        <p:nvSpPr>
+          <p:cNvPr id="4" name="Slide Number Placeholder 3"/>
+          <p:cNvSpPr>
+            <a:spLocks noGrp="1"/>
+          </p:cNvSpPr>
+          <p:nvPr>
+            <p:ph type="sldNum" sz="quarter" idx="10"/>
+          </p:nvPr>
+        </p:nvSpPr>
+        <p:spPr/>
+        <p:txBody>
+          <a:bodyPr/>
+          <a:lstStyle/>
+          <a:p>
+            <a:fld id="{F7021451-1387-4CA6-816F-3879F97B5CBC}" type="slidenum">
+              <a:rPr lang="en-US"/>
+              <a:t>29</a:t>
             </a:fld>
             <a:endParaRPr lang="en-US"/>
           </a:p>
@@ -17259,7 +17348,7 @@
                 <a:ea typeface="Calibri" pitchFamily="34" charset="-122"/>
                 <a:cs typeface="Calibri" pitchFamily="34" charset="-120"/>
               </a:rPr>
-              <a:t>SÍNTESIS</a:t>
+              <a:t>AR → ARTROSIS SECUNDARIA</a:t>
             </a:r>
             <a:endParaRPr lang="en-US" sz="1400" dirty="0"/>
           </a:p>
@@ -17298,7 +17387,7 @@
                 <a:ea typeface="Calibri" pitchFamily="34" charset="-122"/>
                 <a:cs typeface="Calibri" pitchFamily="34" charset="-120"/>
               </a:rPr>
-              <a:t>Tabla maestra: la respuesta en una mirada</a:t>
+              <a:t>Cuando la inflamación deja una huella mecánica</a:t>
             </a:r>
             <a:endParaRPr lang="en-US" sz="2900" dirty="0"/>
           </a:p>
@@ -17378,23 +17467,6 @@
                 <a:cs typeface="Calibri" pitchFamily="34" charset="-120"/>
               </a:rPr>
               <a:t>7. Hunter DJ, Bierma-Zeinstra S. Osteoarthritis. Lancet. 2019;393(10182):1745-59.</a:t>
-            </a:r>
-            <a:endParaRPr lang="en-US" sz="900" dirty="0"/>
-          </a:p>
-          <a:p>
-            <a:pPr indent="0" marL="0">
-              <a:buNone/>
-            </a:pPr>
-            <a:r>
-              <a:rPr lang="en-US" sz="900" dirty="0">
-                <a:solidFill>
-                  <a:srgbClr val="141821"/>
-                </a:solidFill>
-                <a:latin typeface="Calibri" pitchFamily="34" charset="0"/>
-                <a:ea typeface="Calibri" pitchFamily="34" charset="-122"/>
-                <a:cs typeface="Calibri" pitchFamily="34" charset="-120"/>
-              </a:rPr>
-              <a:t>6. Katz JN, Arant KR, Loeser RF. Diagnosis and treatment of hip and knee osteoarthritis: a review. JAMA. 2021;325(6):568-78.</a:t>
             </a:r>
             <a:endParaRPr lang="en-US" sz="900" dirty="0"/>
           </a:p>
@@ -17433,12 +17505,258 @@
         </p:nvSpPr>
         <p:spPr>
           <a:xfrm>
-            <a:off x="457200" y="1143000"/>
-            <a:ext cx="8229600" cy="365760"/>
+            <a:off x="457200" y="1234440"/>
+            <a:ext cx="2560320" cy="868680"/>
           </a:xfrm>
           <a:prstGeom prst="roundRect">
             <a:avLst>
-              <a:gd name="adj" fmla="val 25000"/>
+              <a:gd name="adj" fmla="val 10526"/>
+            </a:avLst>
+          </a:prstGeom>
+          <a:solidFill>
+            <a:srgbClr val="F2546B"/>
+          </a:solidFill>
+          <a:ln w="12700">
+            <a:solidFill>
+              <a:srgbClr val="F2546B"/>
+            </a:solidFill>
+            <a:prstDash val="solid"/>
+          </a:ln>
+        </p:spPr>
+      </p:sp>
+      <p:sp>
+        <p:nvSpPr>
+          <p:cNvPr id="8" name="Text 6"/>
+          <p:cNvSpPr txBox="1"/>
+          <p:nvPr/>
+        </p:nvSpPr>
+        <p:spPr>
+          <a:xfrm>
+            <a:off x="512064" y="1234440"/>
+            <a:ext cx="2450592" cy="868680"/>
+          </a:xfrm>
+          <a:prstGeom prst="rect">
+            <a:avLst/>
+          </a:prstGeom>
+          <a:noFill/>
+          <a:ln/>
+        </p:spPr>
+        <p:txBody>
+          <a:bodyPr wrap="square" lIns="0" tIns="0" rIns="0" bIns="0" rtlCol="0" anchor="ctr"/>
+          <a:lstStyle/>
+          <a:p>
+            <a:pPr algn="ctr" indent="0" marL="0">
+              <a:buNone/>
+            </a:pPr>
+            <a:r>
+              <a:rPr lang="en-US" sz="1200" b="1" dirty="0">
+                <a:solidFill>
+                  <a:srgbClr val="15193A"/>
+                </a:solidFill>
+                <a:latin typeface="Calibri" pitchFamily="34" charset="0"/>
+                <a:ea typeface="Calibri" pitchFamily="34" charset="-122"/>
+                <a:cs typeface="Calibri" pitchFamily="34" charset="-120"/>
+              </a:rPr>
+              <a:t>Sinovitis reumatoide persistente</a:t>
+            </a:r>
+            <a:endParaRPr lang="en-US" sz="1200" dirty="0"/>
+          </a:p>
+        </p:txBody>
+      </p:sp>
+      <p:sp>
+        <p:nvSpPr>
+          <p:cNvPr id="9" name="Shape 7"/>
+          <p:cNvSpPr/>
+          <p:nvPr/>
+        </p:nvSpPr>
+        <p:spPr>
+          <a:xfrm>
+            <a:off x="3017520" y="1664208"/>
+            <a:ext cx="274320" cy="914"/>
+          </a:xfrm>
+          <a:prstGeom prst="line">
+            <a:avLst/>
+          </a:prstGeom>
+          <a:noFill/>
+          <a:ln w="31750">
+            <a:solidFill>
+              <a:srgbClr val="3A4150"/>
+            </a:solidFill>
+            <a:prstDash val="solid"/>
+            <a:tailEnd type="triangle"/>
+          </a:ln>
+        </p:spPr>
+      </p:sp>
+      <p:sp>
+        <p:nvSpPr>
+          <p:cNvPr id="10" name="Shape 8"/>
+          <p:cNvSpPr/>
+          <p:nvPr/>
+        </p:nvSpPr>
+        <p:spPr>
+          <a:xfrm>
+            <a:off x="3291840" y="1234440"/>
+            <a:ext cx="2560320" cy="868680"/>
+          </a:xfrm>
+          <a:prstGeom prst="roundRect">
+            <a:avLst>
+              <a:gd name="adj" fmla="val 10526"/>
+            </a:avLst>
+          </a:prstGeom>
+          <a:solidFill>
+            <a:srgbClr val="A78BFA"/>
+          </a:solidFill>
+          <a:ln w="12700">
+            <a:solidFill>
+              <a:srgbClr val="A78BFA"/>
+            </a:solidFill>
+            <a:prstDash val="solid"/>
+          </a:ln>
+        </p:spPr>
+      </p:sp>
+      <p:sp>
+        <p:nvSpPr>
+          <p:cNvPr id="11" name="Text 9"/>
+          <p:cNvSpPr txBox="1"/>
+          <p:nvPr/>
+        </p:nvSpPr>
+        <p:spPr>
+          <a:xfrm>
+            <a:off x="3346704" y="1234440"/>
+            <a:ext cx="2450592" cy="868680"/>
+          </a:xfrm>
+          <a:prstGeom prst="rect">
+            <a:avLst/>
+          </a:prstGeom>
+          <a:noFill/>
+          <a:ln/>
+        </p:spPr>
+        <p:txBody>
+          <a:bodyPr wrap="square" lIns="0" tIns="0" rIns="0" bIns="0" rtlCol="0" anchor="ctr"/>
+          <a:lstStyle/>
+          <a:p>
+            <a:pPr algn="ctr" indent="0" marL="0">
+              <a:buNone/>
+            </a:pPr>
+            <a:r>
+              <a:rPr lang="en-US" sz="1200" b="1" dirty="0">
+                <a:solidFill>
+                  <a:srgbClr val="15193A"/>
+                </a:solidFill>
+                <a:latin typeface="Calibri" pitchFamily="34" charset="0"/>
+                <a:ea typeface="Calibri" pitchFamily="34" charset="-122"/>
+                <a:cs typeface="Calibri" pitchFamily="34" charset="-120"/>
+              </a:rPr>
+              <a:t>Destrucción del cartílago, erosiones y alteración biomecánica</a:t>
+            </a:r>
+            <a:endParaRPr lang="en-US" sz="1200" dirty="0"/>
+          </a:p>
+        </p:txBody>
+      </p:sp>
+      <p:sp>
+        <p:nvSpPr>
+          <p:cNvPr id="12" name="Shape 10"/>
+          <p:cNvSpPr/>
+          <p:nvPr/>
+        </p:nvSpPr>
+        <p:spPr>
+          <a:xfrm>
+            <a:off x="5852160" y="1664208"/>
+            <a:ext cx="274320" cy="914"/>
+          </a:xfrm>
+          <a:prstGeom prst="line">
+            <a:avLst/>
+          </a:prstGeom>
+          <a:noFill/>
+          <a:ln w="31750">
+            <a:solidFill>
+              <a:srgbClr val="3A4150"/>
+            </a:solidFill>
+            <a:prstDash val="solid"/>
+            <a:tailEnd type="triangle"/>
+          </a:ln>
+        </p:spPr>
+      </p:sp>
+      <p:sp>
+        <p:nvSpPr>
+          <p:cNvPr id="13" name="Shape 11"/>
+          <p:cNvSpPr/>
+          <p:nvPr/>
+        </p:nvSpPr>
+        <p:spPr>
+          <a:xfrm>
+            <a:off x="6126480" y="1234440"/>
+            <a:ext cx="2560320" cy="868680"/>
+          </a:xfrm>
+          <a:prstGeom prst="roundRect">
+            <a:avLst>
+              <a:gd name="adj" fmla="val 10526"/>
+            </a:avLst>
+          </a:prstGeom>
+          <a:solidFill>
+            <a:srgbClr val="F2B43C"/>
+          </a:solidFill>
+          <a:ln w="12700">
+            <a:solidFill>
+              <a:srgbClr val="F2B43C"/>
+            </a:solidFill>
+            <a:prstDash val="solid"/>
+          </a:ln>
+        </p:spPr>
+      </p:sp>
+      <p:sp>
+        <p:nvSpPr>
+          <p:cNvPr id="14" name="Text 12"/>
+          <p:cNvSpPr txBox="1"/>
+          <p:nvPr/>
+        </p:nvSpPr>
+        <p:spPr>
+          <a:xfrm>
+            <a:off x="6181344" y="1234440"/>
+            <a:ext cx="2450592" cy="868680"/>
+          </a:xfrm>
+          <a:prstGeom prst="rect">
+            <a:avLst/>
+          </a:prstGeom>
+          <a:noFill/>
+          <a:ln/>
+        </p:spPr>
+        <p:txBody>
+          <a:bodyPr wrap="square" lIns="0" tIns="0" rIns="0" bIns="0" rtlCol="0" anchor="ctr"/>
+          <a:lstStyle/>
+          <a:p>
+            <a:pPr algn="ctr" indent="0" marL="0">
+              <a:buNone/>
+            </a:pPr>
+            <a:r>
+              <a:rPr lang="en-US" sz="1200" b="1" dirty="0">
+                <a:solidFill>
+                  <a:srgbClr val="15193A"/>
+                </a:solidFill>
+                <a:latin typeface="Calibri" pitchFamily="34" charset="0"/>
+                <a:ea typeface="Calibri" pitchFamily="34" charset="-122"/>
+                <a:cs typeface="Calibri" pitchFamily="34" charset="-120"/>
+              </a:rPr>
+              <a:t>Remodelación articular → artrosis secundaria</a:t>
+            </a:r>
+            <a:endParaRPr lang="en-US" sz="1200" dirty="0"/>
+          </a:p>
+        </p:txBody>
+      </p:sp>
+      <p:sp>
+        <p:nvSpPr>
+          <p:cNvPr id="15" name="Shape 13"/>
+          <p:cNvSpPr/>
+          <p:nvPr/>
+        </p:nvSpPr>
+        <p:spPr>
+          <a:xfrm>
+            <a:off x="457200" y="2331720"/>
+            <a:ext cx="4023360" cy="1965960"/>
+          </a:xfrm>
+          <a:prstGeom prst="roundRect">
+            <a:avLst>
+              <a:gd name="adj" fmla="val 4651"/>
             </a:avLst>
           </a:prstGeom>
           <a:solidFill>
@@ -17446,7 +17764,7 @@
           </a:solidFill>
           <a:ln w="19050">
             <a:solidFill>
-              <a:srgbClr val="A78BFA"/>
+              <a:srgbClr val="F2B43C"/>
             </a:solidFill>
             <a:prstDash val="solid"/>
           </a:ln>
@@ -17454,14 +17772,63 @@
       </p:sp>
       <p:sp>
         <p:nvSpPr>
-          <p:cNvPr id="8" name="Text 6"/>
-          <p:cNvSpPr txBox="1"/>
-          <p:nvPr/>
-        </p:nvSpPr>
-        <p:spPr>
-          <a:xfrm>
-            <a:off x="594360" y="1143000"/>
-            <a:ext cx="2286000" cy="365760"/>
+          <p:cNvPr id="16" name="Shape 14"/>
+          <p:cNvSpPr/>
+          <p:nvPr/>
+        </p:nvSpPr>
+        <p:spPr>
+          <a:xfrm>
+            <a:off x="658368" y="2514600"/>
+            <a:ext cx="512064" cy="512064"/>
+          </a:xfrm>
+          <a:prstGeom prst="ellipse">
+            <a:avLst/>
+          </a:prstGeom>
+          <a:solidFill>
+            <a:srgbClr val="F2B43C"/>
+          </a:solidFill>
+          <a:ln w="12700">
+            <a:solidFill>
+              <a:srgbClr val="F2B43C"/>
+            </a:solidFill>
+            <a:prstDash val="solid"/>
+          </a:ln>
+        </p:spPr>
+      </p:sp>
+      <p:pic>
+        <p:nvPicPr>
+          <p:cNvPr id="17" name="Image 0" descr="preencoded.png">    </p:cNvPr>
+          <p:cNvPicPr>
+            <a:picLocks noChangeAspect="1"/>
+          </p:cNvPicPr>
+          <p:nvPr/>
+        </p:nvPicPr>
+        <p:blipFill>
+          <a:blip r:embed="rId1"/>
+          <a:stretch>
+            <a:fillRect/>
+          </a:stretch>
+        </p:blipFill>
+        <p:spPr>
+          <a:xfrm>
+            <a:off x="781263" y="2637495"/>
+            <a:ext cx="266273" cy="266273"/>
+          </a:xfrm>
+          <a:prstGeom prst="rect">
+            <a:avLst/>
+          </a:prstGeom>
+        </p:spPr>
+      </p:pic>
+      <p:sp>
+        <p:nvSpPr>
+          <p:cNvPr id="18" name="Text 15"/>
+          <p:cNvSpPr txBox="1"/>
+          <p:nvPr/>
+        </p:nvSpPr>
+        <p:spPr>
+          <a:xfrm>
+            <a:off x="1298448" y="2560320"/>
+            <a:ext cx="3017520" cy="411480"/>
           </a:xfrm>
           <a:prstGeom prst="rect">
             <a:avLst/>
@@ -17477,93 +17844,100 @@
               <a:buNone/>
             </a:pPr>
             <a:r>
-              <a:rPr lang="en-US" sz="1250" b="1" dirty="0">
-                <a:solidFill>
-                  <a:srgbClr val="6A4CCF"/>
-                </a:solidFill>
-                <a:latin typeface="Calibri" pitchFamily="34" charset="0"/>
-                <a:ea typeface="Calibri" pitchFamily="34" charset="-122"/>
-                <a:cs typeface="Calibri" pitchFamily="34" charset="-120"/>
-              </a:rPr>
-              <a:t>Rasgo</a:t>
+              <a:rPr lang="en-US" sz="1600" b="1" dirty="0">
+                <a:solidFill>
+                  <a:srgbClr val="A66A00"/>
+                </a:solidFill>
+                <a:latin typeface="Calibri" pitchFamily="34" charset="0"/>
+                <a:ea typeface="Calibri" pitchFamily="34" charset="-122"/>
+                <a:cs typeface="Calibri" pitchFamily="34" charset="-120"/>
+              </a:rPr>
+              <a:t>¿Qué puede ocurrir?</a:t>
+            </a:r>
+            <a:endParaRPr lang="en-US" sz="1600" dirty="0"/>
+          </a:p>
+        </p:txBody>
+      </p:sp>
+      <p:sp>
+        <p:nvSpPr>
+          <p:cNvPr id="19" name="Text 16"/>
+          <p:cNvSpPr txBox="1"/>
+          <p:nvPr/>
+        </p:nvSpPr>
+        <p:spPr>
+          <a:xfrm>
+            <a:off x="685800" y="3127248"/>
+            <a:ext cx="3611880" cy="1097280"/>
+          </a:xfrm>
+          <a:prstGeom prst="rect">
+            <a:avLst/>
+          </a:prstGeom>
+          <a:noFill/>
+          <a:ln/>
+        </p:spPr>
+        <p:txBody>
+          <a:bodyPr wrap="square" lIns="0" tIns="0" rIns="0" bIns="0" rtlCol="0" anchor="t"/>
+          <a:lstStyle/>
+          <a:p>
+            <a:pPr marL="342900" indent="-342900">
+              <a:spcAft>
+                <a:spcPts val="600"/>
+              </a:spcAft>
+              <a:buSzPct val="100000"/>
+              <a:buChar char="•"/>
+            </a:pPr>
+            <a:r>
+              <a:rPr lang="en-US" sz="1250" dirty="0">
+                <a:solidFill>
+                  <a:srgbClr val="141821"/>
+                </a:solidFill>
+                <a:latin typeface="Calibri" pitchFamily="34" charset="0"/>
+                <a:ea typeface="Calibri" pitchFamily="34" charset="-122"/>
+                <a:cs typeface="Calibri" pitchFamily="34" charset="-120"/>
+              </a:rPr>
+              <a:t>Pérdida progresiva del cartílago.</a:t>
             </a:r>
             <a:endParaRPr lang="en-US" sz="1250" dirty="0"/>
           </a:p>
-        </p:txBody>
-      </p:sp>
-      <p:sp>
-        <p:nvSpPr>
-          <p:cNvPr id="9" name="Text 7"/>
-          <p:cNvSpPr txBox="1"/>
-          <p:nvPr/>
-        </p:nvSpPr>
-        <p:spPr>
-          <a:xfrm>
-            <a:off x="2926080" y="1143000"/>
-            <a:ext cx="2880360" cy="365760"/>
-          </a:xfrm>
-          <a:prstGeom prst="rect">
-            <a:avLst/>
-          </a:prstGeom>
-          <a:noFill/>
-          <a:ln/>
-        </p:spPr>
-        <p:txBody>
-          <a:bodyPr wrap="square" lIns="0" tIns="0" rIns="0" bIns="0" rtlCol="0" anchor="ctr"/>
-          <a:lstStyle/>
-          <a:p>
-            <a:pPr indent="0" marL="0">
-              <a:buNone/>
-            </a:pPr>
-            <a:r>
-              <a:rPr lang="en-US" sz="1250" b="1" dirty="0">
-                <a:solidFill>
-                  <a:srgbClr val="C81E43"/>
-                </a:solidFill>
-                <a:latin typeface="Calibri" pitchFamily="34" charset="0"/>
-                <a:ea typeface="Calibri" pitchFamily="34" charset="-122"/>
-                <a:cs typeface="Calibri" pitchFamily="34" charset="-120"/>
-              </a:rPr>
-              <a:t>Artritis reumatoide</a:t>
+          <a:p>
+            <a:pPr marL="342900" indent="-342900">
+              <a:spcAft>
+                <a:spcPts val="600"/>
+              </a:spcAft>
+              <a:buSzPct val="100000"/>
+              <a:buChar char="•"/>
+            </a:pPr>
+            <a:r>
+              <a:rPr lang="en-US" sz="1250" dirty="0">
+                <a:solidFill>
+                  <a:srgbClr val="141821"/>
+                </a:solidFill>
+                <a:latin typeface="Calibri" pitchFamily="34" charset="0"/>
+                <a:ea typeface="Calibri" pitchFamily="34" charset="-122"/>
+                <a:cs typeface="Calibri" pitchFamily="34" charset="-120"/>
+              </a:rPr>
+              <a:t>Inestabilidad, deformidad o alteración de las cargas articulares.</a:t>
             </a:r>
             <a:endParaRPr lang="en-US" sz="1250" dirty="0"/>
           </a:p>
-        </p:txBody>
-      </p:sp>
-      <p:sp>
-        <p:nvSpPr>
-          <p:cNvPr id="10" name="Text 8"/>
-          <p:cNvSpPr txBox="1"/>
-          <p:nvPr/>
-        </p:nvSpPr>
-        <p:spPr>
-          <a:xfrm>
-            <a:off x="5852160" y="1143000"/>
-            <a:ext cx="2743200" cy="365760"/>
-          </a:xfrm>
-          <a:prstGeom prst="rect">
-            <a:avLst/>
-          </a:prstGeom>
-          <a:noFill/>
-          <a:ln/>
-        </p:spPr>
-        <p:txBody>
-          <a:bodyPr wrap="square" lIns="0" tIns="0" rIns="0" bIns="0" rtlCol="0" anchor="ctr"/>
-          <a:lstStyle/>
-          <a:p>
-            <a:pPr indent="0" marL="0">
-              <a:buNone/>
-            </a:pPr>
-            <a:r>
-              <a:rPr lang="en-US" sz="1250" b="1" dirty="0">
-                <a:solidFill>
-                  <a:srgbClr val="A66A00"/>
-                </a:solidFill>
-                <a:latin typeface="Calibri" pitchFamily="34" charset="0"/>
-                <a:ea typeface="Calibri" pitchFamily="34" charset="-122"/>
-                <a:cs typeface="Calibri" pitchFamily="34" charset="-120"/>
-              </a:rPr>
-              <a:t>Artrosis</a:t>
+          <a:p>
+            <a:pPr marL="342900" indent="-342900">
+              <a:spcAft>
+                <a:spcPts val="600"/>
+              </a:spcAft>
+              <a:buSzPct val="100000"/>
+              <a:buChar char="•"/>
+            </a:pPr>
+            <a:r>
+              <a:rPr lang="en-US" sz="1250" dirty="0">
+                <a:solidFill>
+                  <a:srgbClr val="141821"/>
+                </a:solidFill>
+                <a:latin typeface="Calibri" pitchFamily="34" charset="0"/>
+                <a:ea typeface="Calibri" pitchFamily="34" charset="-122"/>
+                <a:cs typeface="Calibri" pitchFamily="34" charset="-120"/>
+              </a:rPr>
+              <a:t>Formación de osteofitos y remodelación ósea.</a:t>
             </a:r>
             <a:endParaRPr lang="en-US" sz="1250" dirty="0"/>
           </a:p>
@@ -17571,18 +17945,18 @@
       </p:sp>
       <p:sp>
         <p:nvSpPr>
-          <p:cNvPr id="11" name="Shape 9"/>
+          <p:cNvPr id="20" name="Shape 17"/>
           <p:cNvSpPr/>
           <p:nvPr/>
         </p:nvSpPr>
         <p:spPr>
           <a:xfrm>
-            <a:off x="457200" y="1536192"/>
-            <a:ext cx="8229600" cy="338328"/>
+            <a:off x="4663440" y="2331720"/>
+            <a:ext cx="4023360" cy="1965960"/>
           </a:xfrm>
           <a:prstGeom prst="roundRect">
             <a:avLst>
-              <a:gd name="adj" fmla="val 27027"/>
+              <a:gd name="adj" fmla="val 4651"/>
             </a:avLst>
           </a:prstGeom>
           <a:solidFill>
@@ -17590,7 +17964,7 @@
           </a:solidFill>
           <a:ln w="19050">
             <a:solidFill>
-              <a:srgbClr val="C4CCE0"/>
+              <a:srgbClr val="4CC9F0"/>
             </a:solidFill>
             <a:prstDash val="solid"/>
           </a:ln>
@@ -17598,158 +17972,63 @@
       </p:sp>
       <p:sp>
         <p:nvSpPr>
-          <p:cNvPr id="12" name="Text 10"/>
-          <p:cNvSpPr txBox="1"/>
-          <p:nvPr/>
-        </p:nvSpPr>
-        <p:spPr>
-          <a:xfrm>
-            <a:off x="594360" y="1536192"/>
-            <a:ext cx="2286000" cy="338328"/>
-          </a:xfrm>
-          <a:prstGeom prst="rect">
-            <a:avLst/>
-          </a:prstGeom>
-          <a:noFill/>
-          <a:ln/>
-        </p:spPr>
-        <p:txBody>
-          <a:bodyPr wrap="square" lIns="0" tIns="0" rIns="0" bIns="0" rtlCol="0" anchor="ctr"/>
-          <a:lstStyle/>
-          <a:p>
-            <a:pPr indent="0" marL="0">
-              <a:buNone/>
-            </a:pPr>
-            <a:r>
-              <a:rPr lang="en-US" sz="1200" b="1" dirty="0">
-                <a:solidFill>
-                  <a:srgbClr val="141821"/>
-                </a:solidFill>
-                <a:latin typeface="Calibri" pitchFamily="34" charset="0"/>
-                <a:ea typeface="Calibri" pitchFamily="34" charset="-122"/>
-                <a:cs typeface="Calibri" pitchFamily="34" charset="-120"/>
-              </a:rPr>
-              <a:t>Tipo</a:t>
-            </a:r>
-            <a:endParaRPr lang="en-US" sz="1200" dirty="0"/>
-          </a:p>
-        </p:txBody>
-      </p:sp>
-      <p:sp>
-        <p:nvSpPr>
-          <p:cNvPr id="13" name="Text 11"/>
-          <p:cNvSpPr txBox="1"/>
-          <p:nvPr/>
-        </p:nvSpPr>
-        <p:spPr>
-          <a:xfrm>
-            <a:off x="2926080" y="1536192"/>
-            <a:ext cx="2880360" cy="338328"/>
-          </a:xfrm>
-          <a:prstGeom prst="rect">
-            <a:avLst/>
-          </a:prstGeom>
-          <a:noFill/>
-          <a:ln/>
-        </p:spPr>
-        <p:txBody>
-          <a:bodyPr wrap="square" lIns="0" tIns="0" rIns="0" bIns="0" rtlCol="0" anchor="ctr"/>
-          <a:lstStyle/>
-          <a:p>
-            <a:pPr indent="0" marL="0">
-              <a:buNone/>
-            </a:pPr>
-            <a:r>
-              <a:rPr lang="en-US" sz="1050" dirty="0">
-                <a:solidFill>
-                  <a:srgbClr val="141821"/>
-                </a:solidFill>
-                <a:latin typeface="Calibri" pitchFamily="34" charset="0"/>
-                <a:ea typeface="Calibri" pitchFamily="34" charset="-122"/>
-                <a:cs typeface="Calibri" pitchFamily="34" charset="-120"/>
-              </a:rPr>
-              <a:t>Inflamatoria autoinmune</a:t>
-            </a:r>
-            <a:endParaRPr lang="en-US" sz="1050" dirty="0"/>
-          </a:p>
-        </p:txBody>
-      </p:sp>
-      <p:sp>
-        <p:nvSpPr>
-          <p:cNvPr id="14" name="Text 12"/>
-          <p:cNvSpPr txBox="1"/>
-          <p:nvPr/>
-        </p:nvSpPr>
-        <p:spPr>
-          <a:xfrm>
-            <a:off x="5852160" y="1536192"/>
-            <a:ext cx="2743200" cy="338328"/>
-          </a:xfrm>
-          <a:prstGeom prst="rect">
-            <a:avLst/>
-          </a:prstGeom>
-          <a:noFill/>
-          <a:ln/>
-        </p:spPr>
-        <p:txBody>
-          <a:bodyPr wrap="square" lIns="0" tIns="0" rIns="0" bIns="0" rtlCol="0" anchor="ctr"/>
-          <a:lstStyle/>
-          <a:p>
-            <a:pPr indent="0" marL="0">
-              <a:buNone/>
-            </a:pPr>
-            <a:r>
-              <a:rPr lang="en-US" sz="1050" dirty="0">
-                <a:solidFill>
-                  <a:srgbClr val="141821"/>
-                </a:solidFill>
-                <a:latin typeface="Calibri" pitchFamily="34" charset="0"/>
-                <a:ea typeface="Calibri" pitchFamily="34" charset="-122"/>
-                <a:cs typeface="Calibri" pitchFamily="34" charset="-120"/>
-              </a:rPr>
-              <a:t>No autoinmune, activa y heterogénea</a:t>
-            </a:r>
-            <a:endParaRPr lang="en-US" sz="1050" dirty="0"/>
-          </a:p>
-        </p:txBody>
-      </p:sp>
-      <p:sp>
-        <p:nvSpPr>
-          <p:cNvPr id="15" name="Shape 13"/>
+          <p:cNvPr id="21" name="Shape 18"/>
           <p:cNvSpPr/>
           <p:nvPr/>
         </p:nvSpPr>
         <p:spPr>
           <a:xfrm>
-            <a:off x="457200" y="1906524"/>
-            <a:ext cx="8229600" cy="338328"/>
-          </a:xfrm>
-          <a:prstGeom prst="roundRect">
-            <a:avLst>
-              <a:gd name="adj" fmla="val 27027"/>
-            </a:avLst>
+            <a:off x="4864608" y="2514600"/>
+            <a:ext cx="512064" cy="512064"/>
+          </a:xfrm>
+          <a:prstGeom prst="ellipse">
+            <a:avLst/>
           </a:prstGeom>
           <a:solidFill>
-            <a:srgbClr val="FFFFFF"/>
+            <a:srgbClr val="4CC9F0"/>
           </a:solidFill>
-          <a:ln w="19050">
+          <a:ln w="12700">
             <a:solidFill>
-              <a:srgbClr val="C4CCE0"/>
+              <a:srgbClr val="4CC9F0"/>
             </a:solidFill>
             <a:prstDash val="solid"/>
           </a:ln>
         </p:spPr>
       </p:sp>
-      <p:sp>
-        <p:nvSpPr>
-          <p:cNvPr id="16" name="Text 14"/>
-          <p:cNvSpPr txBox="1"/>
-          <p:nvPr/>
-        </p:nvSpPr>
-        <p:spPr>
-          <a:xfrm>
-            <a:off x="594360" y="1906524"/>
-            <a:ext cx="2286000" cy="338328"/>
+      <p:pic>
+        <p:nvPicPr>
+          <p:cNvPr id="22" name="Image 1" descr="preencoded.png">    </p:cNvPr>
+          <p:cNvPicPr>
+            <a:picLocks noChangeAspect="1"/>
+          </p:cNvPicPr>
+          <p:nvPr/>
+        </p:nvPicPr>
+        <p:blipFill>
+          <a:blip r:embed="rId2"/>
+          <a:stretch>
+            <a:fillRect/>
+          </a:stretch>
+        </p:blipFill>
+        <p:spPr>
+          <a:xfrm>
+            <a:off x="4987503" y="2637495"/>
+            <a:ext cx="266273" cy="266273"/>
+          </a:xfrm>
+          <a:prstGeom prst="rect">
+            <a:avLst/>
+          </a:prstGeom>
+        </p:spPr>
+      </p:pic>
+      <p:sp>
+        <p:nvSpPr>
+          <p:cNvPr id="23" name="Text 19"/>
+          <p:cNvSpPr txBox="1"/>
+          <p:nvPr/>
+        </p:nvSpPr>
+        <p:spPr>
+          <a:xfrm>
+            <a:off x="5504688" y="2560320"/>
+            <a:ext cx="3017520" cy="411480"/>
           </a:xfrm>
           <a:prstGeom prst="rect">
             <a:avLst/>
@@ -17765,7 +18044,50 @@
               <a:buNone/>
             </a:pPr>
             <a:r>
-              <a:rPr lang="en-US" sz="1200" b="1" dirty="0">
+              <a:rPr lang="en-US" sz="1600" b="1" dirty="0">
+                <a:solidFill>
+                  <a:srgbClr val="0A6F98"/>
+                </a:solidFill>
+                <a:latin typeface="Calibri" pitchFamily="34" charset="0"/>
+                <a:ea typeface="Calibri" pitchFamily="34" charset="-122"/>
+                <a:cs typeface="Calibri" pitchFamily="34" charset="-120"/>
+              </a:rPr>
+              <a:t>¿Por qué importa?</a:t>
+            </a:r>
+            <a:endParaRPr lang="en-US" sz="1600" dirty="0"/>
+          </a:p>
+        </p:txBody>
+      </p:sp>
+      <p:sp>
+        <p:nvSpPr>
+          <p:cNvPr id="24" name="Text 20"/>
+          <p:cNvSpPr txBox="1"/>
+          <p:nvPr/>
+        </p:nvSpPr>
+        <p:spPr>
+          <a:xfrm>
+            <a:off x="4892040" y="3127248"/>
+            <a:ext cx="3611880" cy="1097280"/>
+          </a:xfrm>
+          <a:prstGeom prst="rect">
+            <a:avLst/>
+          </a:prstGeom>
+          <a:noFill/>
+          <a:ln/>
+        </p:spPr>
+        <p:txBody>
+          <a:bodyPr wrap="square" lIns="0" tIns="0" rIns="0" bIns="0" rtlCol="0" anchor="t"/>
+          <a:lstStyle/>
+          <a:p>
+            <a:pPr marL="342900" indent="-342900">
+              <a:spcAft>
+                <a:spcPts val="600"/>
+              </a:spcAft>
+              <a:buSzPct val="100000"/>
+              <a:buChar char="•"/>
+            </a:pPr>
+            <a:r>
+              <a:rPr lang="en-US" sz="1250" dirty="0">
                 <a:solidFill>
                   <a:srgbClr val="141821"/>
                 </a:solidFill>
@@ -17773,38 +18095,20 @@
                 <a:ea typeface="Calibri" pitchFamily="34" charset="-122"/>
                 <a:cs typeface="Calibri" pitchFamily="34" charset="-120"/>
               </a:rPr>
-              <a:t>Dolor</a:t>
-            </a:r>
-            <a:endParaRPr lang="en-US" sz="1200" dirty="0"/>
-          </a:p>
-        </p:txBody>
-      </p:sp>
-      <p:sp>
-        <p:nvSpPr>
-          <p:cNvPr id="17" name="Text 15"/>
-          <p:cNvSpPr txBox="1"/>
-          <p:nvPr/>
-        </p:nvSpPr>
-        <p:spPr>
-          <a:xfrm>
-            <a:off x="2926080" y="1906524"/>
-            <a:ext cx="2880360" cy="338328"/>
-          </a:xfrm>
-          <a:prstGeom prst="rect">
-            <a:avLst/>
-          </a:prstGeom>
-          <a:noFill/>
-          <a:ln/>
-        </p:spPr>
-        <p:txBody>
-          <a:bodyPr wrap="square" lIns="0" tIns="0" rIns="0" bIns="0" rtlCol="0" anchor="ctr"/>
-          <a:lstStyle/>
-          <a:p>
-            <a:pPr indent="0" marL="0">
-              <a:buNone/>
-            </a:pPr>
-            <a:r>
-              <a:rPr lang="en-US" sz="1050" dirty="0">
+              <a:t>Dolor mecánico pese al control de la actividad inflamatoria.</a:t>
+            </a:r>
+            <a:endParaRPr lang="en-US" sz="1250" dirty="0"/>
+          </a:p>
+          <a:p>
+            <a:pPr marL="342900" indent="-342900">
+              <a:spcAft>
+                <a:spcPts val="600"/>
+              </a:spcAft>
+              <a:buSzPct val="100000"/>
+              <a:buChar char="•"/>
+            </a:pPr>
+            <a:r>
+              <a:rPr lang="en-US" sz="1250" dirty="0">
                 <a:solidFill>
                   <a:srgbClr val="141821"/>
                 </a:solidFill>
@@ -17812,38 +18116,20 @@
                 <a:ea typeface="Calibri" pitchFamily="34" charset="-122"/>
                 <a:cs typeface="Calibri" pitchFamily="34" charset="-120"/>
               </a:rPr>
-              <a:t>Inflamatorio (peor en reposo)</a:t>
-            </a:r>
-            <a:endParaRPr lang="en-US" sz="1050" dirty="0"/>
-          </a:p>
-        </p:txBody>
-      </p:sp>
-      <p:sp>
-        <p:nvSpPr>
-          <p:cNvPr id="18" name="Text 16"/>
-          <p:cNvSpPr txBox="1"/>
-          <p:nvPr/>
-        </p:nvSpPr>
-        <p:spPr>
-          <a:xfrm>
-            <a:off x="5852160" y="1906524"/>
-            <a:ext cx="2743200" cy="338328"/>
-          </a:xfrm>
-          <a:prstGeom prst="rect">
-            <a:avLst/>
-          </a:prstGeom>
-          <a:noFill/>
-          <a:ln/>
-        </p:spPr>
-        <p:txBody>
-          <a:bodyPr wrap="square" lIns="0" tIns="0" rIns="0" bIns="0" rtlCol="0" anchor="ctr"/>
-          <a:lstStyle/>
-          <a:p>
-            <a:pPr indent="0" marL="0">
-              <a:buNone/>
-            </a:pPr>
-            <a:r>
-              <a:rPr lang="en-US" sz="1050" dirty="0">
+              <a:t>Limitación funcional por daño estructural.</a:t>
+            </a:r>
+            <a:endParaRPr lang="en-US" sz="1250" dirty="0"/>
+          </a:p>
+          <a:p>
+            <a:pPr marL="342900" indent="-342900">
+              <a:spcAft>
+                <a:spcPts val="600"/>
+              </a:spcAft>
+              <a:buSzPct val="100000"/>
+              <a:buChar char="•"/>
+            </a:pPr>
+            <a:r>
+              <a:rPr lang="en-US" sz="1250" dirty="0">
                 <a:solidFill>
                   <a:srgbClr val="141821"/>
                 </a:solidFill>
@@ -17851,873 +18137,9 @@
                 <a:ea typeface="Calibri" pitchFamily="34" charset="-122"/>
                 <a:cs typeface="Calibri" pitchFamily="34" charset="-120"/>
               </a:rPr>
-              <a:t>Mecánico (peor con el uso)</a:t>
-            </a:r>
-            <a:endParaRPr lang="en-US" sz="1050" dirty="0"/>
-          </a:p>
-        </p:txBody>
-      </p:sp>
-      <p:sp>
-        <p:nvSpPr>
-          <p:cNvPr id="19" name="Shape 17"/>
-          <p:cNvSpPr/>
-          <p:nvPr/>
-        </p:nvSpPr>
-        <p:spPr>
-          <a:xfrm>
-            <a:off x="457200" y="2276856"/>
-            <a:ext cx="8229600" cy="338328"/>
-          </a:xfrm>
-          <a:prstGeom prst="roundRect">
-            <a:avLst>
-              <a:gd name="adj" fmla="val 27027"/>
-            </a:avLst>
-          </a:prstGeom>
-          <a:solidFill>
-            <a:srgbClr val="FFFFFF"/>
-          </a:solidFill>
-          <a:ln w="19050">
-            <a:solidFill>
-              <a:srgbClr val="C4CCE0"/>
-            </a:solidFill>
-            <a:prstDash val="solid"/>
-          </a:ln>
-        </p:spPr>
-      </p:sp>
-      <p:sp>
-        <p:nvSpPr>
-          <p:cNvPr id="20" name="Text 18"/>
-          <p:cNvSpPr txBox="1"/>
-          <p:nvPr/>
-        </p:nvSpPr>
-        <p:spPr>
-          <a:xfrm>
-            <a:off x="594360" y="2276856"/>
-            <a:ext cx="2286000" cy="338328"/>
-          </a:xfrm>
-          <a:prstGeom prst="rect">
-            <a:avLst/>
-          </a:prstGeom>
-          <a:noFill/>
-          <a:ln/>
-        </p:spPr>
-        <p:txBody>
-          <a:bodyPr wrap="square" lIns="0" tIns="0" rIns="0" bIns="0" rtlCol="0" anchor="ctr"/>
-          <a:lstStyle/>
-          <a:p>
-            <a:pPr indent="0" marL="0">
-              <a:buNone/>
-            </a:pPr>
-            <a:r>
-              <a:rPr lang="en-US" sz="1200" b="1" dirty="0">
-                <a:solidFill>
-                  <a:srgbClr val="141821"/>
-                </a:solidFill>
-                <a:latin typeface="Calibri" pitchFamily="34" charset="0"/>
-                <a:ea typeface="Calibri" pitchFamily="34" charset="-122"/>
-                <a:cs typeface="Calibri" pitchFamily="34" charset="-120"/>
-              </a:rPr>
-              <a:t>Rigidez matutina</a:t>
-            </a:r>
-            <a:endParaRPr lang="en-US" sz="1200" dirty="0"/>
-          </a:p>
-        </p:txBody>
-      </p:sp>
-      <p:sp>
-        <p:nvSpPr>
-          <p:cNvPr id="21" name="Text 19"/>
-          <p:cNvSpPr txBox="1"/>
-          <p:nvPr/>
-        </p:nvSpPr>
-        <p:spPr>
-          <a:xfrm>
-            <a:off x="2926080" y="2276856"/>
-            <a:ext cx="2880360" cy="338328"/>
-          </a:xfrm>
-          <a:prstGeom prst="rect">
-            <a:avLst/>
-          </a:prstGeom>
-          <a:noFill/>
-          <a:ln/>
-        </p:spPr>
-        <p:txBody>
-          <a:bodyPr wrap="square" lIns="0" tIns="0" rIns="0" bIns="0" rtlCol="0" anchor="ctr"/>
-          <a:lstStyle/>
-          <a:p>
-            <a:pPr indent="0" marL="0">
-              <a:buNone/>
-            </a:pPr>
-            <a:r>
-              <a:rPr lang="en-US" sz="1050" dirty="0">
-                <a:solidFill>
-                  <a:srgbClr val="141821"/>
-                </a:solidFill>
-                <a:latin typeface="Calibri" pitchFamily="34" charset="0"/>
-                <a:ea typeface="Calibri" pitchFamily="34" charset="-122"/>
-                <a:cs typeface="Calibri" pitchFamily="34" charset="-120"/>
-              </a:rPr>
-              <a:t>&gt; 30–60 min</a:t>
-            </a:r>
-            <a:endParaRPr lang="en-US" sz="1050" dirty="0"/>
-          </a:p>
-        </p:txBody>
-      </p:sp>
-      <p:sp>
-        <p:nvSpPr>
-          <p:cNvPr id="22" name="Text 20"/>
-          <p:cNvSpPr txBox="1"/>
-          <p:nvPr/>
-        </p:nvSpPr>
-        <p:spPr>
-          <a:xfrm>
-            <a:off x="5852160" y="2276856"/>
-            <a:ext cx="2743200" cy="338328"/>
-          </a:xfrm>
-          <a:prstGeom prst="rect">
-            <a:avLst/>
-          </a:prstGeom>
-          <a:noFill/>
-          <a:ln/>
-        </p:spPr>
-        <p:txBody>
-          <a:bodyPr wrap="square" lIns="0" tIns="0" rIns="0" bIns="0" rtlCol="0" anchor="ctr"/>
-          <a:lstStyle/>
-          <a:p>
-            <a:pPr indent="0" marL="0">
-              <a:buNone/>
-            </a:pPr>
-            <a:r>
-              <a:rPr lang="en-US" sz="1050" dirty="0">
-                <a:solidFill>
-                  <a:srgbClr val="141821"/>
-                </a:solidFill>
-                <a:latin typeface="Calibri" pitchFamily="34" charset="0"/>
-                <a:ea typeface="Calibri" pitchFamily="34" charset="-122"/>
-                <a:cs typeface="Calibri" pitchFamily="34" charset="-120"/>
-              </a:rPr>
-              <a:t>&lt; 30 min</a:t>
-            </a:r>
-            <a:endParaRPr lang="en-US" sz="1050" dirty="0"/>
-          </a:p>
-        </p:txBody>
-      </p:sp>
-      <p:sp>
-        <p:nvSpPr>
-          <p:cNvPr id="23" name="Shape 21"/>
-          <p:cNvSpPr/>
-          <p:nvPr/>
-        </p:nvSpPr>
-        <p:spPr>
-          <a:xfrm>
-            <a:off x="457200" y="2647188"/>
-            <a:ext cx="8229600" cy="338328"/>
-          </a:xfrm>
-          <a:prstGeom prst="roundRect">
-            <a:avLst>
-              <a:gd name="adj" fmla="val 27027"/>
-            </a:avLst>
-          </a:prstGeom>
-          <a:solidFill>
-            <a:srgbClr val="FFFFFF"/>
-          </a:solidFill>
-          <a:ln w="19050">
-            <a:solidFill>
-              <a:srgbClr val="C4CCE0"/>
-            </a:solidFill>
-            <a:prstDash val="solid"/>
-          </a:ln>
-        </p:spPr>
-      </p:sp>
-      <p:sp>
-        <p:nvSpPr>
-          <p:cNvPr id="24" name="Text 22"/>
-          <p:cNvSpPr txBox="1"/>
-          <p:nvPr/>
-        </p:nvSpPr>
-        <p:spPr>
-          <a:xfrm>
-            <a:off x="594360" y="2647188"/>
-            <a:ext cx="2286000" cy="338328"/>
-          </a:xfrm>
-          <a:prstGeom prst="rect">
-            <a:avLst/>
-          </a:prstGeom>
-          <a:noFill/>
-          <a:ln/>
-        </p:spPr>
-        <p:txBody>
-          <a:bodyPr wrap="square" lIns="0" tIns="0" rIns="0" bIns="0" rtlCol="0" anchor="ctr"/>
-          <a:lstStyle/>
-          <a:p>
-            <a:pPr indent="0" marL="0">
-              <a:buNone/>
-            </a:pPr>
-            <a:r>
-              <a:rPr lang="en-US" sz="1200" b="1" dirty="0">
-                <a:solidFill>
-                  <a:srgbClr val="141821"/>
-                </a:solidFill>
-                <a:latin typeface="Calibri" pitchFamily="34" charset="0"/>
-                <a:ea typeface="Calibri" pitchFamily="34" charset="-122"/>
-                <a:cs typeface="Calibri" pitchFamily="34" charset="-120"/>
-              </a:rPr>
-              <a:t>Manos</a:t>
-            </a:r>
-            <a:endParaRPr lang="en-US" sz="1200" dirty="0"/>
-          </a:p>
-        </p:txBody>
-      </p:sp>
-      <p:sp>
-        <p:nvSpPr>
-          <p:cNvPr id="25" name="Text 23"/>
-          <p:cNvSpPr txBox="1"/>
-          <p:nvPr/>
-        </p:nvSpPr>
-        <p:spPr>
-          <a:xfrm>
-            <a:off x="2926080" y="2647188"/>
-            <a:ext cx="2880360" cy="338328"/>
-          </a:xfrm>
-          <a:prstGeom prst="rect">
-            <a:avLst/>
-          </a:prstGeom>
-          <a:noFill/>
-          <a:ln/>
-        </p:spPr>
-        <p:txBody>
-          <a:bodyPr wrap="square" lIns="0" tIns="0" rIns="0" bIns="0" rtlCol="0" anchor="ctr"/>
-          <a:lstStyle/>
-          <a:p>
-            <a:pPr indent="0" marL="0">
-              <a:buNone/>
-            </a:pPr>
-            <a:r>
-              <a:rPr lang="en-US" sz="1050" dirty="0">
-                <a:solidFill>
-                  <a:srgbClr val="141821"/>
-                </a:solidFill>
-                <a:latin typeface="Calibri" pitchFamily="34" charset="0"/>
-                <a:ea typeface="Calibri" pitchFamily="34" charset="-122"/>
-                <a:cs typeface="Calibri" pitchFamily="34" charset="-120"/>
-              </a:rPr>
-              <a:t>MCF, IFP, muñeca (simétrico)</a:t>
-            </a:r>
-            <a:endParaRPr lang="en-US" sz="1050" dirty="0"/>
-          </a:p>
-        </p:txBody>
-      </p:sp>
-      <p:sp>
-        <p:nvSpPr>
-          <p:cNvPr id="26" name="Text 24"/>
-          <p:cNvSpPr txBox="1"/>
-          <p:nvPr/>
-        </p:nvSpPr>
-        <p:spPr>
-          <a:xfrm>
-            <a:off x="5852160" y="2647188"/>
-            <a:ext cx="2743200" cy="338328"/>
-          </a:xfrm>
-          <a:prstGeom prst="rect">
-            <a:avLst/>
-          </a:prstGeom>
-          <a:noFill/>
-          <a:ln/>
-        </p:spPr>
-        <p:txBody>
-          <a:bodyPr wrap="square" lIns="0" tIns="0" rIns="0" bIns="0" rtlCol="0" anchor="ctr"/>
-          <a:lstStyle/>
-          <a:p>
-            <a:pPr indent="0" marL="0">
-              <a:buNone/>
-            </a:pPr>
-            <a:r>
-              <a:rPr lang="en-US" sz="1050" dirty="0">
-                <a:solidFill>
-                  <a:srgbClr val="141821"/>
-                </a:solidFill>
-                <a:latin typeface="Calibri" pitchFamily="34" charset="0"/>
-                <a:ea typeface="Calibri" pitchFamily="34" charset="-122"/>
-                <a:cs typeface="Calibri" pitchFamily="34" charset="-120"/>
-              </a:rPr>
-              <a:t>IFD, IFP, base del pulgar</a:t>
-            </a:r>
-            <a:endParaRPr lang="en-US" sz="1050" dirty="0"/>
-          </a:p>
-        </p:txBody>
-      </p:sp>
-      <p:sp>
-        <p:nvSpPr>
-          <p:cNvPr id="27" name="Shape 25"/>
-          <p:cNvSpPr/>
-          <p:nvPr/>
-        </p:nvSpPr>
-        <p:spPr>
-          <a:xfrm>
-            <a:off x="457200" y="3017520"/>
-            <a:ext cx="8229600" cy="338328"/>
-          </a:xfrm>
-          <a:prstGeom prst="roundRect">
-            <a:avLst>
-              <a:gd name="adj" fmla="val 27027"/>
-            </a:avLst>
-          </a:prstGeom>
-          <a:solidFill>
-            <a:srgbClr val="FFFFFF"/>
-          </a:solidFill>
-          <a:ln w="19050">
-            <a:solidFill>
-              <a:srgbClr val="C4CCE0"/>
-            </a:solidFill>
-            <a:prstDash val="solid"/>
-          </a:ln>
-        </p:spPr>
-      </p:sp>
-      <p:sp>
-        <p:nvSpPr>
-          <p:cNvPr id="28" name="Text 26"/>
-          <p:cNvSpPr txBox="1"/>
-          <p:nvPr/>
-        </p:nvSpPr>
-        <p:spPr>
-          <a:xfrm>
-            <a:off x="594360" y="3017520"/>
-            <a:ext cx="2286000" cy="338328"/>
-          </a:xfrm>
-          <a:prstGeom prst="rect">
-            <a:avLst/>
-          </a:prstGeom>
-          <a:noFill/>
-          <a:ln/>
-        </p:spPr>
-        <p:txBody>
-          <a:bodyPr wrap="square" lIns="0" tIns="0" rIns="0" bIns="0" rtlCol="0" anchor="ctr"/>
-          <a:lstStyle/>
-          <a:p>
-            <a:pPr indent="0" marL="0">
-              <a:buNone/>
-            </a:pPr>
-            <a:r>
-              <a:rPr lang="en-US" sz="1200" b="1" dirty="0">
-                <a:solidFill>
-                  <a:srgbClr val="141821"/>
-                </a:solidFill>
-                <a:latin typeface="Calibri" pitchFamily="34" charset="0"/>
-                <a:ea typeface="Calibri" pitchFamily="34" charset="-122"/>
-                <a:cs typeface="Calibri" pitchFamily="34" charset="-120"/>
-              </a:rPr>
-              <a:t>Tumefacción</a:t>
-            </a:r>
-            <a:endParaRPr lang="en-US" sz="1200" dirty="0"/>
-          </a:p>
-        </p:txBody>
-      </p:sp>
-      <p:sp>
-        <p:nvSpPr>
-          <p:cNvPr id="29" name="Text 27"/>
-          <p:cNvSpPr txBox="1"/>
-          <p:nvPr/>
-        </p:nvSpPr>
-        <p:spPr>
-          <a:xfrm>
-            <a:off x="2926080" y="3017520"/>
-            <a:ext cx="2880360" cy="338328"/>
-          </a:xfrm>
-          <a:prstGeom prst="rect">
-            <a:avLst/>
-          </a:prstGeom>
-          <a:noFill/>
-          <a:ln/>
-        </p:spPr>
-        <p:txBody>
-          <a:bodyPr wrap="square" lIns="0" tIns="0" rIns="0" bIns="0" rtlCol="0" anchor="ctr"/>
-          <a:lstStyle/>
-          <a:p>
-            <a:pPr indent="0" marL="0">
-              <a:buNone/>
-            </a:pPr>
-            <a:r>
-              <a:rPr lang="en-US" sz="1050" dirty="0">
-                <a:solidFill>
-                  <a:srgbClr val="141821"/>
-                </a:solidFill>
-                <a:latin typeface="Calibri" pitchFamily="34" charset="0"/>
-                <a:ea typeface="Calibri" pitchFamily="34" charset="-122"/>
-                <a:cs typeface="Calibri" pitchFamily="34" charset="-120"/>
-              </a:rPr>
-              <a:t>Blanda y caliente</a:t>
-            </a:r>
-            <a:endParaRPr lang="en-US" sz="1050" dirty="0"/>
-          </a:p>
-        </p:txBody>
-      </p:sp>
-      <p:sp>
-        <p:nvSpPr>
-          <p:cNvPr id="30" name="Text 28"/>
-          <p:cNvSpPr txBox="1"/>
-          <p:nvPr/>
-        </p:nvSpPr>
-        <p:spPr>
-          <a:xfrm>
-            <a:off x="5852160" y="3017520"/>
-            <a:ext cx="2743200" cy="338328"/>
-          </a:xfrm>
-          <a:prstGeom prst="rect">
-            <a:avLst/>
-          </a:prstGeom>
-          <a:noFill/>
-          <a:ln/>
-        </p:spPr>
-        <p:txBody>
-          <a:bodyPr wrap="square" lIns="0" tIns="0" rIns="0" bIns="0" rtlCol="0" anchor="ctr"/>
-          <a:lstStyle/>
-          <a:p>
-            <a:pPr indent="0" marL="0">
-              <a:buNone/>
-            </a:pPr>
-            <a:r>
-              <a:rPr lang="en-US" sz="1050" dirty="0">
-                <a:solidFill>
-                  <a:srgbClr val="141821"/>
-                </a:solidFill>
-                <a:latin typeface="Calibri" pitchFamily="34" charset="0"/>
-                <a:ea typeface="Calibri" pitchFamily="34" charset="-122"/>
-                <a:cs typeface="Calibri" pitchFamily="34" charset="-120"/>
-              </a:rPr>
-              <a:t>Dura y ósea</a:t>
-            </a:r>
-            <a:endParaRPr lang="en-US" sz="1050" dirty="0"/>
-          </a:p>
-        </p:txBody>
-      </p:sp>
-      <p:sp>
-        <p:nvSpPr>
-          <p:cNvPr id="31" name="Shape 29"/>
-          <p:cNvSpPr/>
-          <p:nvPr/>
-        </p:nvSpPr>
-        <p:spPr>
-          <a:xfrm>
-            <a:off x="457200" y="3387852"/>
-            <a:ext cx="8229600" cy="338328"/>
-          </a:xfrm>
-          <a:prstGeom prst="roundRect">
-            <a:avLst>
-              <a:gd name="adj" fmla="val 27027"/>
-            </a:avLst>
-          </a:prstGeom>
-          <a:solidFill>
-            <a:srgbClr val="FFFFFF"/>
-          </a:solidFill>
-          <a:ln w="19050">
-            <a:solidFill>
-              <a:srgbClr val="C4CCE0"/>
-            </a:solidFill>
-            <a:prstDash val="solid"/>
-          </a:ln>
-        </p:spPr>
-      </p:sp>
-      <p:sp>
-        <p:nvSpPr>
-          <p:cNvPr id="32" name="Text 30"/>
-          <p:cNvSpPr txBox="1"/>
-          <p:nvPr/>
-        </p:nvSpPr>
-        <p:spPr>
-          <a:xfrm>
-            <a:off x="594360" y="3387852"/>
-            <a:ext cx="2286000" cy="338328"/>
-          </a:xfrm>
-          <a:prstGeom prst="rect">
-            <a:avLst/>
-          </a:prstGeom>
-          <a:noFill/>
-          <a:ln/>
-        </p:spPr>
-        <p:txBody>
-          <a:bodyPr wrap="square" lIns="0" tIns="0" rIns="0" bIns="0" rtlCol="0" anchor="ctr"/>
-          <a:lstStyle/>
-          <a:p>
-            <a:pPr indent="0" marL="0">
-              <a:buNone/>
-            </a:pPr>
-            <a:r>
-              <a:rPr lang="en-US" sz="1200" b="1" dirty="0">
-                <a:solidFill>
-                  <a:srgbClr val="141821"/>
-                </a:solidFill>
-                <a:latin typeface="Calibri" pitchFamily="34" charset="0"/>
-                <a:ea typeface="Calibri" pitchFamily="34" charset="-122"/>
-                <a:cs typeface="Calibri" pitchFamily="34" charset="-120"/>
-              </a:rPr>
-              <a:t>Laboratorio</a:t>
-            </a:r>
-            <a:endParaRPr lang="en-US" sz="1200" dirty="0"/>
-          </a:p>
-        </p:txBody>
-      </p:sp>
-      <p:sp>
-        <p:nvSpPr>
-          <p:cNvPr id="33" name="Text 31"/>
-          <p:cNvSpPr txBox="1"/>
-          <p:nvPr/>
-        </p:nvSpPr>
-        <p:spPr>
-          <a:xfrm>
-            <a:off x="2926080" y="3387852"/>
-            <a:ext cx="2880360" cy="338328"/>
-          </a:xfrm>
-          <a:prstGeom prst="rect">
-            <a:avLst/>
-          </a:prstGeom>
-          <a:noFill/>
-          <a:ln/>
-        </p:spPr>
-        <p:txBody>
-          <a:bodyPr wrap="square" lIns="0" tIns="0" rIns="0" bIns="0" rtlCol="0" anchor="ctr"/>
-          <a:lstStyle/>
-          <a:p>
-            <a:pPr indent="0" marL="0">
-              <a:buNone/>
-            </a:pPr>
-            <a:r>
-              <a:rPr lang="en-US" sz="1050" dirty="0">
-                <a:solidFill>
-                  <a:srgbClr val="141821"/>
-                </a:solidFill>
-                <a:latin typeface="Calibri" pitchFamily="34" charset="0"/>
-                <a:ea typeface="Calibri" pitchFamily="34" charset="-122"/>
-                <a:cs typeface="Calibri" pitchFamily="34" charset="-120"/>
-              </a:rPr>
-              <a:t>FR/anti-CCP+, VSG/PCR ↑</a:t>
-            </a:r>
-            <a:endParaRPr lang="en-US" sz="1050" dirty="0"/>
-          </a:p>
-        </p:txBody>
-      </p:sp>
-      <p:sp>
-        <p:nvSpPr>
-          <p:cNvPr id="34" name="Text 32"/>
-          <p:cNvSpPr txBox="1"/>
-          <p:nvPr/>
-        </p:nvSpPr>
-        <p:spPr>
-          <a:xfrm>
-            <a:off x="5852160" y="3387852"/>
-            <a:ext cx="2743200" cy="338328"/>
-          </a:xfrm>
-          <a:prstGeom prst="rect">
-            <a:avLst/>
-          </a:prstGeom>
-          <a:noFill/>
-          <a:ln/>
-        </p:spPr>
-        <p:txBody>
-          <a:bodyPr wrap="square" lIns="0" tIns="0" rIns="0" bIns="0" rtlCol="0" anchor="ctr"/>
-          <a:lstStyle/>
-          <a:p>
-            <a:pPr indent="0" marL="0">
-              <a:buNone/>
-            </a:pPr>
-            <a:r>
-              <a:rPr lang="en-US" sz="1050" dirty="0">
-                <a:solidFill>
-                  <a:srgbClr val="141821"/>
-                </a:solidFill>
-                <a:latin typeface="Calibri" pitchFamily="34" charset="0"/>
-                <a:ea typeface="Calibri" pitchFamily="34" charset="-122"/>
-                <a:cs typeface="Calibri" pitchFamily="34" charset="-120"/>
-              </a:rPr>
-              <a:t>Normales</a:t>
-            </a:r>
-            <a:endParaRPr lang="en-US" sz="1050" dirty="0"/>
-          </a:p>
-        </p:txBody>
-      </p:sp>
-      <p:sp>
-        <p:nvSpPr>
-          <p:cNvPr id="35" name="Shape 33"/>
-          <p:cNvSpPr/>
-          <p:nvPr/>
-        </p:nvSpPr>
-        <p:spPr>
-          <a:xfrm>
-            <a:off x="457200" y="3758184"/>
-            <a:ext cx="8229600" cy="338328"/>
-          </a:xfrm>
-          <a:prstGeom prst="roundRect">
-            <a:avLst>
-              <a:gd name="adj" fmla="val 27027"/>
-            </a:avLst>
-          </a:prstGeom>
-          <a:solidFill>
-            <a:srgbClr val="FFFFFF"/>
-          </a:solidFill>
-          <a:ln w="19050">
-            <a:solidFill>
-              <a:srgbClr val="C4CCE0"/>
-            </a:solidFill>
-            <a:prstDash val="solid"/>
-          </a:ln>
-        </p:spPr>
-      </p:sp>
-      <p:sp>
-        <p:nvSpPr>
-          <p:cNvPr id="36" name="Text 34"/>
-          <p:cNvSpPr txBox="1"/>
-          <p:nvPr/>
-        </p:nvSpPr>
-        <p:spPr>
-          <a:xfrm>
-            <a:off x="594360" y="3758184"/>
-            <a:ext cx="2286000" cy="338328"/>
-          </a:xfrm>
-          <a:prstGeom prst="rect">
-            <a:avLst/>
-          </a:prstGeom>
-          <a:noFill/>
-          <a:ln/>
-        </p:spPr>
-        <p:txBody>
-          <a:bodyPr wrap="square" lIns="0" tIns="0" rIns="0" bIns="0" rtlCol="0" anchor="ctr"/>
-          <a:lstStyle/>
-          <a:p>
-            <a:pPr indent="0" marL="0">
-              <a:buNone/>
-            </a:pPr>
-            <a:r>
-              <a:rPr lang="en-US" sz="1200" b="1" dirty="0">
-                <a:solidFill>
-                  <a:srgbClr val="141821"/>
-                </a:solidFill>
-                <a:latin typeface="Calibri" pitchFamily="34" charset="0"/>
-                <a:ea typeface="Calibri" pitchFamily="34" charset="-122"/>
-                <a:cs typeface="Calibri" pitchFamily="34" charset="-120"/>
-              </a:rPr>
-              <a:t>Radiografía</a:t>
-            </a:r>
-            <a:endParaRPr lang="en-US" sz="1200" dirty="0"/>
-          </a:p>
-        </p:txBody>
-      </p:sp>
-      <p:sp>
-        <p:nvSpPr>
-          <p:cNvPr id="37" name="Text 35"/>
-          <p:cNvSpPr txBox="1"/>
-          <p:nvPr/>
-        </p:nvSpPr>
-        <p:spPr>
-          <a:xfrm>
-            <a:off x="2926080" y="3758184"/>
-            <a:ext cx="2880360" cy="338328"/>
-          </a:xfrm>
-          <a:prstGeom prst="rect">
-            <a:avLst/>
-          </a:prstGeom>
-          <a:noFill/>
-          <a:ln/>
-        </p:spPr>
-        <p:txBody>
-          <a:bodyPr wrap="square" lIns="0" tIns="0" rIns="0" bIns="0" rtlCol="0" anchor="ctr"/>
-          <a:lstStyle/>
-          <a:p>
-            <a:pPr indent="0" marL="0">
-              <a:buNone/>
-            </a:pPr>
-            <a:r>
-              <a:rPr lang="en-US" sz="1050" dirty="0">
-                <a:solidFill>
-                  <a:srgbClr val="141821"/>
-                </a:solidFill>
-                <a:latin typeface="Calibri" pitchFamily="34" charset="0"/>
-                <a:ea typeface="Calibri" pitchFamily="34" charset="-122"/>
-                <a:cs typeface="Calibri" pitchFamily="34" charset="-120"/>
-              </a:rPr>
-              <a:t>Erosiones, pinzamiento uniforme</a:t>
-            </a:r>
-            <a:endParaRPr lang="en-US" sz="1050" dirty="0"/>
-          </a:p>
-        </p:txBody>
-      </p:sp>
-      <p:sp>
-        <p:nvSpPr>
-          <p:cNvPr id="38" name="Text 36"/>
-          <p:cNvSpPr txBox="1"/>
-          <p:nvPr/>
-        </p:nvSpPr>
-        <p:spPr>
-          <a:xfrm>
-            <a:off x="5852160" y="3758184"/>
-            <a:ext cx="2743200" cy="338328"/>
-          </a:xfrm>
-          <a:prstGeom prst="rect">
-            <a:avLst/>
-          </a:prstGeom>
-          <a:noFill/>
-          <a:ln/>
-        </p:spPr>
-        <p:txBody>
-          <a:bodyPr wrap="square" lIns="0" tIns="0" rIns="0" bIns="0" rtlCol="0" anchor="ctr"/>
-          <a:lstStyle/>
-          <a:p>
-            <a:pPr indent="0" marL="0">
-              <a:buNone/>
-            </a:pPr>
-            <a:r>
-              <a:rPr lang="en-US" sz="1050" dirty="0">
-                <a:solidFill>
-                  <a:srgbClr val="141821"/>
-                </a:solidFill>
-                <a:latin typeface="Calibri" pitchFamily="34" charset="0"/>
-                <a:ea typeface="Calibri" pitchFamily="34" charset="-122"/>
-                <a:cs typeface="Calibri" pitchFamily="34" charset="-120"/>
-              </a:rPr>
-              <a:t>Osteofitos, esclerosis</a:t>
-            </a:r>
-            <a:endParaRPr lang="en-US" sz="1050" dirty="0"/>
-          </a:p>
-        </p:txBody>
-      </p:sp>
-      <p:sp>
-        <p:nvSpPr>
-          <p:cNvPr id="39" name="Shape 37"/>
-          <p:cNvSpPr/>
-          <p:nvPr/>
-        </p:nvSpPr>
-        <p:spPr>
-          <a:xfrm>
-            <a:off x="457200" y="4128516"/>
-            <a:ext cx="8229600" cy="338328"/>
-          </a:xfrm>
-          <a:prstGeom prst="roundRect">
-            <a:avLst>
-              <a:gd name="adj" fmla="val 27027"/>
-            </a:avLst>
-          </a:prstGeom>
-          <a:solidFill>
-            <a:srgbClr val="FFFFFF"/>
-          </a:solidFill>
-          <a:ln w="19050">
-            <a:solidFill>
-              <a:srgbClr val="C4CCE0"/>
-            </a:solidFill>
-            <a:prstDash val="solid"/>
-          </a:ln>
-        </p:spPr>
-      </p:sp>
-      <p:sp>
-        <p:nvSpPr>
-          <p:cNvPr id="40" name="Text 38"/>
-          <p:cNvSpPr txBox="1"/>
-          <p:nvPr/>
-        </p:nvSpPr>
-        <p:spPr>
-          <a:xfrm>
-            <a:off x="594360" y="4128516"/>
-            <a:ext cx="2286000" cy="338328"/>
-          </a:xfrm>
-          <a:prstGeom prst="rect">
-            <a:avLst/>
-          </a:prstGeom>
-          <a:noFill/>
-          <a:ln/>
-        </p:spPr>
-        <p:txBody>
-          <a:bodyPr wrap="square" lIns="0" tIns="0" rIns="0" bIns="0" rtlCol="0" anchor="ctr"/>
-          <a:lstStyle/>
-          <a:p>
-            <a:pPr indent="0" marL="0">
-              <a:buNone/>
-            </a:pPr>
-            <a:r>
-              <a:rPr lang="en-US" sz="1200" b="1" dirty="0">
-                <a:solidFill>
-                  <a:srgbClr val="141821"/>
-                </a:solidFill>
-                <a:latin typeface="Calibri" pitchFamily="34" charset="0"/>
-                <a:ea typeface="Calibri" pitchFamily="34" charset="-122"/>
-                <a:cs typeface="Calibri" pitchFamily="34" charset="-120"/>
-              </a:rPr>
-              <a:t>Conducta</a:t>
-            </a:r>
-            <a:endParaRPr lang="en-US" sz="1200" dirty="0"/>
-          </a:p>
-        </p:txBody>
-      </p:sp>
-      <p:sp>
-        <p:nvSpPr>
-          <p:cNvPr id="41" name="Text 39"/>
-          <p:cNvSpPr txBox="1"/>
-          <p:nvPr/>
-        </p:nvSpPr>
-        <p:spPr>
-          <a:xfrm>
-            <a:off x="2926080" y="4128516"/>
-            <a:ext cx="2880360" cy="338328"/>
-          </a:xfrm>
-          <a:prstGeom prst="rect">
-            <a:avLst/>
-          </a:prstGeom>
-          <a:noFill/>
-          <a:ln/>
-        </p:spPr>
-        <p:txBody>
-          <a:bodyPr wrap="square" lIns="0" tIns="0" rIns="0" bIns="0" rtlCol="0" anchor="ctr"/>
-          <a:lstStyle/>
-          <a:p>
-            <a:pPr indent="0" marL="0">
-              <a:buNone/>
-            </a:pPr>
-            <a:r>
-              <a:rPr lang="en-US" sz="1050" dirty="0">
-                <a:solidFill>
-                  <a:srgbClr val="141821"/>
-                </a:solidFill>
-                <a:latin typeface="Calibri" pitchFamily="34" charset="0"/>
-                <a:ea typeface="Calibri" pitchFamily="34" charset="-122"/>
-                <a:cs typeface="Calibri" pitchFamily="34" charset="-120"/>
-              </a:rPr>
-              <a:t>Derivar: FAME temprano</a:t>
-            </a:r>
-            <a:endParaRPr lang="en-US" sz="1050" dirty="0"/>
-          </a:p>
-        </p:txBody>
-      </p:sp>
-      <p:sp>
-        <p:nvSpPr>
-          <p:cNvPr id="42" name="Text 40"/>
-          <p:cNvSpPr txBox="1"/>
-          <p:nvPr/>
-        </p:nvSpPr>
-        <p:spPr>
-          <a:xfrm>
-            <a:off x="5852160" y="4128516"/>
-            <a:ext cx="2743200" cy="338328"/>
-          </a:xfrm>
-          <a:prstGeom prst="rect">
-            <a:avLst/>
-          </a:prstGeom>
-          <a:noFill/>
-          <a:ln/>
-        </p:spPr>
-        <p:txBody>
-          <a:bodyPr wrap="square" lIns="0" tIns="0" rIns="0" bIns="0" rtlCol="0" anchor="ctr"/>
-          <a:lstStyle/>
-          <a:p>
-            <a:pPr indent="0" marL="0">
-              <a:buNone/>
-            </a:pPr>
-            <a:r>
-              <a:rPr lang="en-US" sz="1050" dirty="0">
-                <a:solidFill>
-                  <a:srgbClr val="141821"/>
-                </a:solidFill>
-                <a:latin typeface="Calibri" pitchFamily="34" charset="0"/>
-                <a:ea typeface="Calibri" pitchFamily="34" charset="-122"/>
-                <a:cs typeface="Calibri" pitchFamily="34" charset="-120"/>
-              </a:rPr>
-              <a:t>Manejo sintomático</a:t>
-            </a:r>
-            <a:endParaRPr lang="en-US" sz="1050" dirty="0"/>
+              <a:t>Evitar intensificar inmunosupresión sin evidencia de actividad de AR.</a:t>
+            </a:r>
+            <a:endParaRPr lang="en-US" sz="1250" dirty="0"/>
           </a:p>
         </p:txBody>
       </p:sp>
@@ -18834,7 +18256,7 @@
                 <a:ea typeface="Calibri" pitchFamily="34" charset="-122"/>
                 <a:cs typeface="Calibri" pitchFamily="34" charset="-120"/>
               </a:rPr>
-              <a:t>DEL DIAGNÓSTICO A LA ACCIÓN</a:t>
+              <a:t>SÍNTESIS</a:t>
             </a:r>
             <a:endParaRPr lang="en-US" sz="1400" dirty="0"/>
           </a:p>
@@ -18873,7 +18295,7 @@
                 <a:ea typeface="Calibri" pitchFamily="34" charset="-122"/>
                 <a:cs typeface="Calibri" pitchFamily="34" charset="-120"/>
               </a:rPr>
-              <a:t>¿Qué cambia la respuesta?</a:t>
+              <a:t>Tabla maestra: la respuesta en una mirada</a:t>
             </a:r>
             <a:endParaRPr lang="en-US" sz="2900" dirty="0"/>
           </a:p>
@@ -18935,7 +18357,7 @@
                 <a:ea typeface="Calibri" pitchFamily="34" charset="-122"/>
                 <a:cs typeface="Calibri" pitchFamily="34" charset="-120"/>
               </a:rPr>
-              <a:t>4. Combe B, Landewe R, Daien CI, Hua C, Aletaha D, Alvaro-Gracia JM, et al. 2016 update of the EULAR recommendations for the management of early arthritis. Ann Rheum Dis. 2017;76(6):948-59.</a:t>
+              <a:t>1. Smolen JS, Aletaha D, Barton A, Burmester GR, Emery P, Firestein GS, et al. Rheumatoid arthritis. Nat Rev Dis Primers. 2018;4:18001.</a:t>
             </a:r>
             <a:endParaRPr lang="en-US" sz="900" dirty="0"/>
           </a:p>
@@ -18952,7 +18374,24 @@
                 <a:ea typeface="Calibri" pitchFamily="34" charset="-122"/>
                 <a:cs typeface="Calibri" pitchFamily="34" charset="-120"/>
               </a:rPr>
-              <a:t>9. Kolasinski SL, Neogi T, Hochberg MC, Oatis C, Guyatt G, Block J, et al. 2019 ACR/Arthritis Foundation guideline for the management of osteoarthritis of the hand, hip, and knee. Arthritis Rheumatol. 2020;72(2):220-33.</a:t>
+              <a:t>7. Hunter DJ, Bierma-Zeinstra S. Osteoarthritis. Lancet. 2019;393(10182):1745-59.</a:t>
+            </a:r>
+            <a:endParaRPr lang="en-US" sz="900" dirty="0"/>
+          </a:p>
+          <a:p>
+            <a:pPr indent="0" marL="0">
+              <a:buNone/>
+            </a:pPr>
+            <a:r>
+              <a:rPr lang="en-US" sz="900" dirty="0">
+                <a:solidFill>
+                  <a:srgbClr val="141821"/>
+                </a:solidFill>
+                <a:latin typeface="Calibri" pitchFamily="34" charset="0"/>
+                <a:ea typeface="Calibri" pitchFamily="34" charset="-122"/>
+                <a:cs typeface="Calibri" pitchFamily="34" charset="-120"/>
+              </a:rPr>
+              <a:t>6. Katz JN, Arant KR, Loeser RF. Diagnosis and treatment of hip and knee osteoarthritis: a review. JAMA. 2021;325(6):568-78.</a:t>
             </a:r>
             <a:endParaRPr lang="en-US" sz="900" dirty="0"/>
           </a:p>
@@ -18991,460 +18430,16 @@
         </p:nvSpPr>
         <p:spPr>
           <a:xfrm>
-            <a:off x="457200" y="1280160"/>
-            <a:ext cx="4023360" cy="3017520"/>
+            <a:off x="457200" y="1143000"/>
+            <a:ext cx="8229600" cy="365760"/>
           </a:xfrm>
           <a:prstGeom prst="roundRect">
             <a:avLst>
-              <a:gd name="adj" fmla="val 3030"/>
+              <a:gd name="adj" fmla="val 25000"/>
             </a:avLst>
           </a:prstGeom>
           <a:solidFill>
             <a:srgbClr val="FFFFFF"/>
-          </a:solidFill>
-          <a:ln w="19050">
-            <a:solidFill>
-              <a:srgbClr val="F2546B"/>
-            </a:solidFill>
-            <a:prstDash val="solid"/>
-          </a:ln>
-        </p:spPr>
-      </p:sp>
-      <p:sp>
-        <p:nvSpPr>
-          <p:cNvPr id="8" name="Shape 6"/>
-          <p:cNvSpPr/>
-          <p:nvPr/>
-        </p:nvSpPr>
-        <p:spPr>
-          <a:xfrm>
-            <a:off x="658368" y="1481328"/>
-            <a:ext cx="585216" cy="585216"/>
-          </a:xfrm>
-          <a:prstGeom prst="ellipse">
-            <a:avLst/>
-          </a:prstGeom>
-          <a:solidFill>
-            <a:srgbClr val="F2546B"/>
-          </a:solidFill>
-          <a:ln w="12700">
-            <a:solidFill>
-              <a:srgbClr val="F2546B"/>
-            </a:solidFill>
-            <a:prstDash val="solid"/>
-          </a:ln>
-        </p:spPr>
-      </p:sp>
-      <p:pic>
-        <p:nvPicPr>
-          <p:cNvPr id="9" name="Image 0" descr="preencoded.png">    </p:cNvPr>
-          <p:cNvPicPr>
-            <a:picLocks noChangeAspect="1"/>
-          </p:cNvPicPr>
-          <p:nvPr/>
-        </p:nvPicPr>
-        <p:blipFill>
-          <a:blip r:embed="rId1"/>
-          <a:stretch>
-            <a:fillRect/>
-          </a:stretch>
-        </p:blipFill>
-        <p:spPr>
-          <a:xfrm>
-            <a:off x="798820" y="1621780"/>
-            <a:ext cx="304312" cy="304312"/>
-          </a:xfrm>
-          <a:prstGeom prst="rect">
-            <a:avLst/>
-          </a:prstGeom>
-        </p:spPr>
-      </p:pic>
-      <p:sp>
-        <p:nvSpPr>
-          <p:cNvPr id="10" name="Text 7"/>
-          <p:cNvSpPr txBox="1"/>
-          <p:nvPr/>
-        </p:nvSpPr>
-        <p:spPr>
-          <a:xfrm>
-            <a:off x="1371600" y="1536192"/>
-            <a:ext cx="2926080" cy="457200"/>
-          </a:xfrm>
-          <a:prstGeom prst="rect">
-            <a:avLst/>
-          </a:prstGeom>
-          <a:noFill/>
-          <a:ln/>
-        </p:spPr>
-        <p:txBody>
-          <a:bodyPr wrap="square" lIns="0" tIns="0" rIns="0" bIns="0" rtlCol="0" anchor="ctr"/>
-          <a:lstStyle/>
-          <a:p>
-            <a:pPr indent="0" marL="0">
-              <a:buNone/>
-            </a:pPr>
-            <a:r>
-              <a:rPr lang="en-US" sz="1750" b="1" dirty="0">
-                <a:solidFill>
-                  <a:srgbClr val="C81E43"/>
-                </a:solidFill>
-                <a:latin typeface="Calibri" pitchFamily="34" charset="0"/>
-                <a:ea typeface="Calibri" pitchFamily="34" charset="-122"/>
-                <a:cs typeface="Calibri" pitchFamily="34" charset="-120"/>
-              </a:rPr>
-              <a:t>Si es AR</a:t>
-            </a:r>
-            <a:endParaRPr lang="en-US" sz="1750" dirty="0"/>
-          </a:p>
-        </p:txBody>
-      </p:sp>
-      <p:sp>
-        <p:nvSpPr>
-          <p:cNvPr id="11" name="Text 8"/>
-          <p:cNvSpPr txBox="1"/>
-          <p:nvPr/>
-        </p:nvSpPr>
-        <p:spPr>
-          <a:xfrm>
-            <a:off x="685800" y="2194560"/>
-            <a:ext cx="3611880" cy="2057400"/>
-          </a:xfrm>
-          <a:prstGeom prst="rect">
-            <a:avLst/>
-          </a:prstGeom>
-          <a:noFill/>
-          <a:ln/>
-        </p:spPr>
-        <p:txBody>
-          <a:bodyPr wrap="square" lIns="0" tIns="0" rIns="0" bIns="0" rtlCol="0" anchor="t"/>
-          <a:lstStyle/>
-          <a:p>
-            <a:pPr marL="342900" indent="-342900">
-              <a:spcAft>
-                <a:spcPts val="700"/>
-              </a:spcAft>
-              <a:buSzPct val="100000"/>
-              <a:buChar char="•"/>
-            </a:pPr>
-            <a:r>
-              <a:rPr lang="en-US" sz="1350" dirty="0">
-                <a:solidFill>
-                  <a:srgbClr val="141821"/>
-                </a:solidFill>
-                <a:latin typeface="Calibri" pitchFamily="34" charset="0"/>
-                <a:ea typeface="Calibri" pitchFamily="34" charset="-122"/>
-                <a:cs typeface="Calibri" pitchFamily="34" charset="-120"/>
-              </a:rPr>
-              <a:t>Derivar a reumatología (ventana &lt; 12 semanas).</a:t>
-            </a:r>
-            <a:endParaRPr lang="en-US" sz="1350" dirty="0"/>
-          </a:p>
-          <a:p>
-            <a:pPr marL="342900" indent="-342900">
-              <a:spcAft>
-                <a:spcPts val="700"/>
-              </a:spcAft>
-              <a:buSzPct val="100000"/>
-              <a:buChar char="•"/>
-            </a:pPr>
-            <a:r>
-              <a:rPr lang="en-US" sz="1350" dirty="0">
-                <a:solidFill>
-                  <a:srgbClr val="141821"/>
-                </a:solidFill>
-                <a:latin typeface="Calibri" pitchFamily="34" charset="0"/>
-                <a:ea typeface="Calibri" pitchFamily="34" charset="-122"/>
-                <a:cs typeface="Calibri" pitchFamily="34" charset="-120"/>
-              </a:rPr>
-              <a:t>Tratar por objetivo (treat-to-target): remisión.</a:t>
-            </a:r>
-            <a:endParaRPr lang="en-US" sz="1350" dirty="0"/>
-          </a:p>
-          <a:p>
-            <a:pPr marL="342900" indent="-342900">
-              <a:spcAft>
-                <a:spcPts val="700"/>
-              </a:spcAft>
-              <a:buSzPct val="100000"/>
-              <a:buChar char="•"/>
-            </a:pPr>
-            <a:r>
-              <a:rPr lang="en-US" sz="1350" dirty="0">
-                <a:solidFill>
-                  <a:srgbClr val="141821"/>
-                </a:solidFill>
-                <a:latin typeface="Calibri" pitchFamily="34" charset="0"/>
-                <a:ea typeface="Calibri" pitchFamily="34" charset="-122"/>
-                <a:cs typeface="Calibri" pitchFamily="34" charset="-120"/>
-              </a:rPr>
-              <a:t>FAME: metotrexato de primera línea.</a:t>
-            </a:r>
-            <a:endParaRPr lang="en-US" sz="1350" dirty="0"/>
-          </a:p>
-          <a:p>
-            <a:pPr marL="342900" indent="-342900">
-              <a:spcAft>
-                <a:spcPts val="700"/>
-              </a:spcAft>
-              <a:buSzPct val="100000"/>
-              <a:buChar char="•"/>
-            </a:pPr>
-            <a:r>
-              <a:rPr lang="en-US" sz="1350" dirty="0">
-                <a:solidFill>
-                  <a:srgbClr val="141821"/>
-                </a:solidFill>
-                <a:latin typeface="Calibri" pitchFamily="34" charset="0"/>
-                <a:ea typeface="Calibri" pitchFamily="34" charset="-122"/>
-                <a:cs typeface="Calibri" pitchFamily="34" charset="-120"/>
-              </a:rPr>
-              <a:t>Frenar la inflamación evita la erosión irreversible.</a:t>
-            </a:r>
-            <a:endParaRPr lang="en-US" sz="1350" dirty="0"/>
-          </a:p>
-        </p:txBody>
-      </p:sp>
-      <p:sp>
-        <p:nvSpPr>
-          <p:cNvPr id="12" name="Shape 9"/>
-          <p:cNvSpPr/>
-          <p:nvPr/>
-        </p:nvSpPr>
-        <p:spPr>
-          <a:xfrm>
-            <a:off x="4663440" y="1280160"/>
-            <a:ext cx="4023360" cy="3017520"/>
-          </a:xfrm>
-          <a:prstGeom prst="roundRect">
-            <a:avLst>
-              <a:gd name="adj" fmla="val 3030"/>
-            </a:avLst>
-          </a:prstGeom>
-          <a:solidFill>
-            <a:srgbClr val="FFFFFF"/>
-          </a:solidFill>
-          <a:ln w="19050">
-            <a:solidFill>
-              <a:srgbClr val="F2B43C"/>
-            </a:solidFill>
-            <a:prstDash val="solid"/>
-          </a:ln>
-        </p:spPr>
-      </p:sp>
-      <p:sp>
-        <p:nvSpPr>
-          <p:cNvPr id="13" name="Shape 10"/>
-          <p:cNvSpPr/>
-          <p:nvPr/>
-        </p:nvSpPr>
-        <p:spPr>
-          <a:xfrm>
-            <a:off x="4864608" y="1481328"/>
-            <a:ext cx="585216" cy="585216"/>
-          </a:xfrm>
-          <a:prstGeom prst="ellipse">
-            <a:avLst/>
-          </a:prstGeom>
-          <a:solidFill>
-            <a:srgbClr val="F2B43C"/>
-          </a:solidFill>
-          <a:ln w="12700">
-            <a:solidFill>
-              <a:srgbClr val="F2B43C"/>
-            </a:solidFill>
-            <a:prstDash val="solid"/>
-          </a:ln>
-        </p:spPr>
-      </p:sp>
-      <p:pic>
-        <p:nvPicPr>
-          <p:cNvPr id="14" name="Image 1" descr="preencoded.png">    </p:cNvPr>
-          <p:cNvPicPr>
-            <a:picLocks noChangeAspect="1"/>
-          </p:cNvPicPr>
-          <p:nvPr/>
-        </p:nvPicPr>
-        <p:blipFill>
-          <a:blip r:embed="rId2"/>
-          <a:stretch>
-            <a:fillRect/>
-          </a:stretch>
-        </p:blipFill>
-        <p:spPr>
-          <a:xfrm>
-            <a:off x="5005060" y="1621780"/>
-            <a:ext cx="304312" cy="304312"/>
-          </a:xfrm>
-          <a:prstGeom prst="rect">
-            <a:avLst/>
-          </a:prstGeom>
-        </p:spPr>
-      </p:pic>
-      <p:sp>
-        <p:nvSpPr>
-          <p:cNvPr id="15" name="Text 11"/>
-          <p:cNvSpPr txBox="1"/>
-          <p:nvPr/>
-        </p:nvSpPr>
-        <p:spPr>
-          <a:xfrm>
-            <a:off x="5577840" y="1536192"/>
-            <a:ext cx="2926080" cy="457200"/>
-          </a:xfrm>
-          <a:prstGeom prst="rect">
-            <a:avLst/>
-          </a:prstGeom>
-          <a:noFill/>
-          <a:ln/>
-        </p:spPr>
-        <p:txBody>
-          <a:bodyPr wrap="square" lIns="0" tIns="0" rIns="0" bIns="0" rtlCol="0" anchor="ctr"/>
-          <a:lstStyle/>
-          <a:p>
-            <a:pPr indent="0" marL="0">
-              <a:buNone/>
-            </a:pPr>
-            <a:r>
-              <a:rPr lang="en-US" sz="1750" b="1" dirty="0">
-                <a:solidFill>
-                  <a:srgbClr val="A66A00"/>
-                </a:solidFill>
-                <a:latin typeface="Calibri" pitchFamily="34" charset="0"/>
-                <a:ea typeface="Calibri" pitchFamily="34" charset="-122"/>
-                <a:cs typeface="Calibri" pitchFamily="34" charset="-120"/>
-              </a:rPr>
-              <a:t>Si es artrosis</a:t>
-            </a:r>
-            <a:endParaRPr lang="en-US" sz="1750" dirty="0"/>
-          </a:p>
-        </p:txBody>
-      </p:sp>
-      <p:sp>
-        <p:nvSpPr>
-          <p:cNvPr id="16" name="Text 12"/>
-          <p:cNvSpPr txBox="1"/>
-          <p:nvPr/>
-        </p:nvSpPr>
-        <p:spPr>
-          <a:xfrm>
-            <a:off x="4892040" y="2194560"/>
-            <a:ext cx="3611880" cy="2057400"/>
-          </a:xfrm>
-          <a:prstGeom prst="rect">
-            <a:avLst/>
-          </a:prstGeom>
-          <a:noFill/>
-          <a:ln/>
-        </p:spPr>
-        <p:txBody>
-          <a:bodyPr wrap="square" lIns="0" tIns="0" rIns="0" bIns="0" rtlCol="0" anchor="t"/>
-          <a:lstStyle/>
-          <a:p>
-            <a:pPr marL="342900" indent="-342900">
-              <a:spcAft>
-                <a:spcPts val="700"/>
-              </a:spcAft>
-              <a:buSzPct val="100000"/>
-              <a:buChar char="•"/>
-            </a:pPr>
-            <a:r>
-              <a:rPr lang="en-US" sz="1350" dirty="0">
-                <a:solidFill>
-                  <a:srgbClr val="141821"/>
-                </a:solidFill>
-                <a:latin typeface="Calibri" pitchFamily="34" charset="0"/>
-                <a:ea typeface="Calibri" pitchFamily="34" charset="-122"/>
-                <a:cs typeface="Calibri" pitchFamily="34" charset="-120"/>
-              </a:rPr>
-              <a:t>Manejo activo, no “no hay nada que hacer”.</a:t>
-            </a:r>
-            <a:endParaRPr lang="en-US" sz="1350" dirty="0"/>
-          </a:p>
-          <a:p>
-            <a:pPr marL="342900" indent="-342900">
-              <a:spcAft>
-                <a:spcPts val="700"/>
-              </a:spcAft>
-              <a:buSzPct val="100000"/>
-              <a:buChar char="•"/>
-            </a:pPr>
-            <a:r>
-              <a:rPr lang="en-US" sz="1350" dirty="0">
-                <a:solidFill>
-                  <a:srgbClr val="141821"/>
-                </a:solidFill>
-                <a:latin typeface="Calibri" pitchFamily="34" charset="0"/>
-                <a:ea typeface="Calibri" pitchFamily="34" charset="-122"/>
-                <a:cs typeface="Calibri" pitchFamily="34" charset="-120"/>
-              </a:rPr>
-              <a:t>Primera línea: ejercicio, control de peso y educación.</a:t>
-            </a:r>
-            <a:endParaRPr lang="en-US" sz="1350" dirty="0"/>
-          </a:p>
-          <a:p>
-            <a:pPr marL="342900" indent="-342900">
-              <a:spcAft>
-                <a:spcPts val="700"/>
-              </a:spcAft>
-              <a:buSzPct val="100000"/>
-              <a:buChar char="•"/>
-            </a:pPr>
-            <a:r>
-              <a:rPr lang="en-US" sz="1350" dirty="0">
-                <a:solidFill>
-                  <a:srgbClr val="141821"/>
-                </a:solidFill>
-                <a:latin typeface="Calibri" pitchFamily="34" charset="0"/>
-                <a:ea typeface="Calibri" pitchFamily="34" charset="-122"/>
-                <a:cs typeface="Calibri" pitchFamily="34" charset="-120"/>
-              </a:rPr>
-              <a:t>Dolor: AINE tópicos u orales; evitar inmunosupresión.</a:t>
-            </a:r>
-            <a:endParaRPr lang="en-US" sz="1350" dirty="0"/>
-          </a:p>
-          <a:p>
-            <a:pPr marL="342900" indent="-342900">
-              <a:spcAft>
-                <a:spcPts val="700"/>
-              </a:spcAft>
-              <a:buSzPct val="100000"/>
-              <a:buChar char="•"/>
-            </a:pPr>
-            <a:r>
-              <a:rPr lang="en-US" sz="1350" dirty="0">
-                <a:solidFill>
-                  <a:srgbClr val="141821"/>
-                </a:solidFill>
-                <a:latin typeface="Calibri" pitchFamily="34" charset="0"/>
-                <a:ea typeface="Calibri" pitchFamily="34" charset="-122"/>
-                <a:cs typeface="Calibri" pitchFamily="34" charset="-120"/>
-              </a:rPr>
-              <a:t>Cirugía (prótesis) sólo en enfermedad avanzada.</a:t>
-            </a:r>
-            <a:endParaRPr lang="en-US" sz="1350" dirty="0"/>
-          </a:p>
-        </p:txBody>
-      </p:sp>
-      <p:sp>
-        <p:nvSpPr>
-          <p:cNvPr id="17" name="Shape 13"/>
-          <p:cNvSpPr/>
-          <p:nvPr/>
-        </p:nvSpPr>
-        <p:spPr>
-          <a:xfrm>
-            <a:off x="457200" y="4370832"/>
-            <a:ext cx="8229600" cy="914"/>
-          </a:xfrm>
-          <a:prstGeom prst="roundRect">
-            <a:avLst>
-              <a:gd name="adj" fmla="val 10004376"/>
-            </a:avLst>
-          </a:prstGeom>
-          <a:solidFill>
-            <a:srgbClr val="A78BFA">
-              <a:alpha val="10000"/>
-            </a:srgbClr>
           </a:solidFill>
           <a:ln w="19050">
             <a:solidFill>
@@ -19456,14 +18451,14 @@
       </p:sp>
       <p:sp>
         <p:nvSpPr>
-          <p:cNvPr id="18" name="Text 14"/>
-          <p:cNvSpPr txBox="1"/>
-          <p:nvPr/>
-        </p:nvSpPr>
-        <p:spPr>
-          <a:xfrm>
-            <a:off x="512064" y="4370832"/>
-            <a:ext cx="8119872" cy="914"/>
+          <p:cNvPr id="8" name="Text 6"/>
+          <p:cNvSpPr txBox="1"/>
+          <p:nvPr/>
+        </p:nvSpPr>
+        <p:spPr>
+          <a:xfrm>
+            <a:off x="594360" y="1143000"/>
+            <a:ext cx="2286000" cy="365760"/>
           </a:xfrm>
           <a:prstGeom prst="rect">
             <a:avLst/>
@@ -19475,10 +18470,1251 @@
           <a:bodyPr wrap="square" lIns="0" tIns="0" rIns="0" bIns="0" rtlCol="0" anchor="ctr"/>
           <a:lstStyle/>
           <a:p>
-            <a:pPr algn="ctr" indent="0" marL="0">
-              <a:buNone/>
-            </a:pPr>
-            <a:endParaRPr lang="en-US" sz="100" dirty="0"/>
+            <a:pPr indent="0" marL="0">
+              <a:buNone/>
+            </a:pPr>
+            <a:r>
+              <a:rPr lang="en-US" sz="1250" b="1" dirty="0">
+                <a:solidFill>
+                  <a:srgbClr val="6A4CCF"/>
+                </a:solidFill>
+                <a:latin typeface="Calibri" pitchFamily="34" charset="0"/>
+                <a:ea typeface="Calibri" pitchFamily="34" charset="-122"/>
+                <a:cs typeface="Calibri" pitchFamily="34" charset="-120"/>
+              </a:rPr>
+              <a:t>Rasgo</a:t>
+            </a:r>
+            <a:endParaRPr lang="en-US" sz="1250" dirty="0"/>
+          </a:p>
+        </p:txBody>
+      </p:sp>
+      <p:sp>
+        <p:nvSpPr>
+          <p:cNvPr id="9" name="Text 7"/>
+          <p:cNvSpPr txBox="1"/>
+          <p:nvPr/>
+        </p:nvSpPr>
+        <p:spPr>
+          <a:xfrm>
+            <a:off x="2926080" y="1143000"/>
+            <a:ext cx="2880360" cy="365760"/>
+          </a:xfrm>
+          <a:prstGeom prst="rect">
+            <a:avLst/>
+          </a:prstGeom>
+          <a:noFill/>
+          <a:ln/>
+        </p:spPr>
+        <p:txBody>
+          <a:bodyPr wrap="square" lIns="0" tIns="0" rIns="0" bIns="0" rtlCol="0" anchor="ctr"/>
+          <a:lstStyle/>
+          <a:p>
+            <a:pPr indent="0" marL="0">
+              <a:buNone/>
+            </a:pPr>
+            <a:r>
+              <a:rPr lang="en-US" sz="1250" b="1" dirty="0">
+                <a:solidFill>
+                  <a:srgbClr val="C81E43"/>
+                </a:solidFill>
+                <a:latin typeface="Calibri" pitchFamily="34" charset="0"/>
+                <a:ea typeface="Calibri" pitchFamily="34" charset="-122"/>
+                <a:cs typeface="Calibri" pitchFamily="34" charset="-120"/>
+              </a:rPr>
+              <a:t>Artritis reumatoide</a:t>
+            </a:r>
+            <a:endParaRPr lang="en-US" sz="1250" dirty="0"/>
+          </a:p>
+        </p:txBody>
+      </p:sp>
+      <p:sp>
+        <p:nvSpPr>
+          <p:cNvPr id="10" name="Text 8"/>
+          <p:cNvSpPr txBox="1"/>
+          <p:nvPr/>
+        </p:nvSpPr>
+        <p:spPr>
+          <a:xfrm>
+            <a:off x="5852160" y="1143000"/>
+            <a:ext cx="2743200" cy="365760"/>
+          </a:xfrm>
+          <a:prstGeom prst="rect">
+            <a:avLst/>
+          </a:prstGeom>
+          <a:noFill/>
+          <a:ln/>
+        </p:spPr>
+        <p:txBody>
+          <a:bodyPr wrap="square" lIns="0" tIns="0" rIns="0" bIns="0" rtlCol="0" anchor="ctr"/>
+          <a:lstStyle/>
+          <a:p>
+            <a:pPr indent="0" marL="0">
+              <a:buNone/>
+            </a:pPr>
+            <a:r>
+              <a:rPr lang="en-US" sz="1250" b="1" dirty="0">
+                <a:solidFill>
+                  <a:srgbClr val="A66A00"/>
+                </a:solidFill>
+                <a:latin typeface="Calibri" pitchFamily="34" charset="0"/>
+                <a:ea typeface="Calibri" pitchFamily="34" charset="-122"/>
+                <a:cs typeface="Calibri" pitchFamily="34" charset="-120"/>
+              </a:rPr>
+              <a:t>Artrosis</a:t>
+            </a:r>
+            <a:endParaRPr lang="en-US" sz="1250" dirty="0"/>
+          </a:p>
+        </p:txBody>
+      </p:sp>
+      <p:sp>
+        <p:nvSpPr>
+          <p:cNvPr id="11" name="Shape 9"/>
+          <p:cNvSpPr/>
+          <p:nvPr/>
+        </p:nvSpPr>
+        <p:spPr>
+          <a:xfrm>
+            <a:off x="457200" y="1536192"/>
+            <a:ext cx="8229600" cy="338328"/>
+          </a:xfrm>
+          <a:prstGeom prst="roundRect">
+            <a:avLst>
+              <a:gd name="adj" fmla="val 27027"/>
+            </a:avLst>
+          </a:prstGeom>
+          <a:solidFill>
+            <a:srgbClr val="FFFFFF"/>
+          </a:solidFill>
+          <a:ln w="19050">
+            <a:solidFill>
+              <a:srgbClr val="C4CCE0"/>
+            </a:solidFill>
+            <a:prstDash val="solid"/>
+          </a:ln>
+        </p:spPr>
+      </p:sp>
+      <p:sp>
+        <p:nvSpPr>
+          <p:cNvPr id="12" name="Text 10"/>
+          <p:cNvSpPr txBox="1"/>
+          <p:nvPr/>
+        </p:nvSpPr>
+        <p:spPr>
+          <a:xfrm>
+            <a:off x="594360" y="1536192"/>
+            <a:ext cx="2286000" cy="338328"/>
+          </a:xfrm>
+          <a:prstGeom prst="rect">
+            <a:avLst/>
+          </a:prstGeom>
+          <a:noFill/>
+          <a:ln/>
+        </p:spPr>
+        <p:txBody>
+          <a:bodyPr wrap="square" lIns="0" tIns="0" rIns="0" bIns="0" rtlCol="0" anchor="ctr"/>
+          <a:lstStyle/>
+          <a:p>
+            <a:pPr indent="0" marL="0">
+              <a:buNone/>
+            </a:pPr>
+            <a:r>
+              <a:rPr lang="en-US" sz="1200" b="1" dirty="0">
+                <a:solidFill>
+                  <a:srgbClr val="141821"/>
+                </a:solidFill>
+                <a:latin typeface="Calibri" pitchFamily="34" charset="0"/>
+                <a:ea typeface="Calibri" pitchFamily="34" charset="-122"/>
+                <a:cs typeface="Calibri" pitchFamily="34" charset="-120"/>
+              </a:rPr>
+              <a:t>Tipo</a:t>
+            </a:r>
+            <a:endParaRPr lang="en-US" sz="1200" dirty="0"/>
+          </a:p>
+        </p:txBody>
+      </p:sp>
+      <p:sp>
+        <p:nvSpPr>
+          <p:cNvPr id="13" name="Text 11"/>
+          <p:cNvSpPr txBox="1"/>
+          <p:nvPr/>
+        </p:nvSpPr>
+        <p:spPr>
+          <a:xfrm>
+            <a:off x="2926080" y="1536192"/>
+            <a:ext cx="2880360" cy="338328"/>
+          </a:xfrm>
+          <a:prstGeom prst="rect">
+            <a:avLst/>
+          </a:prstGeom>
+          <a:noFill/>
+          <a:ln/>
+        </p:spPr>
+        <p:txBody>
+          <a:bodyPr wrap="square" lIns="0" tIns="0" rIns="0" bIns="0" rtlCol="0" anchor="ctr"/>
+          <a:lstStyle/>
+          <a:p>
+            <a:pPr indent="0" marL="0">
+              <a:buNone/>
+            </a:pPr>
+            <a:r>
+              <a:rPr lang="en-US" sz="1050" dirty="0">
+                <a:solidFill>
+                  <a:srgbClr val="141821"/>
+                </a:solidFill>
+                <a:latin typeface="Calibri" pitchFamily="34" charset="0"/>
+                <a:ea typeface="Calibri" pitchFamily="34" charset="-122"/>
+                <a:cs typeface="Calibri" pitchFamily="34" charset="-120"/>
+              </a:rPr>
+              <a:t>Inflamatoria autoinmune</a:t>
+            </a:r>
+            <a:endParaRPr lang="en-US" sz="1050" dirty="0"/>
+          </a:p>
+        </p:txBody>
+      </p:sp>
+      <p:sp>
+        <p:nvSpPr>
+          <p:cNvPr id="14" name="Text 12"/>
+          <p:cNvSpPr txBox="1"/>
+          <p:nvPr/>
+        </p:nvSpPr>
+        <p:spPr>
+          <a:xfrm>
+            <a:off x="5852160" y="1536192"/>
+            <a:ext cx="2743200" cy="338328"/>
+          </a:xfrm>
+          <a:prstGeom prst="rect">
+            <a:avLst/>
+          </a:prstGeom>
+          <a:noFill/>
+          <a:ln/>
+        </p:spPr>
+        <p:txBody>
+          <a:bodyPr wrap="square" lIns="0" tIns="0" rIns="0" bIns="0" rtlCol="0" anchor="ctr"/>
+          <a:lstStyle/>
+          <a:p>
+            <a:pPr indent="0" marL="0">
+              <a:buNone/>
+            </a:pPr>
+            <a:r>
+              <a:rPr lang="en-US" sz="1050" dirty="0">
+                <a:solidFill>
+                  <a:srgbClr val="141821"/>
+                </a:solidFill>
+                <a:latin typeface="Calibri" pitchFamily="34" charset="0"/>
+                <a:ea typeface="Calibri" pitchFamily="34" charset="-122"/>
+                <a:cs typeface="Calibri" pitchFamily="34" charset="-120"/>
+              </a:rPr>
+              <a:t>No autoinmune, activa y heterogénea</a:t>
+            </a:r>
+            <a:endParaRPr lang="en-US" sz="1050" dirty="0"/>
+          </a:p>
+        </p:txBody>
+      </p:sp>
+      <p:sp>
+        <p:nvSpPr>
+          <p:cNvPr id="15" name="Shape 13"/>
+          <p:cNvSpPr/>
+          <p:nvPr/>
+        </p:nvSpPr>
+        <p:spPr>
+          <a:xfrm>
+            <a:off x="457200" y="1906524"/>
+            <a:ext cx="8229600" cy="338328"/>
+          </a:xfrm>
+          <a:prstGeom prst="roundRect">
+            <a:avLst>
+              <a:gd name="adj" fmla="val 27027"/>
+            </a:avLst>
+          </a:prstGeom>
+          <a:solidFill>
+            <a:srgbClr val="FFFFFF"/>
+          </a:solidFill>
+          <a:ln w="19050">
+            <a:solidFill>
+              <a:srgbClr val="C4CCE0"/>
+            </a:solidFill>
+            <a:prstDash val="solid"/>
+          </a:ln>
+        </p:spPr>
+      </p:sp>
+      <p:sp>
+        <p:nvSpPr>
+          <p:cNvPr id="16" name="Text 14"/>
+          <p:cNvSpPr txBox="1"/>
+          <p:nvPr/>
+        </p:nvSpPr>
+        <p:spPr>
+          <a:xfrm>
+            <a:off x="594360" y="1906524"/>
+            <a:ext cx="2286000" cy="338328"/>
+          </a:xfrm>
+          <a:prstGeom prst="rect">
+            <a:avLst/>
+          </a:prstGeom>
+          <a:noFill/>
+          <a:ln/>
+        </p:spPr>
+        <p:txBody>
+          <a:bodyPr wrap="square" lIns="0" tIns="0" rIns="0" bIns="0" rtlCol="0" anchor="ctr"/>
+          <a:lstStyle/>
+          <a:p>
+            <a:pPr indent="0" marL="0">
+              <a:buNone/>
+            </a:pPr>
+            <a:r>
+              <a:rPr lang="en-US" sz="1200" b="1" dirty="0">
+                <a:solidFill>
+                  <a:srgbClr val="141821"/>
+                </a:solidFill>
+                <a:latin typeface="Calibri" pitchFamily="34" charset="0"/>
+                <a:ea typeface="Calibri" pitchFamily="34" charset="-122"/>
+                <a:cs typeface="Calibri" pitchFamily="34" charset="-120"/>
+              </a:rPr>
+              <a:t>Dolor</a:t>
+            </a:r>
+            <a:endParaRPr lang="en-US" sz="1200" dirty="0"/>
+          </a:p>
+        </p:txBody>
+      </p:sp>
+      <p:sp>
+        <p:nvSpPr>
+          <p:cNvPr id="17" name="Text 15"/>
+          <p:cNvSpPr txBox="1"/>
+          <p:nvPr/>
+        </p:nvSpPr>
+        <p:spPr>
+          <a:xfrm>
+            <a:off x="2926080" y="1906524"/>
+            <a:ext cx="2880360" cy="338328"/>
+          </a:xfrm>
+          <a:prstGeom prst="rect">
+            <a:avLst/>
+          </a:prstGeom>
+          <a:noFill/>
+          <a:ln/>
+        </p:spPr>
+        <p:txBody>
+          <a:bodyPr wrap="square" lIns="0" tIns="0" rIns="0" bIns="0" rtlCol="0" anchor="ctr"/>
+          <a:lstStyle/>
+          <a:p>
+            <a:pPr indent="0" marL="0">
+              <a:buNone/>
+            </a:pPr>
+            <a:r>
+              <a:rPr lang="en-US" sz="1050" dirty="0">
+                <a:solidFill>
+                  <a:srgbClr val="141821"/>
+                </a:solidFill>
+                <a:latin typeface="Calibri" pitchFamily="34" charset="0"/>
+                <a:ea typeface="Calibri" pitchFamily="34" charset="-122"/>
+                <a:cs typeface="Calibri" pitchFamily="34" charset="-120"/>
+              </a:rPr>
+              <a:t>Inflamatorio (peor en reposo)</a:t>
+            </a:r>
+            <a:endParaRPr lang="en-US" sz="1050" dirty="0"/>
+          </a:p>
+        </p:txBody>
+      </p:sp>
+      <p:sp>
+        <p:nvSpPr>
+          <p:cNvPr id="18" name="Text 16"/>
+          <p:cNvSpPr txBox="1"/>
+          <p:nvPr/>
+        </p:nvSpPr>
+        <p:spPr>
+          <a:xfrm>
+            <a:off x="5852160" y="1906524"/>
+            <a:ext cx="2743200" cy="338328"/>
+          </a:xfrm>
+          <a:prstGeom prst="rect">
+            <a:avLst/>
+          </a:prstGeom>
+          <a:noFill/>
+          <a:ln/>
+        </p:spPr>
+        <p:txBody>
+          <a:bodyPr wrap="square" lIns="0" tIns="0" rIns="0" bIns="0" rtlCol="0" anchor="ctr"/>
+          <a:lstStyle/>
+          <a:p>
+            <a:pPr indent="0" marL="0">
+              <a:buNone/>
+            </a:pPr>
+            <a:r>
+              <a:rPr lang="en-US" sz="1050" dirty="0">
+                <a:solidFill>
+                  <a:srgbClr val="141821"/>
+                </a:solidFill>
+                <a:latin typeface="Calibri" pitchFamily="34" charset="0"/>
+                <a:ea typeface="Calibri" pitchFamily="34" charset="-122"/>
+                <a:cs typeface="Calibri" pitchFamily="34" charset="-120"/>
+              </a:rPr>
+              <a:t>Mecánico (peor con el uso)</a:t>
+            </a:r>
+            <a:endParaRPr lang="en-US" sz="1050" dirty="0"/>
+          </a:p>
+        </p:txBody>
+      </p:sp>
+      <p:sp>
+        <p:nvSpPr>
+          <p:cNvPr id="19" name="Shape 17"/>
+          <p:cNvSpPr/>
+          <p:nvPr/>
+        </p:nvSpPr>
+        <p:spPr>
+          <a:xfrm>
+            <a:off x="457200" y="2276856"/>
+            <a:ext cx="8229600" cy="338328"/>
+          </a:xfrm>
+          <a:prstGeom prst="roundRect">
+            <a:avLst>
+              <a:gd name="adj" fmla="val 27027"/>
+            </a:avLst>
+          </a:prstGeom>
+          <a:solidFill>
+            <a:srgbClr val="FFFFFF"/>
+          </a:solidFill>
+          <a:ln w="19050">
+            <a:solidFill>
+              <a:srgbClr val="C4CCE0"/>
+            </a:solidFill>
+            <a:prstDash val="solid"/>
+          </a:ln>
+        </p:spPr>
+      </p:sp>
+      <p:sp>
+        <p:nvSpPr>
+          <p:cNvPr id="20" name="Text 18"/>
+          <p:cNvSpPr txBox="1"/>
+          <p:nvPr/>
+        </p:nvSpPr>
+        <p:spPr>
+          <a:xfrm>
+            <a:off x="594360" y="2276856"/>
+            <a:ext cx="2286000" cy="338328"/>
+          </a:xfrm>
+          <a:prstGeom prst="rect">
+            <a:avLst/>
+          </a:prstGeom>
+          <a:noFill/>
+          <a:ln/>
+        </p:spPr>
+        <p:txBody>
+          <a:bodyPr wrap="square" lIns="0" tIns="0" rIns="0" bIns="0" rtlCol="0" anchor="ctr"/>
+          <a:lstStyle/>
+          <a:p>
+            <a:pPr indent="0" marL="0">
+              <a:buNone/>
+            </a:pPr>
+            <a:r>
+              <a:rPr lang="en-US" sz="1200" b="1" dirty="0">
+                <a:solidFill>
+                  <a:srgbClr val="141821"/>
+                </a:solidFill>
+                <a:latin typeface="Calibri" pitchFamily="34" charset="0"/>
+                <a:ea typeface="Calibri" pitchFamily="34" charset="-122"/>
+                <a:cs typeface="Calibri" pitchFamily="34" charset="-120"/>
+              </a:rPr>
+              <a:t>Rigidez matutina</a:t>
+            </a:r>
+            <a:endParaRPr lang="en-US" sz="1200" dirty="0"/>
+          </a:p>
+        </p:txBody>
+      </p:sp>
+      <p:sp>
+        <p:nvSpPr>
+          <p:cNvPr id="21" name="Text 19"/>
+          <p:cNvSpPr txBox="1"/>
+          <p:nvPr/>
+        </p:nvSpPr>
+        <p:spPr>
+          <a:xfrm>
+            <a:off x="2926080" y="2276856"/>
+            <a:ext cx="2880360" cy="338328"/>
+          </a:xfrm>
+          <a:prstGeom prst="rect">
+            <a:avLst/>
+          </a:prstGeom>
+          <a:noFill/>
+          <a:ln/>
+        </p:spPr>
+        <p:txBody>
+          <a:bodyPr wrap="square" lIns="0" tIns="0" rIns="0" bIns="0" rtlCol="0" anchor="ctr"/>
+          <a:lstStyle/>
+          <a:p>
+            <a:pPr indent="0" marL="0">
+              <a:buNone/>
+            </a:pPr>
+            <a:r>
+              <a:rPr lang="en-US" sz="1050" dirty="0">
+                <a:solidFill>
+                  <a:srgbClr val="141821"/>
+                </a:solidFill>
+                <a:latin typeface="Calibri" pitchFamily="34" charset="0"/>
+                <a:ea typeface="Calibri" pitchFamily="34" charset="-122"/>
+                <a:cs typeface="Calibri" pitchFamily="34" charset="-120"/>
+              </a:rPr>
+              <a:t>&gt; 30–60 min</a:t>
+            </a:r>
+            <a:endParaRPr lang="en-US" sz="1050" dirty="0"/>
+          </a:p>
+        </p:txBody>
+      </p:sp>
+      <p:sp>
+        <p:nvSpPr>
+          <p:cNvPr id="22" name="Text 20"/>
+          <p:cNvSpPr txBox="1"/>
+          <p:nvPr/>
+        </p:nvSpPr>
+        <p:spPr>
+          <a:xfrm>
+            <a:off x="5852160" y="2276856"/>
+            <a:ext cx="2743200" cy="338328"/>
+          </a:xfrm>
+          <a:prstGeom prst="rect">
+            <a:avLst/>
+          </a:prstGeom>
+          <a:noFill/>
+          <a:ln/>
+        </p:spPr>
+        <p:txBody>
+          <a:bodyPr wrap="square" lIns="0" tIns="0" rIns="0" bIns="0" rtlCol="0" anchor="ctr"/>
+          <a:lstStyle/>
+          <a:p>
+            <a:pPr indent="0" marL="0">
+              <a:buNone/>
+            </a:pPr>
+            <a:r>
+              <a:rPr lang="en-US" sz="1050" dirty="0">
+                <a:solidFill>
+                  <a:srgbClr val="141821"/>
+                </a:solidFill>
+                <a:latin typeface="Calibri" pitchFamily="34" charset="0"/>
+                <a:ea typeface="Calibri" pitchFamily="34" charset="-122"/>
+                <a:cs typeface="Calibri" pitchFamily="34" charset="-120"/>
+              </a:rPr>
+              <a:t>&lt; 30 min</a:t>
+            </a:r>
+            <a:endParaRPr lang="en-US" sz="1050" dirty="0"/>
+          </a:p>
+        </p:txBody>
+      </p:sp>
+      <p:sp>
+        <p:nvSpPr>
+          <p:cNvPr id="23" name="Shape 21"/>
+          <p:cNvSpPr/>
+          <p:nvPr/>
+        </p:nvSpPr>
+        <p:spPr>
+          <a:xfrm>
+            <a:off x="457200" y="2647188"/>
+            <a:ext cx="8229600" cy="338328"/>
+          </a:xfrm>
+          <a:prstGeom prst="roundRect">
+            <a:avLst>
+              <a:gd name="adj" fmla="val 27027"/>
+            </a:avLst>
+          </a:prstGeom>
+          <a:solidFill>
+            <a:srgbClr val="FFFFFF"/>
+          </a:solidFill>
+          <a:ln w="19050">
+            <a:solidFill>
+              <a:srgbClr val="C4CCE0"/>
+            </a:solidFill>
+            <a:prstDash val="solid"/>
+          </a:ln>
+        </p:spPr>
+      </p:sp>
+      <p:sp>
+        <p:nvSpPr>
+          <p:cNvPr id="24" name="Text 22"/>
+          <p:cNvSpPr txBox="1"/>
+          <p:nvPr/>
+        </p:nvSpPr>
+        <p:spPr>
+          <a:xfrm>
+            <a:off x="594360" y="2647188"/>
+            <a:ext cx="2286000" cy="338328"/>
+          </a:xfrm>
+          <a:prstGeom prst="rect">
+            <a:avLst/>
+          </a:prstGeom>
+          <a:noFill/>
+          <a:ln/>
+        </p:spPr>
+        <p:txBody>
+          <a:bodyPr wrap="square" lIns="0" tIns="0" rIns="0" bIns="0" rtlCol="0" anchor="ctr"/>
+          <a:lstStyle/>
+          <a:p>
+            <a:pPr indent="0" marL="0">
+              <a:buNone/>
+            </a:pPr>
+            <a:r>
+              <a:rPr lang="en-US" sz="1200" b="1" dirty="0">
+                <a:solidFill>
+                  <a:srgbClr val="141821"/>
+                </a:solidFill>
+                <a:latin typeface="Calibri" pitchFamily="34" charset="0"/>
+                <a:ea typeface="Calibri" pitchFamily="34" charset="-122"/>
+                <a:cs typeface="Calibri" pitchFamily="34" charset="-120"/>
+              </a:rPr>
+              <a:t>Manos</a:t>
+            </a:r>
+            <a:endParaRPr lang="en-US" sz="1200" dirty="0"/>
+          </a:p>
+        </p:txBody>
+      </p:sp>
+      <p:sp>
+        <p:nvSpPr>
+          <p:cNvPr id="25" name="Text 23"/>
+          <p:cNvSpPr txBox="1"/>
+          <p:nvPr/>
+        </p:nvSpPr>
+        <p:spPr>
+          <a:xfrm>
+            <a:off x="2926080" y="2647188"/>
+            <a:ext cx="2880360" cy="338328"/>
+          </a:xfrm>
+          <a:prstGeom prst="rect">
+            <a:avLst/>
+          </a:prstGeom>
+          <a:noFill/>
+          <a:ln/>
+        </p:spPr>
+        <p:txBody>
+          <a:bodyPr wrap="square" lIns="0" tIns="0" rIns="0" bIns="0" rtlCol="0" anchor="ctr"/>
+          <a:lstStyle/>
+          <a:p>
+            <a:pPr indent="0" marL="0">
+              <a:buNone/>
+            </a:pPr>
+            <a:r>
+              <a:rPr lang="en-US" sz="1050" dirty="0">
+                <a:solidFill>
+                  <a:srgbClr val="141821"/>
+                </a:solidFill>
+                <a:latin typeface="Calibri" pitchFamily="34" charset="0"/>
+                <a:ea typeface="Calibri" pitchFamily="34" charset="-122"/>
+                <a:cs typeface="Calibri" pitchFamily="34" charset="-120"/>
+              </a:rPr>
+              <a:t>MCF, IFP, muñeca (simétrico)</a:t>
+            </a:r>
+            <a:endParaRPr lang="en-US" sz="1050" dirty="0"/>
+          </a:p>
+        </p:txBody>
+      </p:sp>
+      <p:sp>
+        <p:nvSpPr>
+          <p:cNvPr id="26" name="Text 24"/>
+          <p:cNvSpPr txBox="1"/>
+          <p:nvPr/>
+        </p:nvSpPr>
+        <p:spPr>
+          <a:xfrm>
+            <a:off x="5852160" y="2647188"/>
+            <a:ext cx="2743200" cy="338328"/>
+          </a:xfrm>
+          <a:prstGeom prst="rect">
+            <a:avLst/>
+          </a:prstGeom>
+          <a:noFill/>
+          <a:ln/>
+        </p:spPr>
+        <p:txBody>
+          <a:bodyPr wrap="square" lIns="0" tIns="0" rIns="0" bIns="0" rtlCol="0" anchor="ctr"/>
+          <a:lstStyle/>
+          <a:p>
+            <a:pPr indent="0" marL="0">
+              <a:buNone/>
+            </a:pPr>
+            <a:r>
+              <a:rPr lang="en-US" sz="1050" dirty="0">
+                <a:solidFill>
+                  <a:srgbClr val="141821"/>
+                </a:solidFill>
+                <a:latin typeface="Calibri" pitchFamily="34" charset="0"/>
+                <a:ea typeface="Calibri" pitchFamily="34" charset="-122"/>
+                <a:cs typeface="Calibri" pitchFamily="34" charset="-120"/>
+              </a:rPr>
+              <a:t>IFD, IFP, base del pulgar</a:t>
+            </a:r>
+            <a:endParaRPr lang="en-US" sz="1050" dirty="0"/>
+          </a:p>
+        </p:txBody>
+      </p:sp>
+      <p:sp>
+        <p:nvSpPr>
+          <p:cNvPr id="27" name="Shape 25"/>
+          <p:cNvSpPr/>
+          <p:nvPr/>
+        </p:nvSpPr>
+        <p:spPr>
+          <a:xfrm>
+            <a:off x="457200" y="3017520"/>
+            <a:ext cx="8229600" cy="338328"/>
+          </a:xfrm>
+          <a:prstGeom prst="roundRect">
+            <a:avLst>
+              <a:gd name="adj" fmla="val 27027"/>
+            </a:avLst>
+          </a:prstGeom>
+          <a:solidFill>
+            <a:srgbClr val="FFFFFF"/>
+          </a:solidFill>
+          <a:ln w="19050">
+            <a:solidFill>
+              <a:srgbClr val="C4CCE0"/>
+            </a:solidFill>
+            <a:prstDash val="solid"/>
+          </a:ln>
+        </p:spPr>
+      </p:sp>
+      <p:sp>
+        <p:nvSpPr>
+          <p:cNvPr id="28" name="Text 26"/>
+          <p:cNvSpPr txBox="1"/>
+          <p:nvPr/>
+        </p:nvSpPr>
+        <p:spPr>
+          <a:xfrm>
+            <a:off x="594360" y="3017520"/>
+            <a:ext cx="2286000" cy="338328"/>
+          </a:xfrm>
+          <a:prstGeom prst="rect">
+            <a:avLst/>
+          </a:prstGeom>
+          <a:noFill/>
+          <a:ln/>
+        </p:spPr>
+        <p:txBody>
+          <a:bodyPr wrap="square" lIns="0" tIns="0" rIns="0" bIns="0" rtlCol="0" anchor="ctr"/>
+          <a:lstStyle/>
+          <a:p>
+            <a:pPr indent="0" marL="0">
+              <a:buNone/>
+            </a:pPr>
+            <a:r>
+              <a:rPr lang="en-US" sz="1200" b="1" dirty="0">
+                <a:solidFill>
+                  <a:srgbClr val="141821"/>
+                </a:solidFill>
+                <a:latin typeface="Calibri" pitchFamily="34" charset="0"/>
+                <a:ea typeface="Calibri" pitchFamily="34" charset="-122"/>
+                <a:cs typeface="Calibri" pitchFamily="34" charset="-120"/>
+              </a:rPr>
+              <a:t>Tumefacción</a:t>
+            </a:r>
+            <a:endParaRPr lang="en-US" sz="1200" dirty="0"/>
+          </a:p>
+        </p:txBody>
+      </p:sp>
+      <p:sp>
+        <p:nvSpPr>
+          <p:cNvPr id="29" name="Text 27"/>
+          <p:cNvSpPr txBox="1"/>
+          <p:nvPr/>
+        </p:nvSpPr>
+        <p:spPr>
+          <a:xfrm>
+            <a:off x="2926080" y="3017520"/>
+            <a:ext cx="2880360" cy="338328"/>
+          </a:xfrm>
+          <a:prstGeom prst="rect">
+            <a:avLst/>
+          </a:prstGeom>
+          <a:noFill/>
+          <a:ln/>
+        </p:spPr>
+        <p:txBody>
+          <a:bodyPr wrap="square" lIns="0" tIns="0" rIns="0" bIns="0" rtlCol="0" anchor="ctr"/>
+          <a:lstStyle/>
+          <a:p>
+            <a:pPr indent="0" marL="0">
+              <a:buNone/>
+            </a:pPr>
+            <a:r>
+              <a:rPr lang="en-US" sz="1050" dirty="0">
+                <a:solidFill>
+                  <a:srgbClr val="141821"/>
+                </a:solidFill>
+                <a:latin typeface="Calibri" pitchFamily="34" charset="0"/>
+                <a:ea typeface="Calibri" pitchFamily="34" charset="-122"/>
+                <a:cs typeface="Calibri" pitchFamily="34" charset="-120"/>
+              </a:rPr>
+              <a:t>Blanda y caliente</a:t>
+            </a:r>
+            <a:endParaRPr lang="en-US" sz="1050" dirty="0"/>
+          </a:p>
+        </p:txBody>
+      </p:sp>
+      <p:sp>
+        <p:nvSpPr>
+          <p:cNvPr id="30" name="Text 28"/>
+          <p:cNvSpPr txBox="1"/>
+          <p:nvPr/>
+        </p:nvSpPr>
+        <p:spPr>
+          <a:xfrm>
+            <a:off x="5852160" y="3017520"/>
+            <a:ext cx="2743200" cy="338328"/>
+          </a:xfrm>
+          <a:prstGeom prst="rect">
+            <a:avLst/>
+          </a:prstGeom>
+          <a:noFill/>
+          <a:ln/>
+        </p:spPr>
+        <p:txBody>
+          <a:bodyPr wrap="square" lIns="0" tIns="0" rIns="0" bIns="0" rtlCol="0" anchor="ctr"/>
+          <a:lstStyle/>
+          <a:p>
+            <a:pPr indent="0" marL="0">
+              <a:buNone/>
+            </a:pPr>
+            <a:r>
+              <a:rPr lang="en-US" sz="1050" dirty="0">
+                <a:solidFill>
+                  <a:srgbClr val="141821"/>
+                </a:solidFill>
+                <a:latin typeface="Calibri" pitchFamily="34" charset="0"/>
+                <a:ea typeface="Calibri" pitchFamily="34" charset="-122"/>
+                <a:cs typeface="Calibri" pitchFamily="34" charset="-120"/>
+              </a:rPr>
+              <a:t>Dura y ósea</a:t>
+            </a:r>
+            <a:endParaRPr lang="en-US" sz="1050" dirty="0"/>
+          </a:p>
+        </p:txBody>
+      </p:sp>
+      <p:sp>
+        <p:nvSpPr>
+          <p:cNvPr id="31" name="Shape 29"/>
+          <p:cNvSpPr/>
+          <p:nvPr/>
+        </p:nvSpPr>
+        <p:spPr>
+          <a:xfrm>
+            <a:off x="457200" y="3387852"/>
+            <a:ext cx="8229600" cy="338328"/>
+          </a:xfrm>
+          <a:prstGeom prst="roundRect">
+            <a:avLst>
+              <a:gd name="adj" fmla="val 27027"/>
+            </a:avLst>
+          </a:prstGeom>
+          <a:solidFill>
+            <a:srgbClr val="FFFFFF"/>
+          </a:solidFill>
+          <a:ln w="19050">
+            <a:solidFill>
+              <a:srgbClr val="C4CCE0"/>
+            </a:solidFill>
+            <a:prstDash val="solid"/>
+          </a:ln>
+        </p:spPr>
+      </p:sp>
+      <p:sp>
+        <p:nvSpPr>
+          <p:cNvPr id="32" name="Text 30"/>
+          <p:cNvSpPr txBox="1"/>
+          <p:nvPr/>
+        </p:nvSpPr>
+        <p:spPr>
+          <a:xfrm>
+            <a:off x="594360" y="3387852"/>
+            <a:ext cx="2286000" cy="338328"/>
+          </a:xfrm>
+          <a:prstGeom prst="rect">
+            <a:avLst/>
+          </a:prstGeom>
+          <a:noFill/>
+          <a:ln/>
+        </p:spPr>
+        <p:txBody>
+          <a:bodyPr wrap="square" lIns="0" tIns="0" rIns="0" bIns="0" rtlCol="0" anchor="ctr"/>
+          <a:lstStyle/>
+          <a:p>
+            <a:pPr indent="0" marL="0">
+              <a:buNone/>
+            </a:pPr>
+            <a:r>
+              <a:rPr lang="en-US" sz="1200" b="1" dirty="0">
+                <a:solidFill>
+                  <a:srgbClr val="141821"/>
+                </a:solidFill>
+                <a:latin typeface="Calibri" pitchFamily="34" charset="0"/>
+                <a:ea typeface="Calibri" pitchFamily="34" charset="-122"/>
+                <a:cs typeface="Calibri" pitchFamily="34" charset="-120"/>
+              </a:rPr>
+              <a:t>Laboratorio</a:t>
+            </a:r>
+            <a:endParaRPr lang="en-US" sz="1200" dirty="0"/>
+          </a:p>
+        </p:txBody>
+      </p:sp>
+      <p:sp>
+        <p:nvSpPr>
+          <p:cNvPr id="33" name="Text 31"/>
+          <p:cNvSpPr txBox="1"/>
+          <p:nvPr/>
+        </p:nvSpPr>
+        <p:spPr>
+          <a:xfrm>
+            <a:off x="2926080" y="3387852"/>
+            <a:ext cx="2880360" cy="338328"/>
+          </a:xfrm>
+          <a:prstGeom prst="rect">
+            <a:avLst/>
+          </a:prstGeom>
+          <a:noFill/>
+          <a:ln/>
+        </p:spPr>
+        <p:txBody>
+          <a:bodyPr wrap="square" lIns="0" tIns="0" rIns="0" bIns="0" rtlCol="0" anchor="ctr"/>
+          <a:lstStyle/>
+          <a:p>
+            <a:pPr indent="0" marL="0">
+              <a:buNone/>
+            </a:pPr>
+            <a:r>
+              <a:rPr lang="en-US" sz="1050" dirty="0">
+                <a:solidFill>
+                  <a:srgbClr val="141821"/>
+                </a:solidFill>
+                <a:latin typeface="Calibri" pitchFamily="34" charset="0"/>
+                <a:ea typeface="Calibri" pitchFamily="34" charset="-122"/>
+                <a:cs typeface="Calibri" pitchFamily="34" charset="-120"/>
+              </a:rPr>
+              <a:t>FR/anti-CCP+, VSG/PCR ↑</a:t>
+            </a:r>
+            <a:endParaRPr lang="en-US" sz="1050" dirty="0"/>
+          </a:p>
+        </p:txBody>
+      </p:sp>
+      <p:sp>
+        <p:nvSpPr>
+          <p:cNvPr id="34" name="Text 32"/>
+          <p:cNvSpPr txBox="1"/>
+          <p:nvPr/>
+        </p:nvSpPr>
+        <p:spPr>
+          <a:xfrm>
+            <a:off x="5852160" y="3387852"/>
+            <a:ext cx="2743200" cy="338328"/>
+          </a:xfrm>
+          <a:prstGeom prst="rect">
+            <a:avLst/>
+          </a:prstGeom>
+          <a:noFill/>
+          <a:ln/>
+        </p:spPr>
+        <p:txBody>
+          <a:bodyPr wrap="square" lIns="0" tIns="0" rIns="0" bIns="0" rtlCol="0" anchor="ctr"/>
+          <a:lstStyle/>
+          <a:p>
+            <a:pPr indent="0" marL="0">
+              <a:buNone/>
+            </a:pPr>
+            <a:r>
+              <a:rPr lang="en-US" sz="1050" dirty="0">
+                <a:solidFill>
+                  <a:srgbClr val="141821"/>
+                </a:solidFill>
+                <a:latin typeface="Calibri" pitchFamily="34" charset="0"/>
+                <a:ea typeface="Calibri" pitchFamily="34" charset="-122"/>
+                <a:cs typeface="Calibri" pitchFamily="34" charset="-120"/>
+              </a:rPr>
+              <a:t>Normales</a:t>
+            </a:r>
+            <a:endParaRPr lang="en-US" sz="1050" dirty="0"/>
+          </a:p>
+        </p:txBody>
+      </p:sp>
+      <p:sp>
+        <p:nvSpPr>
+          <p:cNvPr id="35" name="Shape 33"/>
+          <p:cNvSpPr/>
+          <p:nvPr/>
+        </p:nvSpPr>
+        <p:spPr>
+          <a:xfrm>
+            <a:off x="457200" y="3758184"/>
+            <a:ext cx="8229600" cy="338328"/>
+          </a:xfrm>
+          <a:prstGeom prst="roundRect">
+            <a:avLst>
+              <a:gd name="adj" fmla="val 27027"/>
+            </a:avLst>
+          </a:prstGeom>
+          <a:solidFill>
+            <a:srgbClr val="FFFFFF"/>
+          </a:solidFill>
+          <a:ln w="19050">
+            <a:solidFill>
+              <a:srgbClr val="C4CCE0"/>
+            </a:solidFill>
+            <a:prstDash val="solid"/>
+          </a:ln>
+        </p:spPr>
+      </p:sp>
+      <p:sp>
+        <p:nvSpPr>
+          <p:cNvPr id="36" name="Text 34"/>
+          <p:cNvSpPr txBox="1"/>
+          <p:nvPr/>
+        </p:nvSpPr>
+        <p:spPr>
+          <a:xfrm>
+            <a:off x="594360" y="3758184"/>
+            <a:ext cx="2286000" cy="338328"/>
+          </a:xfrm>
+          <a:prstGeom prst="rect">
+            <a:avLst/>
+          </a:prstGeom>
+          <a:noFill/>
+          <a:ln/>
+        </p:spPr>
+        <p:txBody>
+          <a:bodyPr wrap="square" lIns="0" tIns="0" rIns="0" bIns="0" rtlCol="0" anchor="ctr"/>
+          <a:lstStyle/>
+          <a:p>
+            <a:pPr indent="0" marL="0">
+              <a:buNone/>
+            </a:pPr>
+            <a:r>
+              <a:rPr lang="en-US" sz="1200" b="1" dirty="0">
+                <a:solidFill>
+                  <a:srgbClr val="141821"/>
+                </a:solidFill>
+                <a:latin typeface="Calibri" pitchFamily="34" charset="0"/>
+                <a:ea typeface="Calibri" pitchFamily="34" charset="-122"/>
+                <a:cs typeface="Calibri" pitchFamily="34" charset="-120"/>
+              </a:rPr>
+              <a:t>Radiografía</a:t>
+            </a:r>
+            <a:endParaRPr lang="en-US" sz="1200" dirty="0"/>
+          </a:p>
+        </p:txBody>
+      </p:sp>
+      <p:sp>
+        <p:nvSpPr>
+          <p:cNvPr id="37" name="Text 35"/>
+          <p:cNvSpPr txBox="1"/>
+          <p:nvPr/>
+        </p:nvSpPr>
+        <p:spPr>
+          <a:xfrm>
+            <a:off x="2926080" y="3758184"/>
+            <a:ext cx="2880360" cy="338328"/>
+          </a:xfrm>
+          <a:prstGeom prst="rect">
+            <a:avLst/>
+          </a:prstGeom>
+          <a:noFill/>
+          <a:ln/>
+        </p:spPr>
+        <p:txBody>
+          <a:bodyPr wrap="square" lIns="0" tIns="0" rIns="0" bIns="0" rtlCol="0" anchor="ctr"/>
+          <a:lstStyle/>
+          <a:p>
+            <a:pPr indent="0" marL="0">
+              <a:buNone/>
+            </a:pPr>
+            <a:r>
+              <a:rPr lang="en-US" sz="1050" dirty="0">
+                <a:solidFill>
+                  <a:srgbClr val="141821"/>
+                </a:solidFill>
+                <a:latin typeface="Calibri" pitchFamily="34" charset="0"/>
+                <a:ea typeface="Calibri" pitchFamily="34" charset="-122"/>
+                <a:cs typeface="Calibri" pitchFamily="34" charset="-120"/>
+              </a:rPr>
+              <a:t>Erosiones, pinzamiento uniforme</a:t>
+            </a:r>
+            <a:endParaRPr lang="en-US" sz="1050" dirty="0"/>
+          </a:p>
+        </p:txBody>
+      </p:sp>
+      <p:sp>
+        <p:nvSpPr>
+          <p:cNvPr id="38" name="Text 36"/>
+          <p:cNvSpPr txBox="1"/>
+          <p:nvPr/>
+        </p:nvSpPr>
+        <p:spPr>
+          <a:xfrm>
+            <a:off x="5852160" y="3758184"/>
+            <a:ext cx="2743200" cy="338328"/>
+          </a:xfrm>
+          <a:prstGeom prst="rect">
+            <a:avLst/>
+          </a:prstGeom>
+          <a:noFill/>
+          <a:ln/>
+        </p:spPr>
+        <p:txBody>
+          <a:bodyPr wrap="square" lIns="0" tIns="0" rIns="0" bIns="0" rtlCol="0" anchor="ctr"/>
+          <a:lstStyle/>
+          <a:p>
+            <a:pPr indent="0" marL="0">
+              <a:buNone/>
+            </a:pPr>
+            <a:r>
+              <a:rPr lang="en-US" sz="1050" dirty="0">
+                <a:solidFill>
+                  <a:srgbClr val="141821"/>
+                </a:solidFill>
+                <a:latin typeface="Calibri" pitchFamily="34" charset="0"/>
+                <a:ea typeface="Calibri" pitchFamily="34" charset="-122"/>
+                <a:cs typeface="Calibri" pitchFamily="34" charset="-120"/>
+              </a:rPr>
+              <a:t>Osteofitos, esclerosis</a:t>
+            </a:r>
+            <a:endParaRPr lang="en-US" sz="1050" dirty="0"/>
+          </a:p>
+        </p:txBody>
+      </p:sp>
+      <p:sp>
+        <p:nvSpPr>
+          <p:cNvPr id="39" name="Shape 37"/>
+          <p:cNvSpPr/>
+          <p:nvPr/>
+        </p:nvSpPr>
+        <p:spPr>
+          <a:xfrm>
+            <a:off x="457200" y="4128516"/>
+            <a:ext cx="8229600" cy="338328"/>
+          </a:xfrm>
+          <a:prstGeom prst="roundRect">
+            <a:avLst>
+              <a:gd name="adj" fmla="val 27027"/>
+            </a:avLst>
+          </a:prstGeom>
+          <a:solidFill>
+            <a:srgbClr val="FFFFFF"/>
+          </a:solidFill>
+          <a:ln w="19050">
+            <a:solidFill>
+              <a:srgbClr val="C4CCE0"/>
+            </a:solidFill>
+            <a:prstDash val="solid"/>
+          </a:ln>
+        </p:spPr>
+      </p:sp>
+      <p:sp>
+        <p:nvSpPr>
+          <p:cNvPr id="40" name="Text 38"/>
+          <p:cNvSpPr txBox="1"/>
+          <p:nvPr/>
+        </p:nvSpPr>
+        <p:spPr>
+          <a:xfrm>
+            <a:off x="594360" y="4128516"/>
+            <a:ext cx="2286000" cy="338328"/>
+          </a:xfrm>
+          <a:prstGeom prst="rect">
+            <a:avLst/>
+          </a:prstGeom>
+          <a:noFill/>
+          <a:ln/>
+        </p:spPr>
+        <p:txBody>
+          <a:bodyPr wrap="square" lIns="0" tIns="0" rIns="0" bIns="0" rtlCol="0" anchor="ctr"/>
+          <a:lstStyle/>
+          <a:p>
+            <a:pPr indent="0" marL="0">
+              <a:buNone/>
+            </a:pPr>
+            <a:r>
+              <a:rPr lang="en-US" sz="1200" b="1" dirty="0">
+                <a:solidFill>
+                  <a:srgbClr val="141821"/>
+                </a:solidFill>
+                <a:latin typeface="Calibri" pitchFamily="34" charset="0"/>
+                <a:ea typeface="Calibri" pitchFamily="34" charset="-122"/>
+                <a:cs typeface="Calibri" pitchFamily="34" charset="-120"/>
+              </a:rPr>
+              <a:t>Conducta</a:t>
+            </a:r>
+            <a:endParaRPr lang="en-US" sz="1200" dirty="0"/>
+          </a:p>
+        </p:txBody>
+      </p:sp>
+      <p:sp>
+        <p:nvSpPr>
+          <p:cNvPr id="41" name="Text 39"/>
+          <p:cNvSpPr txBox="1"/>
+          <p:nvPr/>
+        </p:nvSpPr>
+        <p:spPr>
+          <a:xfrm>
+            <a:off x="2926080" y="4128516"/>
+            <a:ext cx="2880360" cy="338328"/>
+          </a:xfrm>
+          <a:prstGeom prst="rect">
+            <a:avLst/>
+          </a:prstGeom>
+          <a:noFill/>
+          <a:ln/>
+        </p:spPr>
+        <p:txBody>
+          <a:bodyPr wrap="square" lIns="0" tIns="0" rIns="0" bIns="0" rtlCol="0" anchor="ctr"/>
+          <a:lstStyle/>
+          <a:p>
+            <a:pPr indent="0" marL="0">
+              <a:buNone/>
+            </a:pPr>
+            <a:r>
+              <a:rPr lang="en-US" sz="1050" dirty="0">
+                <a:solidFill>
+                  <a:srgbClr val="141821"/>
+                </a:solidFill>
+                <a:latin typeface="Calibri" pitchFamily="34" charset="0"/>
+                <a:ea typeface="Calibri" pitchFamily="34" charset="-122"/>
+                <a:cs typeface="Calibri" pitchFamily="34" charset="-120"/>
+              </a:rPr>
+              <a:t>Derivar: FAME temprano</a:t>
+            </a:r>
+            <a:endParaRPr lang="en-US" sz="1050" dirty="0"/>
+          </a:p>
+        </p:txBody>
+      </p:sp>
+      <p:sp>
+        <p:nvSpPr>
+          <p:cNvPr id="42" name="Text 40"/>
+          <p:cNvSpPr txBox="1"/>
+          <p:nvPr/>
+        </p:nvSpPr>
+        <p:spPr>
+          <a:xfrm>
+            <a:off x="5852160" y="4128516"/>
+            <a:ext cx="2743200" cy="338328"/>
+          </a:xfrm>
+          <a:prstGeom prst="rect">
+            <a:avLst/>
+          </a:prstGeom>
+          <a:noFill/>
+          <a:ln/>
+        </p:spPr>
+        <p:txBody>
+          <a:bodyPr wrap="square" lIns="0" tIns="0" rIns="0" bIns="0" rtlCol="0" anchor="ctr"/>
+          <a:lstStyle/>
+          <a:p>
+            <a:pPr indent="0" marL="0">
+              <a:buNone/>
+            </a:pPr>
+            <a:r>
+              <a:rPr lang="en-US" sz="1050" dirty="0">
+                <a:solidFill>
+                  <a:srgbClr val="141821"/>
+                </a:solidFill>
+                <a:latin typeface="Calibri" pitchFamily="34" charset="0"/>
+                <a:ea typeface="Calibri" pitchFamily="34" charset="-122"/>
+                <a:cs typeface="Calibri" pitchFamily="34" charset="-120"/>
+              </a:rPr>
+              <a:t>Manejo sintomático</a:t>
+            </a:r>
+            <a:endParaRPr lang="en-US" sz="1050" dirty="0"/>
           </a:p>
         </p:txBody>
       </p:sp>
@@ -19589,13 +19825,13 @@
             <a:r>
               <a:rPr lang="en-US" sz="1400" b="1" spc="300" kern="0" dirty="0">
                 <a:solidFill>
-                  <a:srgbClr val="C81E43"/>
-                </a:solidFill>
-                <a:latin typeface="Calibri" pitchFamily="34" charset="0"/>
-                <a:ea typeface="Calibri" pitchFamily="34" charset="-122"/>
-                <a:cs typeface="Calibri" pitchFamily="34" charset="-120"/>
-              </a:rPr>
-              <a:t>LA RESPUESTA</a:t>
+                  <a:srgbClr val="6A4CCF"/>
+                </a:solidFill>
+                <a:latin typeface="Calibri" pitchFamily="34" charset="0"/>
+                <a:ea typeface="Calibri" pitchFamily="34" charset="-122"/>
+                <a:cs typeface="Calibri" pitchFamily="34" charset="-120"/>
+              </a:rPr>
+              <a:t>DEL DIAGNÓSTICO A LA ACCIÓN</a:t>
             </a:r>
             <a:endParaRPr lang="en-US" sz="1400" dirty="0"/>
           </a:p>
@@ -19634,7 +19870,7 @@
                 <a:ea typeface="Calibri" pitchFamily="34" charset="-122"/>
                 <a:cs typeface="Calibri" pitchFamily="34" charset="-120"/>
               </a:rPr>
-              <a:t>Cuándo decir que sí: deriva a reumatología</a:t>
+              <a:t>¿Qué cambia la respuesta?</a:t>
             </a:r>
             <a:endParaRPr lang="en-US" sz="2900" dirty="0"/>
           </a:p>
@@ -19713,7 +19949,7 @@
                 <a:ea typeface="Calibri" pitchFamily="34" charset="-122"/>
                 <a:cs typeface="Calibri" pitchFamily="34" charset="-120"/>
               </a:rPr>
-              <a:t>3. Nishimura K, Sugiyama D, Kogata Y, Tsuji G, Nakazawa T, Kawano S, et al. Meta-analysis: diagnostic accuracy of anti-cyclic citrullinated peptide antibody and rheumatoid factor for rheumatoid arthritis. Ann Intern Med. 2007;146(11):797-808.</a:t>
+              <a:t>9. Kolasinski SL, Neogi T, Hochberg MC, Oatis C, Guyatt G, Block J, et al. 2019 ACR/Arthritis Foundation guideline for the management of osteoarthritis of the hand, hip, and knee. Arthritis Rheumatol. 2020;72(2):220-33.</a:t>
             </a:r>
             <a:endParaRPr lang="en-US" sz="900" dirty="0"/>
           </a:p>
@@ -19773,30 +20009,79 @@
       </p:sp>
       <p:sp>
         <p:nvSpPr>
-          <p:cNvPr id="8" name="Text 6"/>
-          <p:cNvSpPr txBox="1"/>
-          <p:nvPr/>
-        </p:nvSpPr>
-        <p:spPr>
-          <a:xfrm>
-            <a:off x="640080" y="1371600"/>
-            <a:ext cx="3657600" cy="365760"/>
-          </a:xfrm>
-          <a:prstGeom prst="rect">
-            <a:avLst/>
-          </a:prstGeom>
-          <a:noFill/>
-          <a:ln/>
-        </p:spPr>
-        <p:txBody>
-          <a:bodyPr wrap="square" lIns="0" tIns="0" rIns="0" bIns="0" rtlCol="0" anchor="t"/>
+          <p:cNvPr id="8" name="Shape 6"/>
+          <p:cNvSpPr/>
+          <p:nvPr/>
+        </p:nvSpPr>
+        <p:spPr>
+          <a:xfrm>
+            <a:off x="658368" y="1481328"/>
+            <a:ext cx="585216" cy="585216"/>
+          </a:xfrm>
+          <a:prstGeom prst="ellipse">
+            <a:avLst/>
+          </a:prstGeom>
+          <a:solidFill>
+            <a:srgbClr val="F2546B"/>
+          </a:solidFill>
+          <a:ln w="12700">
+            <a:solidFill>
+              <a:srgbClr val="F2546B"/>
+            </a:solidFill>
+            <a:prstDash val="solid"/>
+          </a:ln>
+        </p:spPr>
+      </p:sp>
+      <p:pic>
+        <p:nvPicPr>
+          <p:cNvPr id="9" name="Image 0" descr="preencoded.png">    </p:cNvPr>
+          <p:cNvPicPr>
+            <a:picLocks noChangeAspect="1"/>
+          </p:cNvPicPr>
+          <p:nvPr/>
+        </p:nvPicPr>
+        <p:blipFill>
+          <a:blip r:embed="rId1"/>
+          <a:stretch>
+            <a:fillRect/>
+          </a:stretch>
+        </p:blipFill>
+        <p:spPr>
+          <a:xfrm>
+            <a:off x="798820" y="1621780"/>
+            <a:ext cx="304312" cy="304312"/>
+          </a:xfrm>
+          <a:prstGeom prst="rect">
+            <a:avLst/>
+          </a:prstGeom>
+        </p:spPr>
+      </p:pic>
+      <p:sp>
+        <p:nvSpPr>
+          <p:cNvPr id="10" name="Text 7"/>
+          <p:cNvSpPr txBox="1"/>
+          <p:nvPr/>
+        </p:nvSpPr>
+        <p:spPr>
+          <a:xfrm>
+            <a:off x="1371600" y="1536192"/>
+            <a:ext cx="2926080" cy="457200"/>
+          </a:xfrm>
+          <a:prstGeom prst="rect">
+            <a:avLst/>
+          </a:prstGeom>
+          <a:noFill/>
+          <a:ln/>
+        </p:spPr>
+        <p:txBody>
+          <a:bodyPr wrap="square" lIns="0" tIns="0" rIns="0" bIns="0" rtlCol="0" anchor="ctr"/>
           <a:lstStyle/>
           <a:p>
             <a:pPr indent="0" marL="0">
               <a:buNone/>
             </a:pPr>
             <a:r>
-              <a:rPr lang="en-US" sz="1650" b="1" dirty="0">
+              <a:rPr lang="en-US" sz="1750" b="1" dirty="0">
                 <a:solidFill>
                   <a:srgbClr val="C81E43"/>
                 </a:solidFill>
@@ -19804,22 +20089,22 @@
                 <a:ea typeface="Calibri" pitchFamily="34" charset="-122"/>
                 <a:cs typeface="Calibri" pitchFamily="34" charset="-120"/>
               </a:rPr>
-              <a:t>Banderas rojas de AR</a:t>
-            </a:r>
-            <a:endParaRPr lang="en-US" sz="1650" dirty="0"/>
-          </a:p>
-        </p:txBody>
-      </p:sp>
-      <p:sp>
-        <p:nvSpPr>
-          <p:cNvPr id="9" name="Text 7"/>
-          <p:cNvSpPr txBox="1"/>
-          <p:nvPr/>
-        </p:nvSpPr>
-        <p:spPr>
-          <a:xfrm>
-            <a:off x="685800" y="1828800"/>
-            <a:ext cx="3611880" cy="2377440"/>
+              <a:t>Si es AR</a:t>
+            </a:r>
+            <a:endParaRPr lang="en-US" sz="1750" dirty="0"/>
+          </a:p>
+        </p:txBody>
+      </p:sp>
+      <p:sp>
+        <p:nvSpPr>
+          <p:cNvPr id="11" name="Text 8"/>
+          <p:cNvSpPr txBox="1"/>
+          <p:nvPr/>
+        </p:nvSpPr>
+        <p:spPr>
+          <a:xfrm>
+            <a:off x="685800" y="2194560"/>
+            <a:ext cx="3611880" cy="2057400"/>
           </a:xfrm>
           <a:prstGeom prst="rect">
             <a:avLst/>
@@ -19833,13 +20118,13 @@
           <a:p>
             <a:pPr marL="342900" indent="-342900">
               <a:spcAft>
-                <a:spcPts val="600"/>
+                <a:spcPts val="700"/>
               </a:spcAft>
               <a:buSzPct val="100000"/>
               <a:buChar char="•"/>
             </a:pPr>
             <a:r>
-              <a:rPr lang="en-US" sz="1300" dirty="0">
+              <a:rPr lang="en-US" sz="1350" dirty="0">
                 <a:solidFill>
                   <a:srgbClr val="141821"/>
                 </a:solidFill>
@@ -19847,20 +20132,20 @@
                 <a:ea typeface="Calibri" pitchFamily="34" charset="-122"/>
                 <a:cs typeface="Calibri" pitchFamily="34" charset="-120"/>
               </a:rPr>
-              <a:t>Sinovitis en ≥ 1 articulación (MCF, IFP, muñeca).</a:t>
-            </a:r>
-            <a:endParaRPr lang="en-US" sz="1300" dirty="0"/>
+              <a:t>Derivar a reumatología (ventana &lt; 12 semanas).</a:t>
+            </a:r>
+            <a:endParaRPr lang="en-US" sz="1350" dirty="0"/>
           </a:p>
           <a:p>
             <a:pPr marL="342900" indent="-342900">
               <a:spcAft>
-                <a:spcPts val="600"/>
+                <a:spcPts val="700"/>
               </a:spcAft>
               <a:buSzPct val="100000"/>
               <a:buChar char="•"/>
             </a:pPr>
             <a:r>
-              <a:rPr lang="en-US" sz="1300" dirty="0">
+              <a:rPr lang="en-US" sz="1350" dirty="0">
                 <a:solidFill>
                   <a:srgbClr val="141821"/>
                 </a:solidFill>
@@ -19868,20 +20153,20 @@
                 <a:ea typeface="Calibri" pitchFamily="34" charset="-122"/>
                 <a:cs typeface="Calibri" pitchFamily="34" charset="-120"/>
               </a:rPr>
-              <a:t>Rigidez matutina &gt; 30 min que mejora al moverse.</a:t>
-            </a:r>
-            <a:endParaRPr lang="en-US" sz="1300" dirty="0"/>
+              <a:t>Tratar por objetivo (treat-to-target): remisión.</a:t>
+            </a:r>
+            <a:endParaRPr lang="en-US" sz="1350" dirty="0"/>
           </a:p>
           <a:p>
             <a:pPr marL="342900" indent="-342900">
               <a:spcAft>
-                <a:spcPts val="600"/>
+                <a:spcPts val="700"/>
               </a:spcAft>
               <a:buSzPct val="100000"/>
               <a:buChar char="•"/>
             </a:pPr>
             <a:r>
-              <a:rPr lang="en-US" sz="1300" dirty="0">
+              <a:rPr lang="en-US" sz="1350" dirty="0">
                 <a:solidFill>
                   <a:srgbClr val="141821"/>
                 </a:solidFill>
@@ -19889,20 +20174,20 @@
                 <a:ea typeface="Calibri" pitchFamily="34" charset="-122"/>
                 <a:cs typeface="Calibri" pitchFamily="34" charset="-120"/>
               </a:rPr>
-              <a:t>Compromiso simétrico de pequeñas articulaciones.</a:t>
-            </a:r>
-            <a:endParaRPr lang="en-US" sz="1300" dirty="0"/>
+              <a:t>FAME: metotrexato de primera línea.</a:t>
+            </a:r>
+            <a:endParaRPr lang="en-US" sz="1350" dirty="0"/>
           </a:p>
           <a:p>
             <a:pPr marL="342900" indent="-342900">
               <a:spcAft>
-                <a:spcPts val="600"/>
+                <a:spcPts val="700"/>
               </a:spcAft>
               <a:buSzPct val="100000"/>
               <a:buChar char="•"/>
             </a:pPr>
             <a:r>
-              <a:rPr lang="en-US" sz="1300" dirty="0">
+              <a:rPr lang="en-US" sz="1350" dirty="0">
                 <a:solidFill>
                   <a:srgbClr val="141821"/>
                 </a:solidFill>
@@ -19910,36 +20195,15 @@
                 <a:ea typeface="Calibri" pitchFamily="34" charset="-122"/>
                 <a:cs typeface="Calibri" pitchFamily="34" charset="-120"/>
               </a:rPr>
-              <a:t>Squeeze test positivo o FR/anti-CCP positivos.</a:t>
-            </a:r>
-            <a:endParaRPr lang="en-US" sz="1300" dirty="0"/>
-          </a:p>
-          <a:p>
-            <a:pPr marL="342900" indent="-342900">
-              <a:spcAft>
-                <a:spcPts val="600"/>
-              </a:spcAft>
-              <a:buSzPct val="100000"/>
-              <a:buChar char="•"/>
-            </a:pPr>
-            <a:r>
-              <a:rPr lang="en-US" sz="1300" dirty="0">
-                <a:solidFill>
-                  <a:srgbClr val="141821"/>
-                </a:solidFill>
-                <a:latin typeface="Calibri" pitchFamily="34" charset="0"/>
-                <a:ea typeface="Calibri" pitchFamily="34" charset="-122"/>
-                <a:cs typeface="Calibri" pitchFamily="34" charset="-120"/>
-              </a:rPr>
-              <a:t>Persistencia &gt; 6 semanas: no esperes a que erosione.</a:t>
-            </a:r>
-            <a:endParaRPr lang="en-US" sz="1300" dirty="0"/>
-          </a:p>
-        </p:txBody>
-      </p:sp>
-      <p:sp>
-        <p:nvSpPr>
-          <p:cNvPr id="10" name="Shape 8"/>
+              <a:t>Frenar la inflamación evita la erosión irreversible.</a:t>
+            </a:r>
+            <a:endParaRPr lang="en-US" sz="1350" dirty="0"/>
+          </a:p>
+        </p:txBody>
+      </p:sp>
+      <p:sp>
+        <p:nvSpPr>
+          <p:cNvPr id="12" name="Shape 9"/>
           <p:cNvSpPr/>
           <p:nvPr/>
         </p:nvSpPr>
@@ -19966,30 +20230,79 @@
       </p:sp>
       <p:sp>
         <p:nvSpPr>
-          <p:cNvPr id="11" name="Text 9"/>
-          <p:cNvSpPr txBox="1"/>
-          <p:nvPr/>
-        </p:nvSpPr>
-        <p:spPr>
-          <a:xfrm>
-            <a:off x="4846320" y="1371600"/>
-            <a:ext cx="3657600" cy="365760"/>
-          </a:xfrm>
-          <a:prstGeom prst="rect">
-            <a:avLst/>
-          </a:prstGeom>
-          <a:noFill/>
-          <a:ln/>
-        </p:spPr>
-        <p:txBody>
-          <a:bodyPr wrap="square" lIns="0" tIns="0" rIns="0" bIns="0" rtlCol="0" anchor="t"/>
+          <p:cNvPr id="13" name="Shape 10"/>
+          <p:cNvSpPr/>
+          <p:nvPr/>
+        </p:nvSpPr>
+        <p:spPr>
+          <a:xfrm>
+            <a:off x="4864608" y="1481328"/>
+            <a:ext cx="585216" cy="585216"/>
+          </a:xfrm>
+          <a:prstGeom prst="ellipse">
+            <a:avLst/>
+          </a:prstGeom>
+          <a:solidFill>
+            <a:srgbClr val="F2B43C"/>
+          </a:solidFill>
+          <a:ln w="12700">
+            <a:solidFill>
+              <a:srgbClr val="F2B43C"/>
+            </a:solidFill>
+            <a:prstDash val="solid"/>
+          </a:ln>
+        </p:spPr>
+      </p:sp>
+      <p:pic>
+        <p:nvPicPr>
+          <p:cNvPr id="14" name="Image 1" descr="preencoded.png">    </p:cNvPr>
+          <p:cNvPicPr>
+            <a:picLocks noChangeAspect="1"/>
+          </p:cNvPicPr>
+          <p:nvPr/>
+        </p:nvPicPr>
+        <p:blipFill>
+          <a:blip r:embed="rId2"/>
+          <a:stretch>
+            <a:fillRect/>
+          </a:stretch>
+        </p:blipFill>
+        <p:spPr>
+          <a:xfrm>
+            <a:off x="5005060" y="1621780"/>
+            <a:ext cx="304312" cy="304312"/>
+          </a:xfrm>
+          <a:prstGeom prst="rect">
+            <a:avLst/>
+          </a:prstGeom>
+        </p:spPr>
+      </p:pic>
+      <p:sp>
+        <p:nvSpPr>
+          <p:cNvPr id="15" name="Text 11"/>
+          <p:cNvSpPr txBox="1"/>
+          <p:nvPr/>
+        </p:nvSpPr>
+        <p:spPr>
+          <a:xfrm>
+            <a:off x="5577840" y="1536192"/>
+            <a:ext cx="2926080" cy="457200"/>
+          </a:xfrm>
+          <a:prstGeom prst="rect">
+            <a:avLst/>
+          </a:prstGeom>
+          <a:noFill/>
+          <a:ln/>
+        </p:spPr>
+        <p:txBody>
+          <a:bodyPr wrap="square" lIns="0" tIns="0" rIns="0" bIns="0" rtlCol="0" anchor="ctr"/>
           <a:lstStyle/>
           <a:p>
             <a:pPr indent="0" marL="0">
               <a:buNone/>
             </a:pPr>
             <a:r>
-              <a:rPr lang="en-US" sz="1650" b="1" dirty="0">
+              <a:rPr lang="en-US" sz="1750" b="1" dirty="0">
                 <a:solidFill>
                   <a:srgbClr val="A66A00"/>
                 </a:solidFill>
@@ -19997,22 +20310,22 @@
                 <a:ea typeface="Calibri" pitchFamily="34" charset="-122"/>
                 <a:cs typeface="Calibri" pitchFamily="34" charset="-120"/>
               </a:rPr>
-              <a:t>Errores que debes evitar</a:t>
-            </a:r>
-            <a:endParaRPr lang="en-US" sz="1650" dirty="0"/>
-          </a:p>
-        </p:txBody>
-      </p:sp>
-      <p:sp>
-        <p:nvSpPr>
-          <p:cNvPr id="12" name="Text 10"/>
-          <p:cNvSpPr txBox="1"/>
-          <p:nvPr/>
-        </p:nvSpPr>
-        <p:spPr>
-          <a:xfrm>
-            <a:off x="4892040" y="1828800"/>
-            <a:ext cx="3611880" cy="2377440"/>
+              <a:t>Si es artrosis</a:t>
+            </a:r>
+            <a:endParaRPr lang="en-US" sz="1750" dirty="0"/>
+          </a:p>
+        </p:txBody>
+      </p:sp>
+      <p:sp>
+        <p:nvSpPr>
+          <p:cNvPr id="16" name="Text 12"/>
+          <p:cNvSpPr txBox="1"/>
+          <p:nvPr/>
+        </p:nvSpPr>
+        <p:spPr>
+          <a:xfrm>
+            <a:off x="4892040" y="2194560"/>
+            <a:ext cx="3611880" cy="2057400"/>
           </a:xfrm>
           <a:prstGeom prst="rect">
             <a:avLst/>
@@ -20026,13 +20339,13 @@
           <a:p>
             <a:pPr marL="342900" indent="-342900">
               <a:spcAft>
-                <a:spcPts val="600"/>
+                <a:spcPts val="700"/>
               </a:spcAft>
               <a:buSzPct val="100000"/>
               <a:buChar char="•"/>
             </a:pPr>
             <a:r>
-              <a:rPr lang="en-US" sz="1300" dirty="0">
+              <a:rPr lang="en-US" sz="1350" dirty="0">
                 <a:solidFill>
                   <a:srgbClr val="141821"/>
                 </a:solidFill>
@@ -20040,20 +20353,20 @@
                 <a:ea typeface="Calibri" pitchFamily="34" charset="-122"/>
                 <a:cs typeface="Calibri" pitchFamily="34" charset="-120"/>
               </a:rPr>
-              <a:t>Pedir FR/anti-CCP en artrosis típica (falsos positivos).</a:t>
-            </a:r>
-            <a:endParaRPr lang="en-US" sz="1300" dirty="0"/>
+              <a:t>Manejo activo, no “no hay nada que hacer”.</a:t>
+            </a:r>
+            <a:endParaRPr lang="en-US" sz="1350" dirty="0"/>
           </a:p>
           <a:p>
             <a:pPr marL="342900" indent="-342900">
               <a:spcAft>
-                <a:spcPts val="600"/>
+                <a:spcPts val="700"/>
               </a:spcAft>
               <a:buSzPct val="100000"/>
               <a:buChar char="•"/>
             </a:pPr>
             <a:r>
-              <a:rPr lang="en-US" sz="1300" dirty="0">
+              <a:rPr lang="en-US" sz="1350" dirty="0">
                 <a:solidFill>
                   <a:srgbClr val="141821"/>
                 </a:solidFill>
@@ -20061,20 +20374,20 @@
                 <a:ea typeface="Calibri" pitchFamily="34" charset="-122"/>
                 <a:cs typeface="Calibri" pitchFamily="34" charset="-120"/>
               </a:rPr>
-              <a:t>Descartar AR por serología negativa (hay seronegativas).</a:t>
-            </a:r>
-            <a:endParaRPr lang="en-US" sz="1300" dirty="0"/>
+              <a:t>Primera línea: ejercicio, control de peso y educación.</a:t>
+            </a:r>
+            <a:endParaRPr lang="en-US" sz="1350" dirty="0"/>
           </a:p>
           <a:p>
             <a:pPr marL="342900" indent="-342900">
               <a:spcAft>
-                <a:spcPts val="600"/>
+                <a:spcPts val="700"/>
               </a:spcAft>
               <a:buSzPct val="100000"/>
               <a:buChar char="•"/>
             </a:pPr>
             <a:r>
-              <a:rPr lang="en-US" sz="1300" dirty="0">
+              <a:rPr lang="en-US" sz="1350" dirty="0">
                 <a:solidFill>
                   <a:srgbClr val="141821"/>
                 </a:solidFill>
@@ -20082,20 +20395,20 @@
                 <a:ea typeface="Calibri" pitchFamily="34" charset="-122"/>
                 <a:cs typeface="Calibri" pitchFamily="34" charset="-120"/>
               </a:rPr>
-              <a:t>Atribuir a artrosis una sinovitis de MCF: piensa en AR.</a:t>
-            </a:r>
-            <a:endParaRPr lang="en-US" sz="1300" dirty="0"/>
+              <a:t>Dolor: AINE tópicos u orales; evitar inmunosupresión.</a:t>
+            </a:r>
+            <a:endParaRPr lang="en-US" sz="1350" dirty="0"/>
           </a:p>
           <a:p>
             <a:pPr marL="342900" indent="-342900">
               <a:spcAft>
-                <a:spcPts val="600"/>
+                <a:spcPts val="700"/>
               </a:spcAft>
               <a:buSzPct val="100000"/>
               <a:buChar char="•"/>
             </a:pPr>
             <a:r>
-              <a:rPr lang="en-US" sz="1300" dirty="0">
+              <a:rPr lang="en-US" sz="1350" dirty="0">
                 <a:solidFill>
                   <a:srgbClr val="141821"/>
                 </a:solidFill>
@@ -20103,15 +20416,15 @@
                 <a:ea typeface="Calibri" pitchFamily="34" charset="-122"/>
                 <a:cs typeface="Calibri" pitchFamily="34" charset="-120"/>
               </a:rPr>
-              <a:t>Esperar erosiones en la radiografía para derivar.</a:t>
-            </a:r>
-            <a:endParaRPr lang="en-US" sz="1300" dirty="0"/>
-          </a:p>
-        </p:txBody>
-      </p:sp>
-      <p:sp>
-        <p:nvSpPr>
-          <p:cNvPr id="13" name="Shape 11"/>
+              <a:t>Cirugía (prótesis) sólo en enfermedad avanzada.</a:t>
+            </a:r>
+            <a:endParaRPr lang="en-US" sz="1350" dirty="0"/>
+          </a:p>
+        </p:txBody>
+      </p:sp>
+      <p:sp>
+        <p:nvSpPr>
+          <p:cNvPr id="17" name="Shape 13"/>
           <p:cNvSpPr/>
           <p:nvPr/>
         </p:nvSpPr>
@@ -20126,13 +20439,13 @@
             </a:avLst>
           </a:prstGeom>
           <a:solidFill>
-            <a:srgbClr val="F2546B">
+            <a:srgbClr val="A78BFA">
               <a:alpha val="10000"/>
             </a:srgbClr>
           </a:solidFill>
           <a:ln w="19050">
             <a:solidFill>
-              <a:srgbClr val="F2546B"/>
+              <a:srgbClr val="A78BFA"/>
             </a:solidFill>
             <a:prstDash val="solid"/>
           </a:ln>
@@ -20140,7 +20453,7 @@
       </p:sp>
       <p:sp>
         <p:nvSpPr>
-          <p:cNvPr id="14" name="Text 12"/>
+          <p:cNvPr id="18" name="Text 14"/>
           <p:cNvSpPr txBox="1"/>
           <p:nvPr/>
         </p:nvSpPr>
@@ -20273,13 +20586,13 @@
             <a:r>
               <a:rPr lang="en-US" sz="1400" b="1" spc="300" kern="0" dirty="0">
                 <a:solidFill>
-                  <a:srgbClr val="6A4CCF"/>
-                </a:solidFill>
-                <a:latin typeface="Calibri" pitchFamily="34" charset="0"/>
-                <a:ea typeface="Calibri" pitchFamily="34" charset="-122"/>
-                <a:cs typeface="Calibri" pitchFamily="34" charset="-120"/>
-              </a:rPr>
-              <a:t>EL CASO, RESUELTO</a:t>
+                  <a:srgbClr val="C81E43"/>
+                </a:solidFill>
+                <a:latin typeface="Calibri" pitchFamily="34" charset="0"/>
+                <a:ea typeface="Calibri" pitchFamily="34" charset="-122"/>
+                <a:cs typeface="Calibri" pitchFamily="34" charset="-120"/>
+              </a:rPr>
+              <a:t>LA RESPUESTA</a:t>
             </a:r>
             <a:endParaRPr lang="en-US" sz="1400" dirty="0"/>
           </a:p>
@@ -20318,7 +20631,7 @@
                 <a:ea typeface="Calibri" pitchFamily="34" charset="-122"/>
                 <a:cs typeface="Calibri" pitchFamily="34" charset="-120"/>
               </a:rPr>
-              <a:t>La mujer de 56 años, pista a pista</a:t>
+              <a:t>Cuándo decir que sí: deriva a reumatología</a:t>
             </a:r>
             <a:endParaRPr lang="en-US" sz="2900" dirty="0"/>
           </a:p>
@@ -20437,11 +20750,11 @@
         <p:spPr>
           <a:xfrm>
             <a:off x="457200" y="1280160"/>
-            <a:ext cx="8229600" cy="457200"/>
+            <a:ext cx="4023360" cy="3017520"/>
           </a:xfrm>
           <a:prstGeom prst="roundRect">
             <a:avLst>
-              <a:gd name="adj" fmla="val 20000"/>
+              <a:gd name="adj" fmla="val 3030"/>
             </a:avLst>
           </a:prstGeom>
           <a:solidFill>
@@ -20457,186 +20770,184 @@
       </p:sp>
       <p:sp>
         <p:nvSpPr>
-          <p:cNvPr id="8" name="Shape 6"/>
+          <p:cNvPr id="8" name="Text 6"/>
+          <p:cNvSpPr txBox="1"/>
+          <p:nvPr/>
+        </p:nvSpPr>
+        <p:spPr>
+          <a:xfrm>
+            <a:off x="640080" y="1371600"/>
+            <a:ext cx="3657600" cy="365760"/>
+          </a:xfrm>
+          <a:prstGeom prst="rect">
+            <a:avLst/>
+          </a:prstGeom>
+          <a:noFill/>
+          <a:ln/>
+        </p:spPr>
+        <p:txBody>
+          <a:bodyPr wrap="square" lIns="0" tIns="0" rIns="0" bIns="0" rtlCol="0" anchor="t"/>
+          <a:lstStyle/>
+          <a:p>
+            <a:pPr indent="0" marL="0">
+              <a:buNone/>
+            </a:pPr>
+            <a:r>
+              <a:rPr lang="en-US" sz="1650" b="1" dirty="0">
+                <a:solidFill>
+                  <a:srgbClr val="C81E43"/>
+                </a:solidFill>
+                <a:latin typeface="Calibri" pitchFamily="34" charset="0"/>
+                <a:ea typeface="Calibri" pitchFamily="34" charset="-122"/>
+                <a:cs typeface="Calibri" pitchFamily="34" charset="-120"/>
+              </a:rPr>
+              <a:t>Banderas rojas de AR</a:t>
+            </a:r>
+            <a:endParaRPr lang="en-US" sz="1650" dirty="0"/>
+          </a:p>
+        </p:txBody>
+      </p:sp>
+      <p:sp>
+        <p:nvSpPr>
+          <p:cNvPr id="9" name="Text 7"/>
+          <p:cNvSpPr txBox="1"/>
+          <p:nvPr/>
+        </p:nvSpPr>
+        <p:spPr>
+          <a:xfrm>
+            <a:off x="685800" y="1828800"/>
+            <a:ext cx="3611880" cy="2377440"/>
+          </a:xfrm>
+          <a:prstGeom prst="rect">
+            <a:avLst/>
+          </a:prstGeom>
+          <a:noFill/>
+          <a:ln/>
+        </p:spPr>
+        <p:txBody>
+          <a:bodyPr wrap="square" lIns="0" tIns="0" rIns="0" bIns="0" rtlCol="0" anchor="t"/>
+          <a:lstStyle/>
+          <a:p>
+            <a:pPr marL="342900" indent="-342900">
+              <a:spcAft>
+                <a:spcPts val="600"/>
+              </a:spcAft>
+              <a:buSzPct val="100000"/>
+              <a:buChar char="•"/>
+            </a:pPr>
+            <a:r>
+              <a:rPr lang="en-US" sz="1300" dirty="0">
+                <a:solidFill>
+                  <a:srgbClr val="141821"/>
+                </a:solidFill>
+                <a:latin typeface="Calibri" pitchFamily="34" charset="0"/>
+                <a:ea typeface="Calibri" pitchFamily="34" charset="-122"/>
+                <a:cs typeface="Calibri" pitchFamily="34" charset="-120"/>
+              </a:rPr>
+              <a:t>Sinovitis en ≥ 1 articulación (MCF, IFP, muñeca).</a:t>
+            </a:r>
+            <a:endParaRPr lang="en-US" sz="1300" dirty="0"/>
+          </a:p>
+          <a:p>
+            <a:pPr marL="342900" indent="-342900">
+              <a:spcAft>
+                <a:spcPts val="600"/>
+              </a:spcAft>
+              <a:buSzPct val="100000"/>
+              <a:buChar char="•"/>
+            </a:pPr>
+            <a:r>
+              <a:rPr lang="en-US" sz="1300" dirty="0">
+                <a:solidFill>
+                  <a:srgbClr val="141821"/>
+                </a:solidFill>
+                <a:latin typeface="Calibri" pitchFamily="34" charset="0"/>
+                <a:ea typeface="Calibri" pitchFamily="34" charset="-122"/>
+                <a:cs typeface="Calibri" pitchFamily="34" charset="-120"/>
+              </a:rPr>
+              <a:t>Rigidez matutina &gt; 30 min que mejora al moverse.</a:t>
+            </a:r>
+            <a:endParaRPr lang="en-US" sz="1300" dirty="0"/>
+          </a:p>
+          <a:p>
+            <a:pPr marL="342900" indent="-342900">
+              <a:spcAft>
+                <a:spcPts val="600"/>
+              </a:spcAft>
+              <a:buSzPct val="100000"/>
+              <a:buChar char="•"/>
+            </a:pPr>
+            <a:r>
+              <a:rPr lang="en-US" sz="1300" dirty="0">
+                <a:solidFill>
+                  <a:srgbClr val="141821"/>
+                </a:solidFill>
+                <a:latin typeface="Calibri" pitchFamily="34" charset="0"/>
+                <a:ea typeface="Calibri" pitchFamily="34" charset="-122"/>
+                <a:cs typeface="Calibri" pitchFamily="34" charset="-120"/>
+              </a:rPr>
+              <a:t>Compromiso simétrico de pequeñas articulaciones.</a:t>
+            </a:r>
+            <a:endParaRPr lang="en-US" sz="1300" dirty="0"/>
+          </a:p>
+          <a:p>
+            <a:pPr marL="342900" indent="-342900">
+              <a:spcAft>
+                <a:spcPts val="600"/>
+              </a:spcAft>
+              <a:buSzPct val="100000"/>
+              <a:buChar char="•"/>
+            </a:pPr>
+            <a:r>
+              <a:rPr lang="en-US" sz="1300" dirty="0">
+                <a:solidFill>
+                  <a:srgbClr val="141821"/>
+                </a:solidFill>
+                <a:latin typeface="Calibri" pitchFamily="34" charset="0"/>
+                <a:ea typeface="Calibri" pitchFamily="34" charset="-122"/>
+                <a:cs typeface="Calibri" pitchFamily="34" charset="-120"/>
+              </a:rPr>
+              <a:t>Squeeze test positivo o FR/anti-CCP positivos.</a:t>
+            </a:r>
+            <a:endParaRPr lang="en-US" sz="1300" dirty="0"/>
+          </a:p>
+          <a:p>
+            <a:pPr marL="342900" indent="-342900">
+              <a:spcAft>
+                <a:spcPts val="600"/>
+              </a:spcAft>
+              <a:buSzPct val="100000"/>
+              <a:buChar char="•"/>
+            </a:pPr>
+            <a:r>
+              <a:rPr lang="en-US" sz="1300" dirty="0">
+                <a:solidFill>
+                  <a:srgbClr val="141821"/>
+                </a:solidFill>
+                <a:latin typeface="Calibri" pitchFamily="34" charset="0"/>
+                <a:ea typeface="Calibri" pitchFamily="34" charset="-122"/>
+                <a:cs typeface="Calibri" pitchFamily="34" charset="-120"/>
+              </a:rPr>
+              <a:t>Persistencia &gt; 6 semanas: no esperes a que erosione.</a:t>
+            </a:r>
+            <a:endParaRPr lang="en-US" sz="1300" dirty="0"/>
+          </a:p>
+        </p:txBody>
+      </p:sp>
+      <p:sp>
+        <p:nvSpPr>
+          <p:cNvPr id="10" name="Shape 8"/>
           <p:cNvSpPr/>
           <p:nvPr/>
         </p:nvSpPr>
         <p:spPr>
           <a:xfrm>
-            <a:off x="566928" y="1362456"/>
-            <a:ext cx="1554480" cy="292608"/>
+            <a:off x="4663440" y="1280160"/>
+            <a:ext cx="4023360" cy="3017520"/>
           </a:xfrm>
           <a:prstGeom prst="roundRect">
             <a:avLst>
-              <a:gd name="adj" fmla="val 15625"/>
-            </a:avLst>
-          </a:prstGeom>
-          <a:solidFill>
-            <a:srgbClr val="F2546B"/>
-          </a:solidFill>
-          <a:ln w="12700">
-            <a:solidFill>
-              <a:srgbClr val="F2546B"/>
-            </a:solidFill>
-            <a:prstDash val="solid"/>
-          </a:ln>
-        </p:spPr>
-      </p:sp>
-      <p:sp>
-        <p:nvSpPr>
-          <p:cNvPr id="9" name="Text 7"/>
-          <p:cNvSpPr txBox="1"/>
-          <p:nvPr/>
-        </p:nvSpPr>
-        <p:spPr>
-          <a:xfrm>
-            <a:off x="566928" y="1362456"/>
-            <a:ext cx="1554480" cy="292608"/>
-          </a:xfrm>
-          <a:prstGeom prst="rect">
-            <a:avLst/>
-          </a:prstGeom>
-          <a:noFill/>
-          <a:ln/>
-        </p:spPr>
-        <p:txBody>
-          <a:bodyPr wrap="square" lIns="0" tIns="0" rIns="0" bIns="0" rtlCol="0" anchor="ctr"/>
-          <a:lstStyle/>
-          <a:p>
-            <a:pPr algn="ctr" indent="0" marL="0">
-              <a:buNone/>
-            </a:pPr>
-            <a:r>
-              <a:rPr lang="en-US" sz="1250" b="1" dirty="0">
-                <a:solidFill>
-                  <a:srgbClr val="15193A"/>
-                </a:solidFill>
-                <a:latin typeface="Calibri" pitchFamily="34" charset="0"/>
-                <a:ea typeface="Calibri" pitchFamily="34" charset="-122"/>
-                <a:cs typeface="Calibri" pitchFamily="34" charset="-120"/>
-              </a:rPr>
-              <a:t>Dolor</a:t>
-            </a:r>
-            <a:endParaRPr lang="en-US" sz="1250" dirty="0"/>
-          </a:p>
-        </p:txBody>
-      </p:sp>
-      <p:sp>
-        <p:nvSpPr>
-          <p:cNvPr id="10" name="Text 8"/>
-          <p:cNvSpPr txBox="1"/>
-          <p:nvPr/>
-        </p:nvSpPr>
-        <p:spPr>
-          <a:xfrm>
-            <a:off x="2286000" y="1280160"/>
-            <a:ext cx="3429000" cy="457200"/>
-          </a:xfrm>
-          <a:prstGeom prst="rect">
-            <a:avLst/>
-          </a:prstGeom>
-          <a:noFill/>
-          <a:ln/>
-        </p:spPr>
-        <p:txBody>
-          <a:bodyPr wrap="square" lIns="0" tIns="0" rIns="0" bIns="0" rtlCol="0" anchor="ctr"/>
-          <a:lstStyle/>
-          <a:p>
-            <a:pPr indent="0" marL="0">
-              <a:buNone/>
-            </a:pPr>
-            <a:r>
-              <a:rPr lang="en-US" sz="1300" dirty="0">
-                <a:solidFill>
-                  <a:srgbClr val="141821"/>
-                </a:solidFill>
-                <a:latin typeface="Calibri" pitchFamily="34" charset="0"/>
-                <a:ea typeface="Calibri" pitchFamily="34" charset="-122"/>
-                <a:cs typeface="Calibri" pitchFamily="34" charset="-120"/>
-              </a:rPr>
-              <a:t>Rigidez matutina de ~1 hora</a:t>
-            </a:r>
-            <a:endParaRPr lang="en-US" sz="1300" dirty="0"/>
-          </a:p>
-        </p:txBody>
-      </p:sp>
-      <p:sp>
-        <p:nvSpPr>
-          <p:cNvPr id="11" name="Shape 9"/>
-          <p:cNvSpPr/>
-          <p:nvPr/>
-        </p:nvSpPr>
-        <p:spPr>
-          <a:xfrm>
-            <a:off x="5806440" y="1508760"/>
-            <a:ext cx="274320" cy="914"/>
-          </a:xfrm>
-          <a:prstGeom prst="line">
-            <a:avLst/>
-          </a:prstGeom>
-          <a:noFill/>
-          <a:ln w="25400">
-            <a:solidFill>
-              <a:srgbClr val="F2546B"/>
-            </a:solidFill>
-            <a:prstDash val="solid"/>
-            <a:tailEnd type="triangle"/>
-          </a:ln>
-        </p:spPr>
-      </p:sp>
-      <p:sp>
-        <p:nvSpPr>
-          <p:cNvPr id="12" name="Text 10"/>
-          <p:cNvSpPr txBox="1"/>
-          <p:nvPr/>
-        </p:nvSpPr>
-        <p:spPr>
-          <a:xfrm>
-            <a:off x="6217920" y="1280160"/>
-            <a:ext cx="2423160" cy="457200"/>
-          </a:xfrm>
-          <a:prstGeom prst="rect">
-            <a:avLst/>
-          </a:prstGeom>
-          <a:noFill/>
-          <a:ln/>
-        </p:spPr>
-        <p:txBody>
-          <a:bodyPr wrap="square" lIns="0" tIns="0" rIns="0" bIns="0" rtlCol="0" anchor="ctr"/>
-          <a:lstStyle/>
-          <a:p>
-            <a:pPr indent="0" marL="0">
-              <a:buNone/>
-            </a:pPr>
-            <a:r>
-              <a:rPr lang="en-US" sz="1300" b="1" dirty="0">
-                <a:solidFill>
-                  <a:srgbClr val="C81E43"/>
-                </a:solidFill>
-                <a:latin typeface="Calibri" pitchFamily="34" charset="0"/>
-                <a:ea typeface="Calibri" pitchFamily="34" charset="-122"/>
-                <a:cs typeface="Calibri" pitchFamily="34" charset="-120"/>
-              </a:rPr>
-              <a:t>Patrón inflamatorio</a:t>
-            </a:r>
-            <a:endParaRPr lang="en-US" sz="1300" dirty="0"/>
-          </a:p>
-        </p:txBody>
-      </p:sp>
-      <p:sp>
-        <p:nvSpPr>
-          <p:cNvPr id="13" name="Shape 11"/>
-          <p:cNvSpPr/>
-          <p:nvPr/>
-        </p:nvSpPr>
-        <p:spPr>
-          <a:xfrm>
-            <a:off x="457200" y="1801368"/>
-            <a:ext cx="8229600" cy="457200"/>
-          </a:xfrm>
-          <a:prstGeom prst="roundRect">
-            <a:avLst>
-              <a:gd name="adj" fmla="val 20000"/>
+              <a:gd name="adj" fmla="val 3030"/>
             </a:avLst>
           </a:prstGeom>
           <a:solidFill>
@@ -20652,777 +20963,171 @@
       </p:sp>
       <p:sp>
         <p:nvSpPr>
-          <p:cNvPr id="14" name="Shape 12"/>
+          <p:cNvPr id="11" name="Text 9"/>
+          <p:cNvSpPr txBox="1"/>
+          <p:nvPr/>
+        </p:nvSpPr>
+        <p:spPr>
+          <a:xfrm>
+            <a:off x="4846320" y="1371600"/>
+            <a:ext cx="3657600" cy="365760"/>
+          </a:xfrm>
+          <a:prstGeom prst="rect">
+            <a:avLst/>
+          </a:prstGeom>
+          <a:noFill/>
+          <a:ln/>
+        </p:spPr>
+        <p:txBody>
+          <a:bodyPr wrap="square" lIns="0" tIns="0" rIns="0" bIns="0" rtlCol="0" anchor="t"/>
+          <a:lstStyle/>
+          <a:p>
+            <a:pPr indent="0" marL="0">
+              <a:buNone/>
+            </a:pPr>
+            <a:r>
+              <a:rPr lang="en-US" sz="1650" b="1" dirty="0">
+                <a:solidFill>
+                  <a:srgbClr val="A66A00"/>
+                </a:solidFill>
+                <a:latin typeface="Calibri" pitchFamily="34" charset="0"/>
+                <a:ea typeface="Calibri" pitchFamily="34" charset="-122"/>
+                <a:cs typeface="Calibri" pitchFamily="34" charset="-120"/>
+              </a:rPr>
+              <a:t>Errores que debes evitar</a:t>
+            </a:r>
+            <a:endParaRPr lang="en-US" sz="1650" dirty="0"/>
+          </a:p>
+        </p:txBody>
+      </p:sp>
+      <p:sp>
+        <p:nvSpPr>
+          <p:cNvPr id="12" name="Text 10"/>
+          <p:cNvSpPr txBox="1"/>
+          <p:nvPr/>
+        </p:nvSpPr>
+        <p:spPr>
+          <a:xfrm>
+            <a:off x="4892040" y="1828800"/>
+            <a:ext cx="3611880" cy="2377440"/>
+          </a:xfrm>
+          <a:prstGeom prst="rect">
+            <a:avLst/>
+          </a:prstGeom>
+          <a:noFill/>
+          <a:ln/>
+        </p:spPr>
+        <p:txBody>
+          <a:bodyPr wrap="square" lIns="0" tIns="0" rIns="0" bIns="0" rtlCol="0" anchor="t"/>
+          <a:lstStyle/>
+          <a:p>
+            <a:pPr marL="342900" indent="-342900">
+              <a:spcAft>
+                <a:spcPts val="600"/>
+              </a:spcAft>
+              <a:buSzPct val="100000"/>
+              <a:buChar char="•"/>
+            </a:pPr>
+            <a:r>
+              <a:rPr lang="en-US" sz="1300" dirty="0">
+                <a:solidFill>
+                  <a:srgbClr val="141821"/>
+                </a:solidFill>
+                <a:latin typeface="Calibri" pitchFamily="34" charset="0"/>
+                <a:ea typeface="Calibri" pitchFamily="34" charset="-122"/>
+                <a:cs typeface="Calibri" pitchFamily="34" charset="-120"/>
+              </a:rPr>
+              <a:t>Pedir FR/anti-CCP en artrosis típica (falsos positivos).</a:t>
+            </a:r>
+            <a:endParaRPr lang="en-US" sz="1300" dirty="0"/>
+          </a:p>
+          <a:p>
+            <a:pPr marL="342900" indent="-342900">
+              <a:spcAft>
+                <a:spcPts val="600"/>
+              </a:spcAft>
+              <a:buSzPct val="100000"/>
+              <a:buChar char="•"/>
+            </a:pPr>
+            <a:r>
+              <a:rPr lang="en-US" sz="1300" dirty="0">
+                <a:solidFill>
+                  <a:srgbClr val="141821"/>
+                </a:solidFill>
+                <a:latin typeface="Calibri" pitchFamily="34" charset="0"/>
+                <a:ea typeface="Calibri" pitchFamily="34" charset="-122"/>
+                <a:cs typeface="Calibri" pitchFamily="34" charset="-120"/>
+              </a:rPr>
+              <a:t>Descartar AR por serología negativa (hay seronegativas).</a:t>
+            </a:r>
+            <a:endParaRPr lang="en-US" sz="1300" dirty="0"/>
+          </a:p>
+          <a:p>
+            <a:pPr marL="342900" indent="-342900">
+              <a:spcAft>
+                <a:spcPts val="600"/>
+              </a:spcAft>
+              <a:buSzPct val="100000"/>
+              <a:buChar char="•"/>
+            </a:pPr>
+            <a:r>
+              <a:rPr lang="en-US" sz="1300" dirty="0">
+                <a:solidFill>
+                  <a:srgbClr val="141821"/>
+                </a:solidFill>
+                <a:latin typeface="Calibri" pitchFamily="34" charset="0"/>
+                <a:ea typeface="Calibri" pitchFamily="34" charset="-122"/>
+                <a:cs typeface="Calibri" pitchFamily="34" charset="-120"/>
+              </a:rPr>
+              <a:t>Atribuir a artrosis una sinovitis de MCF: piensa en AR.</a:t>
+            </a:r>
+            <a:endParaRPr lang="en-US" sz="1300" dirty="0"/>
+          </a:p>
+          <a:p>
+            <a:pPr marL="342900" indent="-342900">
+              <a:spcAft>
+                <a:spcPts val="600"/>
+              </a:spcAft>
+              <a:buSzPct val="100000"/>
+              <a:buChar char="•"/>
+            </a:pPr>
+            <a:r>
+              <a:rPr lang="en-US" sz="1300" dirty="0">
+                <a:solidFill>
+                  <a:srgbClr val="141821"/>
+                </a:solidFill>
+                <a:latin typeface="Calibri" pitchFamily="34" charset="0"/>
+                <a:ea typeface="Calibri" pitchFamily="34" charset="-122"/>
+                <a:cs typeface="Calibri" pitchFamily="34" charset="-120"/>
+              </a:rPr>
+              <a:t>Esperar erosiones en la radiografía para derivar.</a:t>
+            </a:r>
+            <a:endParaRPr lang="en-US" sz="1300" dirty="0"/>
+          </a:p>
+        </p:txBody>
+      </p:sp>
+      <p:sp>
+        <p:nvSpPr>
+          <p:cNvPr id="13" name="Shape 11"/>
           <p:cNvSpPr/>
           <p:nvPr/>
         </p:nvSpPr>
         <p:spPr>
           <a:xfrm>
-            <a:off x="566928" y="1883664"/>
-            <a:ext cx="1554480" cy="292608"/>
+            <a:off x="457200" y="4370832"/>
+            <a:ext cx="8229600" cy="914"/>
           </a:xfrm>
           <a:prstGeom prst="roundRect">
             <a:avLst>
-              <a:gd name="adj" fmla="val 15625"/>
+              <a:gd name="adj" fmla="val 10004376"/>
             </a:avLst>
           </a:prstGeom>
           <a:solidFill>
-            <a:srgbClr val="F2B43C"/>
-          </a:solidFill>
-          <a:ln w="12700">
-            <a:solidFill>
-              <a:srgbClr val="F2B43C"/>
-            </a:solidFill>
-            <a:prstDash val="solid"/>
-          </a:ln>
-        </p:spPr>
-      </p:sp>
-      <p:sp>
-        <p:nvSpPr>
-          <p:cNvPr id="15" name="Text 13"/>
-          <p:cNvSpPr txBox="1"/>
-          <p:nvPr/>
-        </p:nvSpPr>
-        <p:spPr>
-          <a:xfrm>
-            <a:off x="566928" y="1883664"/>
-            <a:ext cx="1554480" cy="292608"/>
-          </a:xfrm>
-          <a:prstGeom prst="rect">
-            <a:avLst/>
-          </a:prstGeom>
-          <a:noFill/>
-          <a:ln/>
-        </p:spPr>
-        <p:txBody>
-          <a:bodyPr wrap="square" lIns="0" tIns="0" rIns="0" bIns="0" rtlCol="0" anchor="ctr"/>
-          <a:lstStyle/>
-          <a:p>
-            <a:pPr algn="ctr" indent="0" marL="0">
-              <a:buNone/>
-            </a:pPr>
-            <a:r>
-              <a:rPr lang="en-US" sz="1250" b="1" dirty="0">
-                <a:solidFill>
-                  <a:srgbClr val="15193A"/>
-                </a:solidFill>
-                <a:latin typeface="Calibri" pitchFamily="34" charset="0"/>
-                <a:ea typeface="Calibri" pitchFamily="34" charset="-122"/>
-                <a:cs typeface="Calibri" pitchFamily="34" charset="-120"/>
-              </a:rPr>
-              <a:t>Mano</a:t>
-            </a:r>
-            <a:endParaRPr lang="en-US" sz="1250" dirty="0"/>
-          </a:p>
-        </p:txBody>
-      </p:sp>
-      <p:sp>
-        <p:nvSpPr>
-          <p:cNvPr id="16" name="Text 14"/>
-          <p:cNvSpPr txBox="1"/>
-          <p:nvPr/>
-        </p:nvSpPr>
-        <p:spPr>
-          <a:xfrm>
-            <a:off x="2286000" y="1801368"/>
-            <a:ext cx="3429000" cy="457200"/>
-          </a:xfrm>
-          <a:prstGeom prst="rect">
-            <a:avLst/>
-          </a:prstGeom>
-          <a:noFill/>
-          <a:ln/>
-        </p:spPr>
-        <p:txBody>
-          <a:bodyPr wrap="square" lIns="0" tIns="0" rIns="0" bIns="0" rtlCol="0" anchor="ctr"/>
-          <a:lstStyle/>
-          <a:p>
-            <a:pPr indent="0" marL="0">
-              <a:buNone/>
-            </a:pPr>
-            <a:r>
-              <a:rPr lang="en-US" sz="1300" dirty="0">
-                <a:solidFill>
-                  <a:srgbClr val="141821"/>
-                </a:solidFill>
-                <a:latin typeface="Calibri" pitchFamily="34" charset="0"/>
-                <a:ea typeface="Calibri" pitchFamily="34" charset="-122"/>
-                <a:cs typeface="Calibri" pitchFamily="34" charset="-120"/>
-              </a:rPr>
-              <a:t>MCF e IFP, simétrico; respeta IFD</a:t>
-            </a:r>
-            <a:endParaRPr lang="en-US" sz="1300" dirty="0"/>
-          </a:p>
-        </p:txBody>
-      </p:sp>
-      <p:sp>
-        <p:nvSpPr>
-          <p:cNvPr id="17" name="Shape 15"/>
-          <p:cNvSpPr/>
-          <p:nvPr/>
-        </p:nvSpPr>
-        <p:spPr>
-          <a:xfrm>
-            <a:off x="5806440" y="2029968"/>
-            <a:ext cx="274320" cy="914"/>
-          </a:xfrm>
-          <a:prstGeom prst="line">
-            <a:avLst/>
-          </a:prstGeom>
-          <a:noFill/>
-          <a:ln w="25400">
-            <a:solidFill>
-              <a:srgbClr val="F2B43C"/>
-            </a:solidFill>
-            <a:prstDash val="solid"/>
-            <a:tailEnd type="triangle"/>
-          </a:ln>
-        </p:spPr>
-      </p:sp>
-      <p:sp>
-        <p:nvSpPr>
-          <p:cNvPr id="18" name="Text 16"/>
-          <p:cNvSpPr txBox="1"/>
-          <p:nvPr/>
-        </p:nvSpPr>
-        <p:spPr>
-          <a:xfrm>
-            <a:off x="6217920" y="1801368"/>
-            <a:ext cx="2423160" cy="457200"/>
-          </a:xfrm>
-          <a:prstGeom prst="rect">
-            <a:avLst/>
-          </a:prstGeom>
-          <a:noFill/>
-          <a:ln/>
-        </p:spPr>
-        <p:txBody>
-          <a:bodyPr wrap="square" lIns="0" tIns="0" rIns="0" bIns="0" rtlCol="0" anchor="ctr"/>
-          <a:lstStyle/>
-          <a:p>
-            <a:pPr indent="0" marL="0">
-              <a:buNone/>
-            </a:pPr>
-            <a:r>
-              <a:rPr lang="en-US" sz="1300" b="1" dirty="0">
-                <a:solidFill>
-                  <a:srgbClr val="A66A00"/>
-                </a:solidFill>
-                <a:latin typeface="Calibri" pitchFamily="34" charset="0"/>
-                <a:ea typeface="Calibri" pitchFamily="34" charset="-122"/>
-                <a:cs typeface="Calibri" pitchFamily="34" charset="-120"/>
-              </a:rPr>
-              <a:t>Distribución de AR</a:t>
-            </a:r>
-            <a:endParaRPr lang="en-US" sz="1300" dirty="0"/>
-          </a:p>
-        </p:txBody>
-      </p:sp>
-      <p:sp>
-        <p:nvSpPr>
-          <p:cNvPr id="19" name="Shape 17"/>
-          <p:cNvSpPr/>
-          <p:nvPr/>
-        </p:nvSpPr>
-        <p:spPr>
-          <a:xfrm>
-            <a:off x="457200" y="2322576"/>
-            <a:ext cx="8229600" cy="457200"/>
-          </a:xfrm>
-          <a:prstGeom prst="roundRect">
-            <a:avLst>
-              <a:gd name="adj" fmla="val 20000"/>
-            </a:avLst>
-          </a:prstGeom>
-          <a:solidFill>
-            <a:srgbClr val="FFFFFF"/>
+            <a:srgbClr val="F2546B">
+              <a:alpha val="10000"/>
+            </a:srgbClr>
           </a:solidFill>
           <a:ln w="19050">
-            <a:solidFill>
-              <a:srgbClr val="2EC4B6"/>
-            </a:solidFill>
-            <a:prstDash val="solid"/>
-          </a:ln>
-        </p:spPr>
-      </p:sp>
-      <p:sp>
-        <p:nvSpPr>
-          <p:cNvPr id="20" name="Shape 18"/>
-          <p:cNvSpPr/>
-          <p:nvPr/>
-        </p:nvSpPr>
-        <p:spPr>
-          <a:xfrm>
-            <a:off x="566928" y="2404872"/>
-            <a:ext cx="1554480" cy="292608"/>
-          </a:xfrm>
-          <a:prstGeom prst="roundRect">
-            <a:avLst>
-              <a:gd name="adj" fmla="val 15625"/>
-            </a:avLst>
-          </a:prstGeom>
-          <a:solidFill>
-            <a:srgbClr val="2EC4B6"/>
-          </a:solidFill>
-          <a:ln w="12700">
-            <a:solidFill>
-              <a:srgbClr val="2EC4B6"/>
-            </a:solidFill>
-            <a:prstDash val="solid"/>
-          </a:ln>
-        </p:spPr>
-      </p:sp>
-      <p:sp>
-        <p:nvSpPr>
-          <p:cNvPr id="21" name="Text 19"/>
-          <p:cNvSpPr txBox="1"/>
-          <p:nvPr/>
-        </p:nvSpPr>
-        <p:spPr>
-          <a:xfrm>
-            <a:off x="566928" y="2404872"/>
-            <a:ext cx="1554480" cy="292608"/>
-          </a:xfrm>
-          <a:prstGeom prst="rect">
-            <a:avLst/>
-          </a:prstGeom>
-          <a:noFill/>
-          <a:ln/>
-        </p:spPr>
-        <p:txBody>
-          <a:bodyPr wrap="square" lIns="0" tIns="0" rIns="0" bIns="0" rtlCol="0" anchor="ctr"/>
-          <a:lstStyle/>
-          <a:p>
-            <a:pPr algn="ctr" indent="0" marL="0">
-              <a:buNone/>
-            </a:pPr>
-            <a:r>
-              <a:rPr lang="en-US" sz="1250" b="1" dirty="0">
-                <a:solidFill>
-                  <a:srgbClr val="15193A"/>
-                </a:solidFill>
-                <a:latin typeface="Calibri" pitchFamily="34" charset="0"/>
-                <a:ea typeface="Calibri" pitchFamily="34" charset="-122"/>
-                <a:cs typeface="Calibri" pitchFamily="34" charset="-120"/>
-              </a:rPr>
-              <a:t>Examen</a:t>
-            </a:r>
-            <a:endParaRPr lang="en-US" sz="1250" dirty="0"/>
-          </a:p>
-        </p:txBody>
-      </p:sp>
-      <p:sp>
-        <p:nvSpPr>
-          <p:cNvPr id="22" name="Text 20"/>
-          <p:cNvSpPr txBox="1"/>
-          <p:nvPr/>
-        </p:nvSpPr>
-        <p:spPr>
-          <a:xfrm>
-            <a:off x="2286000" y="2322576"/>
-            <a:ext cx="3429000" cy="457200"/>
-          </a:xfrm>
-          <a:prstGeom prst="rect">
-            <a:avLst/>
-          </a:prstGeom>
-          <a:noFill/>
-          <a:ln/>
-        </p:spPr>
-        <p:txBody>
-          <a:bodyPr wrap="square" lIns="0" tIns="0" rIns="0" bIns="0" rtlCol="0" anchor="ctr"/>
-          <a:lstStyle/>
-          <a:p>
-            <a:pPr indent="0" marL="0">
-              <a:buNone/>
-            </a:pPr>
-            <a:r>
-              <a:rPr lang="en-US" sz="1300" dirty="0">
-                <a:solidFill>
-                  <a:srgbClr val="141821"/>
-                </a:solidFill>
-                <a:latin typeface="Calibri" pitchFamily="34" charset="0"/>
-                <a:ea typeface="Calibri" pitchFamily="34" charset="-122"/>
-                <a:cs typeface="Calibri" pitchFamily="34" charset="-120"/>
-              </a:rPr>
-              <a:t>Tumefacción blanda; squeeze +</a:t>
-            </a:r>
-            <a:endParaRPr lang="en-US" sz="1300" dirty="0"/>
-          </a:p>
-        </p:txBody>
-      </p:sp>
-      <p:sp>
-        <p:nvSpPr>
-          <p:cNvPr id="23" name="Shape 21"/>
-          <p:cNvSpPr/>
-          <p:nvPr/>
-        </p:nvSpPr>
-        <p:spPr>
-          <a:xfrm>
-            <a:off x="5806440" y="2551176"/>
-            <a:ext cx="274320" cy="914"/>
-          </a:xfrm>
-          <a:prstGeom prst="line">
-            <a:avLst/>
-          </a:prstGeom>
-          <a:noFill/>
-          <a:ln w="25400">
-            <a:solidFill>
-              <a:srgbClr val="2EC4B6"/>
-            </a:solidFill>
-            <a:prstDash val="solid"/>
-            <a:tailEnd type="triangle"/>
-          </a:ln>
-        </p:spPr>
-      </p:sp>
-      <p:sp>
-        <p:nvSpPr>
-          <p:cNvPr id="24" name="Text 22"/>
-          <p:cNvSpPr txBox="1"/>
-          <p:nvPr/>
-        </p:nvSpPr>
-        <p:spPr>
-          <a:xfrm>
-            <a:off x="6217920" y="2322576"/>
-            <a:ext cx="2423160" cy="457200"/>
-          </a:xfrm>
-          <a:prstGeom prst="rect">
-            <a:avLst/>
-          </a:prstGeom>
-          <a:noFill/>
-          <a:ln/>
-        </p:spPr>
-        <p:txBody>
-          <a:bodyPr wrap="square" lIns="0" tIns="0" rIns="0" bIns="0" rtlCol="0" anchor="ctr"/>
-          <a:lstStyle/>
-          <a:p>
-            <a:pPr indent="0" marL="0">
-              <a:buNone/>
-            </a:pPr>
-            <a:r>
-              <a:rPr lang="en-US" sz="1300" b="1" dirty="0">
-                <a:solidFill>
-                  <a:srgbClr val="0C8368"/>
-                </a:solidFill>
-                <a:latin typeface="Calibri" pitchFamily="34" charset="0"/>
-                <a:ea typeface="Calibri" pitchFamily="34" charset="-122"/>
-                <a:cs typeface="Calibri" pitchFamily="34" charset="-120"/>
-              </a:rPr>
-              <a:t>Sinovitis</a:t>
-            </a:r>
-            <a:endParaRPr lang="en-US" sz="1300" dirty="0"/>
-          </a:p>
-        </p:txBody>
-      </p:sp>
-      <p:sp>
-        <p:nvSpPr>
-          <p:cNvPr id="25" name="Shape 23"/>
-          <p:cNvSpPr/>
-          <p:nvPr/>
-        </p:nvSpPr>
-        <p:spPr>
-          <a:xfrm>
-            <a:off x="457200" y="2843784"/>
-            <a:ext cx="8229600" cy="457200"/>
-          </a:xfrm>
-          <a:prstGeom prst="roundRect">
-            <a:avLst>
-              <a:gd name="adj" fmla="val 20000"/>
-            </a:avLst>
-          </a:prstGeom>
-          <a:solidFill>
-            <a:srgbClr val="FFFFFF"/>
-          </a:solidFill>
-          <a:ln w="19050">
-            <a:solidFill>
-              <a:srgbClr val="4CC9F0"/>
-            </a:solidFill>
-            <a:prstDash val="solid"/>
-          </a:ln>
-        </p:spPr>
-      </p:sp>
-      <p:sp>
-        <p:nvSpPr>
-          <p:cNvPr id="26" name="Shape 24"/>
-          <p:cNvSpPr/>
-          <p:nvPr/>
-        </p:nvSpPr>
-        <p:spPr>
-          <a:xfrm>
-            <a:off x="566928" y="2926080"/>
-            <a:ext cx="1554480" cy="292608"/>
-          </a:xfrm>
-          <a:prstGeom prst="roundRect">
-            <a:avLst>
-              <a:gd name="adj" fmla="val 15625"/>
-            </a:avLst>
-          </a:prstGeom>
-          <a:solidFill>
-            <a:srgbClr val="4CC9F0"/>
-          </a:solidFill>
-          <a:ln w="12700">
-            <a:solidFill>
-              <a:srgbClr val="4CC9F0"/>
-            </a:solidFill>
-            <a:prstDash val="solid"/>
-          </a:ln>
-        </p:spPr>
-      </p:sp>
-      <p:sp>
-        <p:nvSpPr>
-          <p:cNvPr id="27" name="Text 25"/>
-          <p:cNvSpPr txBox="1"/>
-          <p:nvPr/>
-        </p:nvSpPr>
-        <p:spPr>
-          <a:xfrm>
-            <a:off x="566928" y="2926080"/>
-            <a:ext cx="1554480" cy="292608"/>
-          </a:xfrm>
-          <a:prstGeom prst="rect">
-            <a:avLst/>
-          </a:prstGeom>
-          <a:noFill/>
-          <a:ln/>
-        </p:spPr>
-        <p:txBody>
-          <a:bodyPr wrap="square" lIns="0" tIns="0" rIns="0" bIns="0" rtlCol="0" anchor="ctr"/>
-          <a:lstStyle/>
-          <a:p>
-            <a:pPr algn="ctr" indent="0" marL="0">
-              <a:buNone/>
-            </a:pPr>
-            <a:r>
-              <a:rPr lang="en-US" sz="1250" b="1" dirty="0">
-                <a:solidFill>
-                  <a:srgbClr val="15193A"/>
-                </a:solidFill>
-                <a:latin typeface="Calibri" pitchFamily="34" charset="0"/>
-                <a:ea typeface="Calibri" pitchFamily="34" charset="-122"/>
-                <a:cs typeface="Calibri" pitchFamily="34" charset="-120"/>
-              </a:rPr>
-              <a:t>Laboratorio</a:t>
-            </a:r>
-            <a:endParaRPr lang="en-US" sz="1250" dirty="0"/>
-          </a:p>
-        </p:txBody>
-      </p:sp>
-      <p:sp>
-        <p:nvSpPr>
-          <p:cNvPr id="28" name="Text 26"/>
-          <p:cNvSpPr txBox="1"/>
-          <p:nvPr/>
-        </p:nvSpPr>
-        <p:spPr>
-          <a:xfrm>
-            <a:off x="2286000" y="2843784"/>
-            <a:ext cx="3429000" cy="457200"/>
-          </a:xfrm>
-          <a:prstGeom prst="rect">
-            <a:avLst/>
-          </a:prstGeom>
-          <a:noFill/>
-          <a:ln/>
-        </p:spPr>
-        <p:txBody>
-          <a:bodyPr wrap="square" lIns="0" tIns="0" rIns="0" bIns="0" rtlCol="0" anchor="ctr"/>
-          <a:lstStyle/>
-          <a:p>
-            <a:pPr indent="0" marL="0">
-              <a:buNone/>
-            </a:pPr>
-            <a:r>
-              <a:rPr lang="en-US" sz="1300" dirty="0">
-                <a:solidFill>
-                  <a:srgbClr val="141821"/>
-                </a:solidFill>
-                <a:latin typeface="Calibri" pitchFamily="34" charset="0"/>
-                <a:ea typeface="Calibri" pitchFamily="34" charset="-122"/>
-                <a:cs typeface="Calibri" pitchFamily="34" charset="-120"/>
-              </a:rPr>
-              <a:t>Anti-CCP positivo</a:t>
-            </a:r>
-            <a:endParaRPr lang="en-US" sz="1300" dirty="0"/>
-          </a:p>
-        </p:txBody>
-      </p:sp>
-      <p:sp>
-        <p:nvSpPr>
-          <p:cNvPr id="29" name="Shape 27"/>
-          <p:cNvSpPr/>
-          <p:nvPr/>
-        </p:nvSpPr>
-        <p:spPr>
-          <a:xfrm>
-            <a:off x="5806440" y="3072384"/>
-            <a:ext cx="274320" cy="914"/>
-          </a:xfrm>
-          <a:prstGeom prst="line">
-            <a:avLst/>
-          </a:prstGeom>
-          <a:noFill/>
-          <a:ln w="25400">
-            <a:solidFill>
-              <a:srgbClr val="4CC9F0"/>
-            </a:solidFill>
-            <a:prstDash val="solid"/>
-            <a:tailEnd type="triangle"/>
-          </a:ln>
-        </p:spPr>
-      </p:sp>
-      <p:sp>
-        <p:nvSpPr>
-          <p:cNvPr id="30" name="Text 28"/>
-          <p:cNvSpPr txBox="1"/>
-          <p:nvPr/>
-        </p:nvSpPr>
-        <p:spPr>
-          <a:xfrm>
-            <a:off x="6217920" y="2843784"/>
-            <a:ext cx="2423160" cy="457200"/>
-          </a:xfrm>
-          <a:prstGeom prst="rect">
-            <a:avLst/>
-          </a:prstGeom>
-          <a:noFill/>
-          <a:ln/>
-        </p:spPr>
-        <p:txBody>
-          <a:bodyPr wrap="square" lIns="0" tIns="0" rIns="0" bIns="0" rtlCol="0" anchor="ctr"/>
-          <a:lstStyle/>
-          <a:p>
-            <a:pPr indent="0" marL="0">
-              <a:buNone/>
-            </a:pPr>
-            <a:r>
-              <a:rPr lang="en-US" sz="1300" b="1" dirty="0">
-                <a:solidFill>
-                  <a:srgbClr val="0A6F98"/>
-                </a:solidFill>
-                <a:latin typeface="Calibri" pitchFamily="34" charset="0"/>
-                <a:ea typeface="Calibri" pitchFamily="34" charset="-122"/>
-                <a:cs typeface="Calibri" pitchFamily="34" charset="-120"/>
-              </a:rPr>
-              <a:t>Muy probable AR</a:t>
-            </a:r>
-            <a:endParaRPr lang="en-US" sz="1300" dirty="0"/>
-          </a:p>
-        </p:txBody>
-      </p:sp>
-      <p:sp>
-        <p:nvSpPr>
-          <p:cNvPr id="31" name="Shape 29"/>
-          <p:cNvSpPr/>
-          <p:nvPr/>
-        </p:nvSpPr>
-        <p:spPr>
-          <a:xfrm>
-            <a:off x="457200" y="3364992"/>
-            <a:ext cx="8229600" cy="457200"/>
-          </a:xfrm>
-          <a:prstGeom prst="roundRect">
-            <a:avLst>
-              <a:gd name="adj" fmla="val 20000"/>
-            </a:avLst>
-          </a:prstGeom>
-          <a:solidFill>
-            <a:srgbClr val="FFFFFF"/>
-          </a:solidFill>
-          <a:ln w="19050">
-            <a:solidFill>
-              <a:srgbClr val="A78BFA"/>
-            </a:solidFill>
-            <a:prstDash val="solid"/>
-          </a:ln>
-        </p:spPr>
-      </p:sp>
-      <p:sp>
-        <p:nvSpPr>
-          <p:cNvPr id="32" name="Shape 30"/>
-          <p:cNvSpPr/>
-          <p:nvPr/>
-        </p:nvSpPr>
-        <p:spPr>
-          <a:xfrm>
-            <a:off x="566928" y="3447288"/>
-            <a:ext cx="1554480" cy="292608"/>
-          </a:xfrm>
-          <a:prstGeom prst="roundRect">
-            <a:avLst>
-              <a:gd name="adj" fmla="val 15625"/>
-            </a:avLst>
-          </a:prstGeom>
-          <a:solidFill>
-            <a:srgbClr val="A78BFA"/>
-          </a:solidFill>
-          <a:ln w="12700">
-            <a:solidFill>
-              <a:srgbClr val="A78BFA"/>
-            </a:solidFill>
-            <a:prstDash val="solid"/>
-          </a:ln>
-        </p:spPr>
-      </p:sp>
-      <p:sp>
-        <p:nvSpPr>
-          <p:cNvPr id="33" name="Text 31"/>
-          <p:cNvSpPr txBox="1"/>
-          <p:nvPr/>
-        </p:nvSpPr>
-        <p:spPr>
-          <a:xfrm>
-            <a:off x="566928" y="3447288"/>
-            <a:ext cx="1554480" cy="292608"/>
-          </a:xfrm>
-          <a:prstGeom prst="rect">
-            <a:avLst/>
-          </a:prstGeom>
-          <a:noFill/>
-          <a:ln/>
-        </p:spPr>
-        <p:txBody>
-          <a:bodyPr wrap="square" lIns="0" tIns="0" rIns="0" bIns="0" rtlCol="0" anchor="ctr"/>
-          <a:lstStyle/>
-          <a:p>
-            <a:pPr algn="ctr" indent="0" marL="0">
-              <a:buNone/>
-            </a:pPr>
-            <a:r>
-              <a:rPr lang="en-US" sz="1250" b="1" dirty="0">
-                <a:solidFill>
-                  <a:srgbClr val="15193A"/>
-                </a:solidFill>
-                <a:latin typeface="Calibri" pitchFamily="34" charset="0"/>
-                <a:ea typeface="Calibri" pitchFamily="34" charset="-122"/>
-                <a:cs typeface="Calibri" pitchFamily="34" charset="-120"/>
-              </a:rPr>
-              <a:t>Imagen</a:t>
-            </a:r>
-            <a:endParaRPr lang="en-US" sz="1250" dirty="0"/>
-          </a:p>
-        </p:txBody>
-      </p:sp>
-      <p:sp>
-        <p:nvSpPr>
-          <p:cNvPr id="34" name="Text 32"/>
-          <p:cNvSpPr txBox="1"/>
-          <p:nvPr/>
-        </p:nvSpPr>
-        <p:spPr>
-          <a:xfrm>
-            <a:off x="2286000" y="3364992"/>
-            <a:ext cx="3429000" cy="457200"/>
-          </a:xfrm>
-          <a:prstGeom prst="rect">
-            <a:avLst/>
-          </a:prstGeom>
-          <a:noFill/>
-          <a:ln/>
-        </p:spPr>
-        <p:txBody>
-          <a:bodyPr wrap="square" lIns="0" tIns="0" rIns="0" bIns="0" rtlCol="0" anchor="ctr"/>
-          <a:lstStyle/>
-          <a:p>
-            <a:pPr indent="0" marL="0">
-              <a:buNone/>
-            </a:pPr>
-            <a:r>
-              <a:rPr lang="en-US" sz="1300" dirty="0">
-                <a:solidFill>
-                  <a:srgbClr val="141821"/>
-                </a:solidFill>
-                <a:latin typeface="Calibri" pitchFamily="34" charset="0"/>
-                <a:ea typeface="Calibri" pitchFamily="34" charset="-122"/>
-                <a:cs typeface="Calibri" pitchFamily="34" charset="-120"/>
-              </a:rPr>
-              <a:t>Ecografía: sinovitis con Doppler</a:t>
-            </a:r>
-            <a:endParaRPr lang="en-US" sz="1300" dirty="0"/>
-          </a:p>
-        </p:txBody>
-      </p:sp>
-      <p:sp>
-        <p:nvSpPr>
-          <p:cNvPr id="35" name="Shape 33"/>
-          <p:cNvSpPr/>
-          <p:nvPr/>
-        </p:nvSpPr>
-        <p:spPr>
-          <a:xfrm>
-            <a:off x="5806440" y="3593592"/>
-            <a:ext cx="274320" cy="914"/>
-          </a:xfrm>
-          <a:prstGeom prst="line">
-            <a:avLst/>
-          </a:prstGeom>
-          <a:noFill/>
-          <a:ln w="25400">
-            <a:solidFill>
-              <a:srgbClr val="A78BFA"/>
-            </a:solidFill>
-            <a:prstDash val="solid"/>
-            <a:tailEnd type="triangle"/>
-          </a:ln>
-        </p:spPr>
-      </p:sp>
-      <p:sp>
-        <p:nvSpPr>
-          <p:cNvPr id="36" name="Text 34"/>
-          <p:cNvSpPr txBox="1"/>
-          <p:nvPr/>
-        </p:nvSpPr>
-        <p:spPr>
-          <a:xfrm>
-            <a:off x="6217920" y="3364992"/>
-            <a:ext cx="2423160" cy="457200"/>
-          </a:xfrm>
-          <a:prstGeom prst="rect">
-            <a:avLst/>
-          </a:prstGeom>
-          <a:noFill/>
-          <a:ln/>
-        </p:spPr>
-        <p:txBody>
-          <a:bodyPr wrap="square" lIns="0" tIns="0" rIns="0" bIns="0" rtlCol="0" anchor="ctr"/>
-          <a:lstStyle/>
-          <a:p>
-            <a:pPr indent="0" marL="0">
-              <a:buNone/>
-            </a:pPr>
-            <a:r>
-              <a:rPr lang="en-US" sz="1300" b="1" dirty="0">
-                <a:solidFill>
-                  <a:srgbClr val="6A4CCF"/>
-                </a:solidFill>
-                <a:latin typeface="Calibri" pitchFamily="34" charset="0"/>
-                <a:ea typeface="Calibri" pitchFamily="34" charset="-122"/>
-                <a:cs typeface="Calibri" pitchFamily="34" charset="-120"/>
-              </a:rPr>
-              <a:t>Inflamación activa</a:t>
-            </a:r>
-            <a:endParaRPr lang="en-US" sz="1300" dirty="0"/>
-          </a:p>
-        </p:txBody>
-      </p:sp>
-      <p:sp>
-        <p:nvSpPr>
-          <p:cNvPr id="37" name="Shape 35"/>
-          <p:cNvSpPr/>
-          <p:nvPr/>
-        </p:nvSpPr>
-        <p:spPr>
-          <a:xfrm>
-            <a:off x="457200" y="3931920"/>
-            <a:ext cx="8229600" cy="420624"/>
-          </a:xfrm>
-          <a:prstGeom prst="roundRect">
-            <a:avLst>
-              <a:gd name="adj" fmla="val 21739"/>
-            </a:avLst>
-          </a:prstGeom>
-          <a:solidFill>
-            <a:srgbClr val="F2546B"/>
-          </a:solidFill>
-          <a:ln w="12700">
             <a:solidFill>
               <a:srgbClr val="F2546B"/>
             </a:solidFill>
@@ -21432,14 +21137,14 @@
       </p:sp>
       <p:sp>
         <p:nvSpPr>
-          <p:cNvPr id="38" name="Text 36"/>
-          <p:cNvSpPr txBox="1"/>
-          <p:nvPr/>
-        </p:nvSpPr>
-        <p:spPr>
-          <a:xfrm>
-            <a:off x="512064" y="3931920"/>
-            <a:ext cx="8119872" cy="420624"/>
+          <p:cNvPr id="14" name="Text 12"/>
+          <p:cNvSpPr txBox="1"/>
+          <p:nvPr/>
+        </p:nvSpPr>
+        <p:spPr>
+          <a:xfrm>
+            <a:off x="512064" y="4370832"/>
+            <a:ext cx="8119872" cy="914"/>
           </a:xfrm>
           <a:prstGeom prst="rect">
             <a:avLst/>
@@ -21454,18 +21159,7 @@
             <a:pPr algn="ctr" indent="0" marL="0">
               <a:buNone/>
             </a:pPr>
-            <a:r>
-              <a:rPr lang="en-US" sz="1450" b="1" dirty="0">
-                <a:solidFill>
-                  <a:srgbClr val="15193A"/>
-                </a:solidFill>
-                <a:latin typeface="Calibri" pitchFamily="34" charset="0"/>
-                <a:ea typeface="Calibri" pitchFamily="34" charset="-122"/>
-                <a:cs typeface="Calibri" pitchFamily="34" charset="-120"/>
-              </a:rPr>
-              <a:t>Sí: es artritis reumatoide temprana → deriva hoy, la ventana está abierta</a:t>
-            </a:r>
-            <a:endParaRPr lang="en-US" sz="1450" dirty="0"/>
+            <a:endParaRPr lang="en-US" sz="100" dirty="0"/>
           </a:p>
         </p:txBody>
       </p:sp>
@@ -21528,6 +21222,1309 @@
 <file path=ppt/slides/slide27.xml><?xml version="1.0" encoding="utf-8"?>
 <p:sld xmlns:a="http://schemas.openxmlformats.org/drawingml/2006/main" xmlns:r="http://schemas.openxmlformats.org/officeDocument/2006/relationships" xmlns:p="http://schemas.openxmlformats.org/presentationml/2006/main">
   <p:cSld name="Slide 27">
+    <p:bg>
+      <p:bgPr>
+        <a:solidFill>
+          <a:srgbClr val="FFFFFF"/>
+        </a:solidFill>
+      </p:bgPr>
+    </p:bg>
+    <p:spTree>
+      <p:nvGrpSpPr>
+        <p:cNvPr id="1" name=""/>
+        <p:cNvGrpSpPr/>
+        <p:nvPr/>
+      </p:nvGrpSpPr>
+      <p:grpSpPr>
+        <a:xfrm>
+          <a:off x="0" y="0"/>
+          <a:ext cx="0" cy="0"/>
+          <a:chOff x="0" y="0"/>
+          <a:chExt cx="0" cy="0"/>
+        </a:xfrm>
+      </p:grpSpPr>
+      <p:sp>
+        <p:nvSpPr>
+          <p:cNvPr id="2" name="Text 0"/>
+          <p:cNvSpPr txBox="1"/>
+          <p:nvPr/>
+        </p:nvSpPr>
+        <p:spPr>
+          <a:xfrm>
+            <a:off x="457200" y="201168"/>
+            <a:ext cx="7863840" cy="274320"/>
+          </a:xfrm>
+          <a:prstGeom prst="rect">
+            <a:avLst/>
+          </a:prstGeom>
+          <a:noFill/>
+          <a:ln/>
+        </p:spPr>
+        <p:txBody>
+          <a:bodyPr wrap="square" lIns="0" tIns="0" rIns="0" bIns="0" rtlCol="0" anchor="ctr"/>
+          <a:lstStyle/>
+          <a:p>
+            <a:pPr indent="0" marL="0">
+              <a:buNone/>
+            </a:pPr>
+            <a:r>
+              <a:rPr lang="en-US" sz="1400" b="1" spc="300" kern="0" dirty="0">
+                <a:solidFill>
+                  <a:srgbClr val="6A4CCF"/>
+                </a:solidFill>
+                <a:latin typeface="Calibri" pitchFamily="34" charset="0"/>
+                <a:ea typeface="Calibri" pitchFamily="34" charset="-122"/>
+                <a:cs typeface="Calibri" pitchFamily="34" charset="-120"/>
+              </a:rPr>
+              <a:t>EL CASO, RESUELTO</a:t>
+            </a:r>
+            <a:endParaRPr lang="en-US" sz="1400" dirty="0"/>
+          </a:p>
+        </p:txBody>
+      </p:sp>
+      <p:sp>
+        <p:nvSpPr>
+          <p:cNvPr id="3" name="Text 1"/>
+          <p:cNvSpPr txBox="1"/>
+          <p:nvPr/>
+        </p:nvSpPr>
+        <p:spPr>
+          <a:xfrm>
+            <a:off x="457200" y="457200"/>
+            <a:ext cx="8229600" cy="658368"/>
+          </a:xfrm>
+          <a:prstGeom prst="rect">
+            <a:avLst/>
+          </a:prstGeom>
+          <a:noFill/>
+          <a:ln/>
+        </p:spPr>
+        <p:txBody>
+          <a:bodyPr wrap="square" lIns="0" tIns="0" rIns="0" bIns="0" rtlCol="0" anchor="ctr"/>
+          <a:lstStyle/>
+          <a:p>
+            <a:pPr indent="0" marL="0">
+              <a:buNone/>
+            </a:pPr>
+            <a:r>
+              <a:rPr lang="en-US" sz="2900" b="1" dirty="0">
+                <a:solidFill>
+                  <a:srgbClr val="141821"/>
+                </a:solidFill>
+                <a:latin typeface="Calibri" pitchFamily="34" charset="0"/>
+                <a:ea typeface="Calibri" pitchFamily="34" charset="-122"/>
+                <a:cs typeface="Calibri" pitchFamily="34" charset="-120"/>
+              </a:rPr>
+              <a:t>La mujer de 56 años, pista a pista</a:t>
+            </a:r>
+            <a:endParaRPr lang="en-US" sz="2900" dirty="0"/>
+          </a:p>
+        </p:txBody>
+      </p:sp>
+      <p:sp>
+        <p:nvSpPr>
+          <p:cNvPr id="4" name="Shape 2"/>
+          <p:cNvSpPr/>
+          <p:nvPr/>
+        </p:nvSpPr>
+        <p:spPr>
+          <a:xfrm>
+            <a:off x="457200" y="4480560"/>
+            <a:ext cx="7589520" cy="0"/>
+          </a:xfrm>
+          <a:prstGeom prst="line">
+            <a:avLst/>
+          </a:prstGeom>
+          <a:noFill/>
+          <a:ln w="9525">
+            <a:solidFill>
+              <a:srgbClr val="C4CCE0"/>
+            </a:solidFill>
+            <a:prstDash val="solid"/>
+          </a:ln>
+        </p:spPr>
+      </p:sp>
+      <p:sp>
+        <p:nvSpPr>
+          <p:cNvPr id="5" name="Text 3"/>
+          <p:cNvSpPr txBox="1"/>
+          <p:nvPr/>
+        </p:nvSpPr>
+        <p:spPr>
+          <a:xfrm>
+            <a:off x="457200" y="4526280"/>
+            <a:ext cx="7635240" cy="548640"/>
+          </a:xfrm>
+          <a:prstGeom prst="rect">
+            <a:avLst/>
+          </a:prstGeom>
+          <a:noFill/>
+          <a:ln/>
+        </p:spPr>
+        <p:txBody>
+          <a:bodyPr wrap="square" lIns="0" tIns="0" rIns="0" bIns="0" rtlCol="0" anchor="ctr"/>
+          <a:lstStyle/>
+          <a:p>
+            <a:pPr indent="0" marL="0">
+              <a:buNone/>
+            </a:pPr>
+            <a:r>
+              <a:rPr lang="en-US" sz="900" dirty="0">
+                <a:solidFill>
+                  <a:srgbClr val="141821"/>
+                </a:solidFill>
+                <a:latin typeface="Calibri" pitchFamily="34" charset="0"/>
+                <a:ea typeface="Calibri" pitchFamily="34" charset="-122"/>
+                <a:cs typeface="Calibri" pitchFamily="34" charset="-120"/>
+              </a:rPr>
+              <a:t>4. Combe B, Landewe R, Daien CI, Hua C, Aletaha D, Alvaro-Gracia JM, et al. 2016 update of the EULAR recommendations for the management of early arthritis. Ann Rheum Dis. 2017;76(6):948-59.</a:t>
+            </a:r>
+            <a:endParaRPr lang="en-US" sz="900" dirty="0"/>
+          </a:p>
+          <a:p>
+            <a:pPr indent="0" marL="0">
+              <a:buNone/>
+            </a:pPr>
+            <a:r>
+              <a:rPr lang="en-US" sz="900" dirty="0">
+                <a:solidFill>
+                  <a:srgbClr val="141821"/>
+                </a:solidFill>
+                <a:latin typeface="Calibri" pitchFamily="34" charset="0"/>
+                <a:ea typeface="Calibri" pitchFamily="34" charset="-122"/>
+                <a:cs typeface="Calibri" pitchFamily="34" charset="-120"/>
+              </a:rPr>
+              <a:t>3. Nishimura K, Sugiyama D, Kogata Y, Tsuji G, Nakazawa T, Kawano S, et al. Meta-analysis: diagnostic accuracy of anti-cyclic citrullinated peptide antibody and rheumatoid factor for rheumatoid arthritis. Ann Intern Med. 2007;146(11):797-808.</a:t>
+            </a:r>
+            <a:endParaRPr lang="en-US" sz="900" dirty="0"/>
+          </a:p>
+        </p:txBody>
+      </p:sp>
+      <p:sp>
+        <p:nvSpPr>
+          <p:cNvPr id="6" name="Shape 4"/>
+          <p:cNvSpPr/>
+          <p:nvPr/>
+        </p:nvSpPr>
+        <p:spPr>
+          <a:xfrm>
+            <a:off x="8247888" y="4535424"/>
+            <a:ext cx="420624" cy="420624"/>
+          </a:xfrm>
+          <a:prstGeom prst="ellipse">
+            <a:avLst/>
+          </a:prstGeom>
+          <a:solidFill>
+            <a:srgbClr val="0A0E1F"/>
+          </a:solidFill>
+          <a:ln w="15875">
+            <a:solidFill>
+              <a:srgbClr val="3A4165"/>
+            </a:solidFill>
+            <a:prstDash val="solid"/>
+          </a:ln>
+        </p:spPr>
+      </p:sp>
+      <p:sp>
+        <p:nvSpPr>
+          <p:cNvPr id="7" name="Shape 5"/>
+          <p:cNvSpPr/>
+          <p:nvPr/>
+        </p:nvSpPr>
+        <p:spPr>
+          <a:xfrm>
+            <a:off x="457200" y="1280160"/>
+            <a:ext cx="8229600" cy="457200"/>
+          </a:xfrm>
+          <a:prstGeom prst="roundRect">
+            <a:avLst>
+              <a:gd name="adj" fmla="val 20000"/>
+            </a:avLst>
+          </a:prstGeom>
+          <a:solidFill>
+            <a:srgbClr val="FFFFFF"/>
+          </a:solidFill>
+          <a:ln w="19050">
+            <a:solidFill>
+              <a:srgbClr val="F2546B"/>
+            </a:solidFill>
+            <a:prstDash val="solid"/>
+          </a:ln>
+        </p:spPr>
+      </p:sp>
+      <p:sp>
+        <p:nvSpPr>
+          <p:cNvPr id="8" name="Shape 6"/>
+          <p:cNvSpPr/>
+          <p:nvPr/>
+        </p:nvSpPr>
+        <p:spPr>
+          <a:xfrm>
+            <a:off x="566928" y="1362456"/>
+            <a:ext cx="1554480" cy="292608"/>
+          </a:xfrm>
+          <a:prstGeom prst="roundRect">
+            <a:avLst>
+              <a:gd name="adj" fmla="val 15625"/>
+            </a:avLst>
+          </a:prstGeom>
+          <a:solidFill>
+            <a:srgbClr val="F2546B"/>
+          </a:solidFill>
+          <a:ln w="12700">
+            <a:solidFill>
+              <a:srgbClr val="F2546B"/>
+            </a:solidFill>
+            <a:prstDash val="solid"/>
+          </a:ln>
+        </p:spPr>
+      </p:sp>
+      <p:sp>
+        <p:nvSpPr>
+          <p:cNvPr id="9" name="Text 7"/>
+          <p:cNvSpPr txBox="1"/>
+          <p:nvPr/>
+        </p:nvSpPr>
+        <p:spPr>
+          <a:xfrm>
+            <a:off x="566928" y="1362456"/>
+            <a:ext cx="1554480" cy="292608"/>
+          </a:xfrm>
+          <a:prstGeom prst="rect">
+            <a:avLst/>
+          </a:prstGeom>
+          <a:noFill/>
+          <a:ln/>
+        </p:spPr>
+        <p:txBody>
+          <a:bodyPr wrap="square" lIns="0" tIns="0" rIns="0" bIns="0" rtlCol="0" anchor="ctr"/>
+          <a:lstStyle/>
+          <a:p>
+            <a:pPr algn="ctr" indent="0" marL="0">
+              <a:buNone/>
+            </a:pPr>
+            <a:r>
+              <a:rPr lang="en-US" sz="1250" b="1" dirty="0">
+                <a:solidFill>
+                  <a:srgbClr val="15193A"/>
+                </a:solidFill>
+                <a:latin typeface="Calibri" pitchFamily="34" charset="0"/>
+                <a:ea typeface="Calibri" pitchFamily="34" charset="-122"/>
+                <a:cs typeface="Calibri" pitchFamily="34" charset="-120"/>
+              </a:rPr>
+              <a:t>Dolor</a:t>
+            </a:r>
+            <a:endParaRPr lang="en-US" sz="1250" dirty="0"/>
+          </a:p>
+        </p:txBody>
+      </p:sp>
+      <p:sp>
+        <p:nvSpPr>
+          <p:cNvPr id="10" name="Text 8"/>
+          <p:cNvSpPr txBox="1"/>
+          <p:nvPr/>
+        </p:nvSpPr>
+        <p:spPr>
+          <a:xfrm>
+            <a:off x="2286000" y="1280160"/>
+            <a:ext cx="3429000" cy="457200"/>
+          </a:xfrm>
+          <a:prstGeom prst="rect">
+            <a:avLst/>
+          </a:prstGeom>
+          <a:noFill/>
+          <a:ln/>
+        </p:spPr>
+        <p:txBody>
+          <a:bodyPr wrap="square" lIns="0" tIns="0" rIns="0" bIns="0" rtlCol="0" anchor="ctr"/>
+          <a:lstStyle/>
+          <a:p>
+            <a:pPr indent="0" marL="0">
+              <a:buNone/>
+            </a:pPr>
+            <a:r>
+              <a:rPr lang="en-US" sz="1300" dirty="0">
+                <a:solidFill>
+                  <a:srgbClr val="141821"/>
+                </a:solidFill>
+                <a:latin typeface="Calibri" pitchFamily="34" charset="0"/>
+                <a:ea typeface="Calibri" pitchFamily="34" charset="-122"/>
+                <a:cs typeface="Calibri" pitchFamily="34" charset="-120"/>
+              </a:rPr>
+              <a:t>Rigidez matutina de ~1 hora</a:t>
+            </a:r>
+            <a:endParaRPr lang="en-US" sz="1300" dirty="0"/>
+          </a:p>
+        </p:txBody>
+      </p:sp>
+      <p:sp>
+        <p:nvSpPr>
+          <p:cNvPr id="11" name="Shape 9"/>
+          <p:cNvSpPr/>
+          <p:nvPr/>
+        </p:nvSpPr>
+        <p:spPr>
+          <a:xfrm>
+            <a:off x="5806440" y="1508760"/>
+            <a:ext cx="274320" cy="914"/>
+          </a:xfrm>
+          <a:prstGeom prst="line">
+            <a:avLst/>
+          </a:prstGeom>
+          <a:noFill/>
+          <a:ln w="25400">
+            <a:solidFill>
+              <a:srgbClr val="F2546B"/>
+            </a:solidFill>
+            <a:prstDash val="solid"/>
+            <a:tailEnd type="triangle"/>
+          </a:ln>
+        </p:spPr>
+      </p:sp>
+      <p:sp>
+        <p:nvSpPr>
+          <p:cNvPr id="12" name="Text 10"/>
+          <p:cNvSpPr txBox="1"/>
+          <p:nvPr/>
+        </p:nvSpPr>
+        <p:spPr>
+          <a:xfrm>
+            <a:off x="6217920" y="1280160"/>
+            <a:ext cx="2423160" cy="457200"/>
+          </a:xfrm>
+          <a:prstGeom prst="rect">
+            <a:avLst/>
+          </a:prstGeom>
+          <a:noFill/>
+          <a:ln/>
+        </p:spPr>
+        <p:txBody>
+          <a:bodyPr wrap="square" lIns="0" tIns="0" rIns="0" bIns="0" rtlCol="0" anchor="ctr"/>
+          <a:lstStyle/>
+          <a:p>
+            <a:pPr indent="0" marL="0">
+              <a:buNone/>
+            </a:pPr>
+            <a:r>
+              <a:rPr lang="en-US" sz="1300" b="1" dirty="0">
+                <a:solidFill>
+                  <a:srgbClr val="C81E43"/>
+                </a:solidFill>
+                <a:latin typeface="Calibri" pitchFamily="34" charset="0"/>
+                <a:ea typeface="Calibri" pitchFamily="34" charset="-122"/>
+                <a:cs typeface="Calibri" pitchFamily="34" charset="-120"/>
+              </a:rPr>
+              <a:t>Patrón inflamatorio</a:t>
+            </a:r>
+            <a:endParaRPr lang="en-US" sz="1300" dirty="0"/>
+          </a:p>
+        </p:txBody>
+      </p:sp>
+      <p:sp>
+        <p:nvSpPr>
+          <p:cNvPr id="13" name="Shape 11"/>
+          <p:cNvSpPr/>
+          <p:nvPr/>
+        </p:nvSpPr>
+        <p:spPr>
+          <a:xfrm>
+            <a:off x="457200" y="1801368"/>
+            <a:ext cx="8229600" cy="457200"/>
+          </a:xfrm>
+          <a:prstGeom prst="roundRect">
+            <a:avLst>
+              <a:gd name="adj" fmla="val 20000"/>
+            </a:avLst>
+          </a:prstGeom>
+          <a:solidFill>
+            <a:srgbClr val="FFFFFF"/>
+          </a:solidFill>
+          <a:ln w="19050">
+            <a:solidFill>
+              <a:srgbClr val="F2B43C"/>
+            </a:solidFill>
+            <a:prstDash val="solid"/>
+          </a:ln>
+        </p:spPr>
+      </p:sp>
+      <p:sp>
+        <p:nvSpPr>
+          <p:cNvPr id="14" name="Shape 12"/>
+          <p:cNvSpPr/>
+          <p:nvPr/>
+        </p:nvSpPr>
+        <p:spPr>
+          <a:xfrm>
+            <a:off x="566928" y="1883664"/>
+            <a:ext cx="1554480" cy="292608"/>
+          </a:xfrm>
+          <a:prstGeom prst="roundRect">
+            <a:avLst>
+              <a:gd name="adj" fmla="val 15625"/>
+            </a:avLst>
+          </a:prstGeom>
+          <a:solidFill>
+            <a:srgbClr val="F2B43C"/>
+          </a:solidFill>
+          <a:ln w="12700">
+            <a:solidFill>
+              <a:srgbClr val="F2B43C"/>
+            </a:solidFill>
+            <a:prstDash val="solid"/>
+          </a:ln>
+        </p:spPr>
+      </p:sp>
+      <p:sp>
+        <p:nvSpPr>
+          <p:cNvPr id="15" name="Text 13"/>
+          <p:cNvSpPr txBox="1"/>
+          <p:nvPr/>
+        </p:nvSpPr>
+        <p:spPr>
+          <a:xfrm>
+            <a:off x="566928" y="1883664"/>
+            <a:ext cx="1554480" cy="292608"/>
+          </a:xfrm>
+          <a:prstGeom prst="rect">
+            <a:avLst/>
+          </a:prstGeom>
+          <a:noFill/>
+          <a:ln/>
+        </p:spPr>
+        <p:txBody>
+          <a:bodyPr wrap="square" lIns="0" tIns="0" rIns="0" bIns="0" rtlCol="0" anchor="ctr"/>
+          <a:lstStyle/>
+          <a:p>
+            <a:pPr algn="ctr" indent="0" marL="0">
+              <a:buNone/>
+            </a:pPr>
+            <a:r>
+              <a:rPr lang="en-US" sz="1250" b="1" dirty="0">
+                <a:solidFill>
+                  <a:srgbClr val="15193A"/>
+                </a:solidFill>
+                <a:latin typeface="Calibri" pitchFamily="34" charset="0"/>
+                <a:ea typeface="Calibri" pitchFamily="34" charset="-122"/>
+                <a:cs typeface="Calibri" pitchFamily="34" charset="-120"/>
+              </a:rPr>
+              <a:t>Mano</a:t>
+            </a:r>
+            <a:endParaRPr lang="en-US" sz="1250" dirty="0"/>
+          </a:p>
+        </p:txBody>
+      </p:sp>
+      <p:sp>
+        <p:nvSpPr>
+          <p:cNvPr id="16" name="Text 14"/>
+          <p:cNvSpPr txBox="1"/>
+          <p:nvPr/>
+        </p:nvSpPr>
+        <p:spPr>
+          <a:xfrm>
+            <a:off x="2286000" y="1801368"/>
+            <a:ext cx="3429000" cy="457200"/>
+          </a:xfrm>
+          <a:prstGeom prst="rect">
+            <a:avLst/>
+          </a:prstGeom>
+          <a:noFill/>
+          <a:ln/>
+        </p:spPr>
+        <p:txBody>
+          <a:bodyPr wrap="square" lIns="0" tIns="0" rIns="0" bIns="0" rtlCol="0" anchor="ctr"/>
+          <a:lstStyle/>
+          <a:p>
+            <a:pPr indent="0" marL="0">
+              <a:buNone/>
+            </a:pPr>
+            <a:r>
+              <a:rPr lang="en-US" sz="1300" dirty="0">
+                <a:solidFill>
+                  <a:srgbClr val="141821"/>
+                </a:solidFill>
+                <a:latin typeface="Calibri" pitchFamily="34" charset="0"/>
+                <a:ea typeface="Calibri" pitchFamily="34" charset="-122"/>
+                <a:cs typeface="Calibri" pitchFamily="34" charset="-120"/>
+              </a:rPr>
+              <a:t>MCF e IFP, simétrico; respeta IFD</a:t>
+            </a:r>
+            <a:endParaRPr lang="en-US" sz="1300" dirty="0"/>
+          </a:p>
+        </p:txBody>
+      </p:sp>
+      <p:sp>
+        <p:nvSpPr>
+          <p:cNvPr id="17" name="Shape 15"/>
+          <p:cNvSpPr/>
+          <p:nvPr/>
+        </p:nvSpPr>
+        <p:spPr>
+          <a:xfrm>
+            <a:off x="5806440" y="2029968"/>
+            <a:ext cx="274320" cy="914"/>
+          </a:xfrm>
+          <a:prstGeom prst="line">
+            <a:avLst/>
+          </a:prstGeom>
+          <a:noFill/>
+          <a:ln w="25400">
+            <a:solidFill>
+              <a:srgbClr val="F2B43C"/>
+            </a:solidFill>
+            <a:prstDash val="solid"/>
+            <a:tailEnd type="triangle"/>
+          </a:ln>
+        </p:spPr>
+      </p:sp>
+      <p:sp>
+        <p:nvSpPr>
+          <p:cNvPr id="18" name="Text 16"/>
+          <p:cNvSpPr txBox="1"/>
+          <p:nvPr/>
+        </p:nvSpPr>
+        <p:spPr>
+          <a:xfrm>
+            <a:off x="6217920" y="1801368"/>
+            <a:ext cx="2423160" cy="457200"/>
+          </a:xfrm>
+          <a:prstGeom prst="rect">
+            <a:avLst/>
+          </a:prstGeom>
+          <a:noFill/>
+          <a:ln/>
+        </p:spPr>
+        <p:txBody>
+          <a:bodyPr wrap="square" lIns="0" tIns="0" rIns="0" bIns="0" rtlCol="0" anchor="ctr"/>
+          <a:lstStyle/>
+          <a:p>
+            <a:pPr indent="0" marL="0">
+              <a:buNone/>
+            </a:pPr>
+            <a:r>
+              <a:rPr lang="en-US" sz="1300" b="1" dirty="0">
+                <a:solidFill>
+                  <a:srgbClr val="A66A00"/>
+                </a:solidFill>
+                <a:latin typeface="Calibri" pitchFamily="34" charset="0"/>
+                <a:ea typeface="Calibri" pitchFamily="34" charset="-122"/>
+                <a:cs typeface="Calibri" pitchFamily="34" charset="-120"/>
+              </a:rPr>
+              <a:t>Distribución de AR</a:t>
+            </a:r>
+            <a:endParaRPr lang="en-US" sz="1300" dirty="0"/>
+          </a:p>
+        </p:txBody>
+      </p:sp>
+      <p:sp>
+        <p:nvSpPr>
+          <p:cNvPr id="19" name="Shape 17"/>
+          <p:cNvSpPr/>
+          <p:nvPr/>
+        </p:nvSpPr>
+        <p:spPr>
+          <a:xfrm>
+            <a:off x="457200" y="2322576"/>
+            <a:ext cx="8229600" cy="457200"/>
+          </a:xfrm>
+          <a:prstGeom prst="roundRect">
+            <a:avLst>
+              <a:gd name="adj" fmla="val 20000"/>
+            </a:avLst>
+          </a:prstGeom>
+          <a:solidFill>
+            <a:srgbClr val="FFFFFF"/>
+          </a:solidFill>
+          <a:ln w="19050">
+            <a:solidFill>
+              <a:srgbClr val="2EC4B6"/>
+            </a:solidFill>
+            <a:prstDash val="solid"/>
+          </a:ln>
+        </p:spPr>
+      </p:sp>
+      <p:sp>
+        <p:nvSpPr>
+          <p:cNvPr id="20" name="Shape 18"/>
+          <p:cNvSpPr/>
+          <p:nvPr/>
+        </p:nvSpPr>
+        <p:spPr>
+          <a:xfrm>
+            <a:off x="566928" y="2404872"/>
+            <a:ext cx="1554480" cy="292608"/>
+          </a:xfrm>
+          <a:prstGeom prst="roundRect">
+            <a:avLst>
+              <a:gd name="adj" fmla="val 15625"/>
+            </a:avLst>
+          </a:prstGeom>
+          <a:solidFill>
+            <a:srgbClr val="2EC4B6"/>
+          </a:solidFill>
+          <a:ln w="12700">
+            <a:solidFill>
+              <a:srgbClr val="2EC4B6"/>
+            </a:solidFill>
+            <a:prstDash val="solid"/>
+          </a:ln>
+        </p:spPr>
+      </p:sp>
+      <p:sp>
+        <p:nvSpPr>
+          <p:cNvPr id="21" name="Text 19"/>
+          <p:cNvSpPr txBox="1"/>
+          <p:nvPr/>
+        </p:nvSpPr>
+        <p:spPr>
+          <a:xfrm>
+            <a:off x="566928" y="2404872"/>
+            <a:ext cx="1554480" cy="292608"/>
+          </a:xfrm>
+          <a:prstGeom prst="rect">
+            <a:avLst/>
+          </a:prstGeom>
+          <a:noFill/>
+          <a:ln/>
+        </p:spPr>
+        <p:txBody>
+          <a:bodyPr wrap="square" lIns="0" tIns="0" rIns="0" bIns="0" rtlCol="0" anchor="ctr"/>
+          <a:lstStyle/>
+          <a:p>
+            <a:pPr algn="ctr" indent="0" marL="0">
+              <a:buNone/>
+            </a:pPr>
+            <a:r>
+              <a:rPr lang="en-US" sz="1250" b="1" dirty="0">
+                <a:solidFill>
+                  <a:srgbClr val="15193A"/>
+                </a:solidFill>
+                <a:latin typeface="Calibri" pitchFamily="34" charset="0"/>
+                <a:ea typeface="Calibri" pitchFamily="34" charset="-122"/>
+                <a:cs typeface="Calibri" pitchFamily="34" charset="-120"/>
+              </a:rPr>
+              <a:t>Examen</a:t>
+            </a:r>
+            <a:endParaRPr lang="en-US" sz="1250" dirty="0"/>
+          </a:p>
+        </p:txBody>
+      </p:sp>
+      <p:sp>
+        <p:nvSpPr>
+          <p:cNvPr id="22" name="Text 20"/>
+          <p:cNvSpPr txBox="1"/>
+          <p:nvPr/>
+        </p:nvSpPr>
+        <p:spPr>
+          <a:xfrm>
+            <a:off x="2286000" y="2322576"/>
+            <a:ext cx="3429000" cy="457200"/>
+          </a:xfrm>
+          <a:prstGeom prst="rect">
+            <a:avLst/>
+          </a:prstGeom>
+          <a:noFill/>
+          <a:ln/>
+        </p:spPr>
+        <p:txBody>
+          <a:bodyPr wrap="square" lIns="0" tIns="0" rIns="0" bIns="0" rtlCol="0" anchor="ctr"/>
+          <a:lstStyle/>
+          <a:p>
+            <a:pPr indent="0" marL="0">
+              <a:buNone/>
+            </a:pPr>
+            <a:r>
+              <a:rPr lang="en-US" sz="1300" dirty="0">
+                <a:solidFill>
+                  <a:srgbClr val="141821"/>
+                </a:solidFill>
+                <a:latin typeface="Calibri" pitchFamily="34" charset="0"/>
+                <a:ea typeface="Calibri" pitchFamily="34" charset="-122"/>
+                <a:cs typeface="Calibri" pitchFamily="34" charset="-120"/>
+              </a:rPr>
+              <a:t>Tumefacción blanda; squeeze +</a:t>
+            </a:r>
+            <a:endParaRPr lang="en-US" sz="1300" dirty="0"/>
+          </a:p>
+        </p:txBody>
+      </p:sp>
+      <p:sp>
+        <p:nvSpPr>
+          <p:cNvPr id="23" name="Shape 21"/>
+          <p:cNvSpPr/>
+          <p:nvPr/>
+        </p:nvSpPr>
+        <p:spPr>
+          <a:xfrm>
+            <a:off x="5806440" y="2551176"/>
+            <a:ext cx="274320" cy="914"/>
+          </a:xfrm>
+          <a:prstGeom prst="line">
+            <a:avLst/>
+          </a:prstGeom>
+          <a:noFill/>
+          <a:ln w="25400">
+            <a:solidFill>
+              <a:srgbClr val="2EC4B6"/>
+            </a:solidFill>
+            <a:prstDash val="solid"/>
+            <a:tailEnd type="triangle"/>
+          </a:ln>
+        </p:spPr>
+      </p:sp>
+      <p:sp>
+        <p:nvSpPr>
+          <p:cNvPr id="24" name="Text 22"/>
+          <p:cNvSpPr txBox="1"/>
+          <p:nvPr/>
+        </p:nvSpPr>
+        <p:spPr>
+          <a:xfrm>
+            <a:off x="6217920" y="2322576"/>
+            <a:ext cx="2423160" cy="457200"/>
+          </a:xfrm>
+          <a:prstGeom prst="rect">
+            <a:avLst/>
+          </a:prstGeom>
+          <a:noFill/>
+          <a:ln/>
+        </p:spPr>
+        <p:txBody>
+          <a:bodyPr wrap="square" lIns="0" tIns="0" rIns="0" bIns="0" rtlCol="0" anchor="ctr"/>
+          <a:lstStyle/>
+          <a:p>
+            <a:pPr indent="0" marL="0">
+              <a:buNone/>
+            </a:pPr>
+            <a:r>
+              <a:rPr lang="en-US" sz="1300" b="1" dirty="0">
+                <a:solidFill>
+                  <a:srgbClr val="0C8368"/>
+                </a:solidFill>
+                <a:latin typeface="Calibri" pitchFamily="34" charset="0"/>
+                <a:ea typeface="Calibri" pitchFamily="34" charset="-122"/>
+                <a:cs typeface="Calibri" pitchFamily="34" charset="-120"/>
+              </a:rPr>
+              <a:t>Sinovitis</a:t>
+            </a:r>
+            <a:endParaRPr lang="en-US" sz="1300" dirty="0"/>
+          </a:p>
+        </p:txBody>
+      </p:sp>
+      <p:sp>
+        <p:nvSpPr>
+          <p:cNvPr id="25" name="Shape 23"/>
+          <p:cNvSpPr/>
+          <p:nvPr/>
+        </p:nvSpPr>
+        <p:spPr>
+          <a:xfrm>
+            <a:off x="457200" y="2843784"/>
+            <a:ext cx="8229600" cy="457200"/>
+          </a:xfrm>
+          <a:prstGeom prst="roundRect">
+            <a:avLst>
+              <a:gd name="adj" fmla="val 20000"/>
+            </a:avLst>
+          </a:prstGeom>
+          <a:solidFill>
+            <a:srgbClr val="FFFFFF"/>
+          </a:solidFill>
+          <a:ln w="19050">
+            <a:solidFill>
+              <a:srgbClr val="4CC9F0"/>
+            </a:solidFill>
+            <a:prstDash val="solid"/>
+          </a:ln>
+        </p:spPr>
+      </p:sp>
+      <p:sp>
+        <p:nvSpPr>
+          <p:cNvPr id="26" name="Shape 24"/>
+          <p:cNvSpPr/>
+          <p:nvPr/>
+        </p:nvSpPr>
+        <p:spPr>
+          <a:xfrm>
+            <a:off x="566928" y="2926080"/>
+            <a:ext cx="1554480" cy="292608"/>
+          </a:xfrm>
+          <a:prstGeom prst="roundRect">
+            <a:avLst>
+              <a:gd name="adj" fmla="val 15625"/>
+            </a:avLst>
+          </a:prstGeom>
+          <a:solidFill>
+            <a:srgbClr val="4CC9F0"/>
+          </a:solidFill>
+          <a:ln w="12700">
+            <a:solidFill>
+              <a:srgbClr val="4CC9F0"/>
+            </a:solidFill>
+            <a:prstDash val="solid"/>
+          </a:ln>
+        </p:spPr>
+      </p:sp>
+      <p:sp>
+        <p:nvSpPr>
+          <p:cNvPr id="27" name="Text 25"/>
+          <p:cNvSpPr txBox="1"/>
+          <p:nvPr/>
+        </p:nvSpPr>
+        <p:spPr>
+          <a:xfrm>
+            <a:off x="566928" y="2926080"/>
+            <a:ext cx="1554480" cy="292608"/>
+          </a:xfrm>
+          <a:prstGeom prst="rect">
+            <a:avLst/>
+          </a:prstGeom>
+          <a:noFill/>
+          <a:ln/>
+        </p:spPr>
+        <p:txBody>
+          <a:bodyPr wrap="square" lIns="0" tIns="0" rIns="0" bIns="0" rtlCol="0" anchor="ctr"/>
+          <a:lstStyle/>
+          <a:p>
+            <a:pPr algn="ctr" indent="0" marL="0">
+              <a:buNone/>
+            </a:pPr>
+            <a:r>
+              <a:rPr lang="en-US" sz="1250" b="1" dirty="0">
+                <a:solidFill>
+                  <a:srgbClr val="15193A"/>
+                </a:solidFill>
+                <a:latin typeface="Calibri" pitchFamily="34" charset="0"/>
+                <a:ea typeface="Calibri" pitchFamily="34" charset="-122"/>
+                <a:cs typeface="Calibri" pitchFamily="34" charset="-120"/>
+              </a:rPr>
+              <a:t>Laboratorio</a:t>
+            </a:r>
+            <a:endParaRPr lang="en-US" sz="1250" dirty="0"/>
+          </a:p>
+        </p:txBody>
+      </p:sp>
+      <p:sp>
+        <p:nvSpPr>
+          <p:cNvPr id="28" name="Text 26"/>
+          <p:cNvSpPr txBox="1"/>
+          <p:nvPr/>
+        </p:nvSpPr>
+        <p:spPr>
+          <a:xfrm>
+            <a:off x="2286000" y="2843784"/>
+            <a:ext cx="3429000" cy="457200"/>
+          </a:xfrm>
+          <a:prstGeom prst="rect">
+            <a:avLst/>
+          </a:prstGeom>
+          <a:noFill/>
+          <a:ln/>
+        </p:spPr>
+        <p:txBody>
+          <a:bodyPr wrap="square" lIns="0" tIns="0" rIns="0" bIns="0" rtlCol="0" anchor="ctr"/>
+          <a:lstStyle/>
+          <a:p>
+            <a:pPr indent="0" marL="0">
+              <a:buNone/>
+            </a:pPr>
+            <a:r>
+              <a:rPr lang="en-US" sz="1300" dirty="0">
+                <a:solidFill>
+                  <a:srgbClr val="141821"/>
+                </a:solidFill>
+                <a:latin typeface="Calibri" pitchFamily="34" charset="0"/>
+                <a:ea typeface="Calibri" pitchFamily="34" charset="-122"/>
+                <a:cs typeface="Calibri" pitchFamily="34" charset="-120"/>
+              </a:rPr>
+              <a:t>Anti-CCP positivo</a:t>
+            </a:r>
+            <a:endParaRPr lang="en-US" sz="1300" dirty="0"/>
+          </a:p>
+        </p:txBody>
+      </p:sp>
+      <p:sp>
+        <p:nvSpPr>
+          <p:cNvPr id="29" name="Shape 27"/>
+          <p:cNvSpPr/>
+          <p:nvPr/>
+        </p:nvSpPr>
+        <p:spPr>
+          <a:xfrm>
+            <a:off x="5806440" y="3072384"/>
+            <a:ext cx="274320" cy="914"/>
+          </a:xfrm>
+          <a:prstGeom prst="line">
+            <a:avLst/>
+          </a:prstGeom>
+          <a:noFill/>
+          <a:ln w="25400">
+            <a:solidFill>
+              <a:srgbClr val="4CC9F0"/>
+            </a:solidFill>
+            <a:prstDash val="solid"/>
+            <a:tailEnd type="triangle"/>
+          </a:ln>
+        </p:spPr>
+      </p:sp>
+      <p:sp>
+        <p:nvSpPr>
+          <p:cNvPr id="30" name="Text 28"/>
+          <p:cNvSpPr txBox="1"/>
+          <p:nvPr/>
+        </p:nvSpPr>
+        <p:spPr>
+          <a:xfrm>
+            <a:off x="6217920" y="2843784"/>
+            <a:ext cx="2423160" cy="457200"/>
+          </a:xfrm>
+          <a:prstGeom prst="rect">
+            <a:avLst/>
+          </a:prstGeom>
+          <a:noFill/>
+          <a:ln/>
+        </p:spPr>
+        <p:txBody>
+          <a:bodyPr wrap="square" lIns="0" tIns="0" rIns="0" bIns="0" rtlCol="0" anchor="ctr"/>
+          <a:lstStyle/>
+          <a:p>
+            <a:pPr indent="0" marL="0">
+              <a:buNone/>
+            </a:pPr>
+            <a:r>
+              <a:rPr lang="en-US" sz="1300" b="1" dirty="0">
+                <a:solidFill>
+                  <a:srgbClr val="0A6F98"/>
+                </a:solidFill>
+                <a:latin typeface="Calibri" pitchFamily="34" charset="0"/>
+                <a:ea typeface="Calibri" pitchFamily="34" charset="-122"/>
+                <a:cs typeface="Calibri" pitchFamily="34" charset="-120"/>
+              </a:rPr>
+              <a:t>Muy probable AR</a:t>
+            </a:r>
+            <a:endParaRPr lang="en-US" sz="1300" dirty="0"/>
+          </a:p>
+        </p:txBody>
+      </p:sp>
+      <p:sp>
+        <p:nvSpPr>
+          <p:cNvPr id="31" name="Shape 29"/>
+          <p:cNvSpPr/>
+          <p:nvPr/>
+        </p:nvSpPr>
+        <p:spPr>
+          <a:xfrm>
+            <a:off x="457200" y="3364992"/>
+            <a:ext cx="8229600" cy="457200"/>
+          </a:xfrm>
+          <a:prstGeom prst="roundRect">
+            <a:avLst>
+              <a:gd name="adj" fmla="val 20000"/>
+            </a:avLst>
+          </a:prstGeom>
+          <a:solidFill>
+            <a:srgbClr val="FFFFFF"/>
+          </a:solidFill>
+          <a:ln w="19050">
+            <a:solidFill>
+              <a:srgbClr val="A78BFA"/>
+            </a:solidFill>
+            <a:prstDash val="solid"/>
+          </a:ln>
+        </p:spPr>
+      </p:sp>
+      <p:sp>
+        <p:nvSpPr>
+          <p:cNvPr id="32" name="Shape 30"/>
+          <p:cNvSpPr/>
+          <p:nvPr/>
+        </p:nvSpPr>
+        <p:spPr>
+          <a:xfrm>
+            <a:off x="566928" y="3447288"/>
+            <a:ext cx="1554480" cy="292608"/>
+          </a:xfrm>
+          <a:prstGeom prst="roundRect">
+            <a:avLst>
+              <a:gd name="adj" fmla="val 15625"/>
+            </a:avLst>
+          </a:prstGeom>
+          <a:solidFill>
+            <a:srgbClr val="A78BFA"/>
+          </a:solidFill>
+          <a:ln w="12700">
+            <a:solidFill>
+              <a:srgbClr val="A78BFA"/>
+            </a:solidFill>
+            <a:prstDash val="solid"/>
+          </a:ln>
+        </p:spPr>
+      </p:sp>
+      <p:sp>
+        <p:nvSpPr>
+          <p:cNvPr id="33" name="Text 31"/>
+          <p:cNvSpPr txBox="1"/>
+          <p:nvPr/>
+        </p:nvSpPr>
+        <p:spPr>
+          <a:xfrm>
+            <a:off x="566928" y="3447288"/>
+            <a:ext cx="1554480" cy="292608"/>
+          </a:xfrm>
+          <a:prstGeom prst="rect">
+            <a:avLst/>
+          </a:prstGeom>
+          <a:noFill/>
+          <a:ln/>
+        </p:spPr>
+        <p:txBody>
+          <a:bodyPr wrap="square" lIns="0" tIns="0" rIns="0" bIns="0" rtlCol="0" anchor="ctr"/>
+          <a:lstStyle/>
+          <a:p>
+            <a:pPr algn="ctr" indent="0" marL="0">
+              <a:buNone/>
+            </a:pPr>
+            <a:r>
+              <a:rPr lang="en-US" sz="1250" b="1" dirty="0">
+                <a:solidFill>
+                  <a:srgbClr val="15193A"/>
+                </a:solidFill>
+                <a:latin typeface="Calibri" pitchFamily="34" charset="0"/>
+                <a:ea typeface="Calibri" pitchFamily="34" charset="-122"/>
+                <a:cs typeface="Calibri" pitchFamily="34" charset="-120"/>
+              </a:rPr>
+              <a:t>Imagen</a:t>
+            </a:r>
+            <a:endParaRPr lang="en-US" sz="1250" dirty="0"/>
+          </a:p>
+        </p:txBody>
+      </p:sp>
+      <p:sp>
+        <p:nvSpPr>
+          <p:cNvPr id="34" name="Text 32"/>
+          <p:cNvSpPr txBox="1"/>
+          <p:nvPr/>
+        </p:nvSpPr>
+        <p:spPr>
+          <a:xfrm>
+            <a:off x="2286000" y="3364992"/>
+            <a:ext cx="3429000" cy="457200"/>
+          </a:xfrm>
+          <a:prstGeom prst="rect">
+            <a:avLst/>
+          </a:prstGeom>
+          <a:noFill/>
+          <a:ln/>
+        </p:spPr>
+        <p:txBody>
+          <a:bodyPr wrap="square" lIns="0" tIns="0" rIns="0" bIns="0" rtlCol="0" anchor="ctr"/>
+          <a:lstStyle/>
+          <a:p>
+            <a:pPr indent="0" marL="0">
+              <a:buNone/>
+            </a:pPr>
+            <a:r>
+              <a:rPr lang="en-US" sz="1300" dirty="0">
+                <a:solidFill>
+                  <a:srgbClr val="141821"/>
+                </a:solidFill>
+                <a:latin typeface="Calibri" pitchFamily="34" charset="0"/>
+                <a:ea typeface="Calibri" pitchFamily="34" charset="-122"/>
+                <a:cs typeface="Calibri" pitchFamily="34" charset="-120"/>
+              </a:rPr>
+              <a:t>Ecografía: sinovitis con Doppler</a:t>
+            </a:r>
+            <a:endParaRPr lang="en-US" sz="1300" dirty="0"/>
+          </a:p>
+        </p:txBody>
+      </p:sp>
+      <p:sp>
+        <p:nvSpPr>
+          <p:cNvPr id="35" name="Shape 33"/>
+          <p:cNvSpPr/>
+          <p:nvPr/>
+        </p:nvSpPr>
+        <p:spPr>
+          <a:xfrm>
+            <a:off x="5806440" y="3593592"/>
+            <a:ext cx="274320" cy="914"/>
+          </a:xfrm>
+          <a:prstGeom prst="line">
+            <a:avLst/>
+          </a:prstGeom>
+          <a:noFill/>
+          <a:ln w="25400">
+            <a:solidFill>
+              <a:srgbClr val="A78BFA"/>
+            </a:solidFill>
+            <a:prstDash val="solid"/>
+            <a:tailEnd type="triangle"/>
+          </a:ln>
+        </p:spPr>
+      </p:sp>
+      <p:sp>
+        <p:nvSpPr>
+          <p:cNvPr id="36" name="Text 34"/>
+          <p:cNvSpPr txBox="1"/>
+          <p:nvPr/>
+        </p:nvSpPr>
+        <p:spPr>
+          <a:xfrm>
+            <a:off x="6217920" y="3364992"/>
+            <a:ext cx="2423160" cy="457200"/>
+          </a:xfrm>
+          <a:prstGeom prst="rect">
+            <a:avLst/>
+          </a:prstGeom>
+          <a:noFill/>
+          <a:ln/>
+        </p:spPr>
+        <p:txBody>
+          <a:bodyPr wrap="square" lIns="0" tIns="0" rIns="0" bIns="0" rtlCol="0" anchor="ctr"/>
+          <a:lstStyle/>
+          <a:p>
+            <a:pPr indent="0" marL="0">
+              <a:buNone/>
+            </a:pPr>
+            <a:r>
+              <a:rPr lang="en-US" sz="1300" b="1" dirty="0">
+                <a:solidFill>
+                  <a:srgbClr val="6A4CCF"/>
+                </a:solidFill>
+                <a:latin typeface="Calibri" pitchFamily="34" charset="0"/>
+                <a:ea typeface="Calibri" pitchFamily="34" charset="-122"/>
+                <a:cs typeface="Calibri" pitchFamily="34" charset="-120"/>
+              </a:rPr>
+              <a:t>Inflamación activa</a:t>
+            </a:r>
+            <a:endParaRPr lang="en-US" sz="1300" dirty="0"/>
+          </a:p>
+        </p:txBody>
+      </p:sp>
+      <p:sp>
+        <p:nvSpPr>
+          <p:cNvPr id="37" name="Shape 35"/>
+          <p:cNvSpPr/>
+          <p:nvPr/>
+        </p:nvSpPr>
+        <p:spPr>
+          <a:xfrm>
+            <a:off x="457200" y="3931920"/>
+            <a:ext cx="8229600" cy="420624"/>
+          </a:xfrm>
+          <a:prstGeom prst="roundRect">
+            <a:avLst>
+              <a:gd name="adj" fmla="val 21739"/>
+            </a:avLst>
+          </a:prstGeom>
+          <a:solidFill>
+            <a:srgbClr val="F2546B"/>
+          </a:solidFill>
+          <a:ln w="12700">
+            <a:solidFill>
+              <a:srgbClr val="F2546B"/>
+            </a:solidFill>
+            <a:prstDash val="solid"/>
+          </a:ln>
+        </p:spPr>
+      </p:sp>
+      <p:sp>
+        <p:nvSpPr>
+          <p:cNvPr id="38" name="Text 36"/>
+          <p:cNvSpPr txBox="1"/>
+          <p:nvPr/>
+        </p:nvSpPr>
+        <p:spPr>
+          <a:xfrm>
+            <a:off x="512064" y="3931920"/>
+            <a:ext cx="8119872" cy="420624"/>
+          </a:xfrm>
+          <a:prstGeom prst="rect">
+            <a:avLst/>
+          </a:prstGeom>
+          <a:noFill/>
+          <a:ln/>
+        </p:spPr>
+        <p:txBody>
+          <a:bodyPr wrap="square" lIns="0" tIns="0" rIns="0" bIns="0" rtlCol="0" anchor="ctr"/>
+          <a:lstStyle/>
+          <a:p>
+            <a:pPr algn="ctr" indent="0" marL="0">
+              <a:buNone/>
+            </a:pPr>
+            <a:r>
+              <a:rPr lang="en-US" sz="1450" b="1" dirty="0">
+                <a:solidFill>
+                  <a:srgbClr val="15193A"/>
+                </a:solidFill>
+                <a:latin typeface="Calibri" pitchFamily="34" charset="0"/>
+                <a:ea typeface="Calibri" pitchFamily="34" charset="-122"/>
+                <a:cs typeface="Calibri" pitchFamily="34" charset="-120"/>
+              </a:rPr>
+              <a:t>Sí: es artritis reumatoide temprana → deriva hoy, la ventana está abierta</a:t>
+            </a:r>
+            <a:endParaRPr lang="en-US" sz="1450" dirty="0"/>
+          </a:p>
+        </p:txBody>
+      </p:sp>
+      <p:sp>
+        <p:nvSpPr>
+          <p:cNvPr id="25" name="Slide Number Placeholder 0"/>
+          <p:cNvSpPr>
+            <a:spLocks noGrp="1"/>
+          </p:cNvSpPr>
+          <p:nvPr>
+            <p:ph type="sldNum" sz="quarter" idx="4294967295"/>
+          </p:nvPr>
+        </p:nvSpPr>
+        <p:spPr>
+          <a:xfrm>
+            <a:off x="8247888" y="4535424"/>
+            <a:ext cx="420624" cy="420624"/>
+          </a:xfrm>
+          <a:prstGeom prst="rect">
+            <a:avLst/>
+          </a:prstGeom>
+          <a:extLst>
+            <a:ext uri="{C572A759-6A51-4108-AA02-DFA0A04FC94B}">
+              <ma14:wrappingTextBoxFlag xmlns:ma14="http://schemas.microsoft.com/office/mac/drawingml/2011/main" val="0"/>
+            </a:ext>
+          </a:extLst>
+        </p:spPr>
+        <p:txBody>
+          <a:bodyPr anchor="ctr"/>
+          <a:lstStyle>
+            <a:lvl1pPr>
+              <a:defRPr sz="1800">
+                <a:solidFill>
+                  <a:srgbClr val="FFFFFF"/>
+                </a:solidFill>
+                <a:latin typeface="Calibri"/>
+                <a:ea typeface="Calibri"/>
+                <a:cs typeface="Calibri"/>
+              </a:defRPr>
+            </a:lvl1pPr>
+          </a:lstStyle>
+          <a:p>
+            <a:pPr algn="ctr"/>
+            <a:fld id="{F7021451-1387-4CA6-816F-3879F97B5CBC}" type="slidenum">
+              <a:rPr b="1" lang="en-US"/>
+              <a:t>27</a:t>
+            </a:fld>
+            <a:endParaRPr lang="en-US"/>
+          </a:p>
+        </p:txBody>
+      </p:sp>
+    </p:spTree>
+  </p:cSld>
+  <p:clrMapOvr>
+    <a:masterClrMapping/>
+  </p:clrMapOvr>
+</p:sld>
+</file>
+
+<file path=ppt/slides/slide28.xml><?xml version="1.0" encoding="utf-8"?>
+<p:sld xmlns:a="http://schemas.openxmlformats.org/drawingml/2006/main" xmlns:r="http://schemas.openxmlformats.org/officeDocument/2006/relationships" xmlns:p="http://schemas.openxmlformats.org/presentationml/2006/main">
+  <p:cSld name="Slide 28">
     <p:bg>
       <p:bgPr>
         <a:solidFill>
@@ -21757,7 +22754,7 @@
             <a:pPr algn="ctr"/>
             <a:fld id="{F7021451-1387-4CA6-816F-3879F97B5CBC}" type="slidenum">
               <a:rPr b="1" lang="en-US"/>
-              <a:t>27</a:t>
+              <a:t>28</a:t>
             </a:fld>
             <a:endParaRPr lang="en-US"/>
           </a:p>
@@ -21771,9 +22768,9 @@
 </p:sld>
 </file>
 
-<file path=ppt/slides/slide28.xml><?xml version="1.0" encoding="utf-8"?>
+<file path=ppt/slides/slide29.xml><?xml version="1.0" encoding="utf-8"?>
 <p:sld xmlns:a="http://schemas.openxmlformats.org/drawingml/2006/main" xmlns:r="http://schemas.openxmlformats.org/officeDocument/2006/relationships" xmlns:p="http://schemas.openxmlformats.org/presentationml/2006/main">
-  <p:cSld name="Slide 28">
+  <p:cSld name="Slide 29">
     <p:bg>
       <p:bgPr>
         <a:solidFill>
@@ -22244,7 +23241,7 @@
             <a:pPr algn="ctr"/>
             <a:fld id="{F7021451-1387-4CA6-816F-3879F97B5CBC}" type="slidenum">
               <a:rPr b="1" lang="en-US"/>
-              <a:t>28</a:t>
+              <a:t>29</a:t>
             </a:fld>
             <a:endParaRPr lang="en-US"/>
           </a:p>
